--- a/EEFN_Data_Pipeline.pptx
+++ b/EEFN_Data_Pipeline.pptx
@@ -5,25 +5,25 @@
     <p:sldMasterId id="2147483648" r:id="rId1"/>
   </p:sldMasterIdLst>
   <p:sldIdLst>
-    <p:sldId id="256" r:id="rId7"/>
-    <p:sldId id="257" r:id="rId8"/>
-    <p:sldId id="258" r:id="rId9"/>
-    <p:sldId id="259" r:id="rId10"/>
-    <p:sldId id="260" r:id="rId11"/>
-    <p:sldId id="261" r:id="rId12"/>
-    <p:sldId id="262" r:id="rId13"/>
-    <p:sldId id="263" r:id="rId14"/>
-    <p:sldId id="264" r:id="rId15"/>
-    <p:sldId id="265" r:id="rId16"/>
-    <p:sldId id="266" r:id="rId17"/>
-    <p:sldId id="267" r:id="rId18"/>
-    <p:sldId id="268" r:id="rId19"/>
-    <p:sldId id="269" r:id="rId20"/>
-    <p:sldId id="270" r:id="rId21"/>
-    <p:sldId id="271" r:id="rId22"/>
-    <p:sldId id="272" r:id="rId23"/>
+    <p:sldId id="256" r:id="rId2"/>
+    <p:sldId id="257" r:id="rId3"/>
+    <p:sldId id="258" r:id="rId4"/>
+    <p:sldId id="259" r:id="rId5"/>
+    <p:sldId id="260" r:id="rId6"/>
+    <p:sldId id="261" r:id="rId7"/>
+    <p:sldId id="262" r:id="rId8"/>
+    <p:sldId id="263" r:id="rId9"/>
+    <p:sldId id="264" r:id="rId10"/>
+    <p:sldId id="265" r:id="rId11"/>
+    <p:sldId id="266" r:id="rId12"/>
+    <p:sldId id="267" r:id="rId13"/>
+    <p:sldId id="268" r:id="rId14"/>
+    <p:sldId id="269" r:id="rId15"/>
+    <p:sldId id="270" r:id="rId16"/>
+    <p:sldId id="271" r:id="rId17"/>
+    <p:sldId id="272" r:id="rId18"/>
   </p:sldIdLst>
-  <p:sldSz cx="12191695" cy="6858000" type="screen4x3"/>
+  <p:sldSz cx="12192000" cy="6858000"/>
   <p:notesSz cx="6858000" cy="9144000"/>
   <p:defaultTextStyle>
     <a:defPPr>
@@ -120,6 +120,22 @@
       </a:defRPr>
     </a:lvl9pPr>
   </p:defaultTextStyle>
+  <p:extLst>
+    <p:ext uri="{EFAFB233-063F-42B5-8137-9DF3F51BA10A}">
+      <p15:sldGuideLst xmlns:p15="http://schemas.microsoft.com/office/powerpoint/2012/main">
+        <p15:guide id="1" orient="horz" pos="2160">
+          <p15:clr>
+            <a:srgbClr val="A4A3A4"/>
+          </p15:clr>
+        </p15:guide>
+        <p15:guide id="2" pos="2880">
+          <p15:clr>
+            <a:srgbClr val="A4A3A4"/>
+          </p15:clr>
+        </p15:guide>
+      </p15:sldGuideLst>
+    </p:ext>
+  </p:extLst>
 </p:presentation>
 </file>
 
@@ -161,10 +177,9 @@
           <a:lstStyle/>
           <a:p>
             <a:r>
-              <a:rPr lang="en-US" smtClean="0"/>
+              <a:rPr lang="en-US"/>
               <a:t>Click to edit Master title style</a:t>
             </a:r>
-            <a:endParaRPr lang="en-US"/>
           </a:p>
         </p:txBody>
       </p:sp>
@@ -280,10 +295,9 @@
           </a:lstStyle>
           <a:p>
             <a:r>
-              <a:rPr lang="en-US" smtClean="0"/>
+              <a:rPr lang="en-US"/>
               <a:t>Click to edit Master subtitle style</a:t>
             </a:r>
-            <a:endParaRPr lang="en-US"/>
           </a:p>
         </p:txBody>
       </p:sp>
@@ -304,7 +318,7 @@
           <a:p>
             <a:fld id="{5BCAD085-E8A6-8845-BD4E-CB4CCA059FC4}" type="datetimeFigureOut">
               <a:rPr lang="en-US" smtClean="0"/>
-              <a:t>1/27/13</a:t>
+              <a:t>8/19/2026</a:t>
             </a:fld>
             <a:endParaRPr lang="en-US"/>
           </a:p>
@@ -398,10 +412,9 @@
           <a:lstStyle/>
           <a:p>
             <a:r>
-              <a:rPr lang="en-US" smtClean="0"/>
+              <a:rPr lang="en-US"/>
               <a:t>Click to edit Master title style</a:t>
             </a:r>
-            <a:endParaRPr lang="en-US"/>
           </a:p>
         </p:txBody>
       </p:sp>
@@ -422,38 +435,37 @@
           <a:p>
             <a:pPr lvl="0"/>
             <a:r>
-              <a:rPr lang="en-US" smtClean="0"/>
+              <a:rPr lang="en-US"/>
               <a:t>Click to edit Master text styles</a:t>
             </a:r>
           </a:p>
           <a:p>
             <a:pPr lvl="1"/>
             <a:r>
-              <a:rPr lang="en-US" smtClean="0"/>
+              <a:rPr lang="en-US"/>
               <a:t>Second level</a:t>
             </a:r>
           </a:p>
           <a:p>
             <a:pPr lvl="2"/>
             <a:r>
-              <a:rPr lang="en-US" smtClean="0"/>
+              <a:rPr lang="en-US"/>
               <a:t>Third level</a:t>
             </a:r>
           </a:p>
           <a:p>
             <a:pPr lvl="3"/>
             <a:r>
-              <a:rPr lang="en-US" smtClean="0"/>
+              <a:rPr lang="en-US"/>
               <a:t>Fourth level</a:t>
             </a:r>
           </a:p>
           <a:p>
             <a:pPr lvl="4"/>
             <a:r>
-              <a:rPr lang="en-US" smtClean="0"/>
+              <a:rPr lang="en-US"/>
               <a:t>Fifth level</a:t>
             </a:r>
-            <a:endParaRPr lang="en-US"/>
           </a:p>
         </p:txBody>
       </p:sp>
@@ -474,7 +486,7 @@
           <a:p>
             <a:fld id="{5BCAD085-E8A6-8845-BD4E-CB4CCA059FC4}" type="datetimeFigureOut">
               <a:rPr lang="en-US" smtClean="0"/>
-              <a:t>1/27/13</a:t>
+              <a:t>8/19/2026</a:t>
             </a:fld>
             <a:endParaRPr lang="en-US"/>
           </a:p>
@@ -573,10 +585,9 @@
           <a:lstStyle/>
           <a:p>
             <a:r>
-              <a:rPr lang="en-US" smtClean="0"/>
+              <a:rPr lang="en-US"/>
               <a:t>Click to edit Master title style</a:t>
             </a:r>
-            <a:endParaRPr lang="en-US"/>
           </a:p>
         </p:txBody>
       </p:sp>
@@ -602,38 +613,37 @@
           <a:p>
             <a:pPr lvl="0"/>
             <a:r>
-              <a:rPr lang="en-US" smtClean="0"/>
+              <a:rPr lang="en-US"/>
               <a:t>Click to edit Master text styles</a:t>
             </a:r>
           </a:p>
           <a:p>
             <a:pPr lvl="1"/>
             <a:r>
-              <a:rPr lang="en-US" smtClean="0"/>
+              <a:rPr lang="en-US"/>
               <a:t>Second level</a:t>
             </a:r>
           </a:p>
           <a:p>
             <a:pPr lvl="2"/>
             <a:r>
-              <a:rPr lang="en-US" smtClean="0"/>
+              <a:rPr lang="en-US"/>
               <a:t>Third level</a:t>
             </a:r>
           </a:p>
           <a:p>
             <a:pPr lvl="3"/>
             <a:r>
-              <a:rPr lang="en-US" smtClean="0"/>
+              <a:rPr lang="en-US"/>
               <a:t>Fourth level</a:t>
             </a:r>
           </a:p>
           <a:p>
             <a:pPr lvl="4"/>
             <a:r>
-              <a:rPr lang="en-US" smtClean="0"/>
+              <a:rPr lang="en-US"/>
               <a:t>Fifth level</a:t>
             </a:r>
-            <a:endParaRPr lang="en-US"/>
           </a:p>
         </p:txBody>
       </p:sp>
@@ -654,7 +664,7 @@
           <a:p>
             <a:fld id="{5BCAD085-E8A6-8845-BD4E-CB4CCA059FC4}" type="datetimeFigureOut">
               <a:rPr lang="en-US" smtClean="0"/>
-              <a:t>1/27/13</a:t>
+              <a:t>8/19/2026</a:t>
             </a:fld>
             <a:endParaRPr lang="en-US"/>
           </a:p>
@@ -748,10 +758,9 @@
           <a:lstStyle/>
           <a:p>
             <a:r>
-              <a:rPr lang="en-US" smtClean="0"/>
+              <a:rPr lang="en-US"/>
               <a:t>Click to edit Master title style</a:t>
             </a:r>
-            <a:endParaRPr lang="en-US"/>
           </a:p>
         </p:txBody>
       </p:sp>
@@ -772,38 +781,37 @@
           <a:p>
             <a:pPr lvl="0"/>
             <a:r>
-              <a:rPr lang="en-US" smtClean="0"/>
+              <a:rPr lang="en-US"/>
               <a:t>Click to edit Master text styles</a:t>
             </a:r>
           </a:p>
           <a:p>
             <a:pPr lvl="1"/>
             <a:r>
-              <a:rPr lang="en-US" smtClean="0"/>
+              <a:rPr lang="en-US"/>
               <a:t>Second level</a:t>
             </a:r>
           </a:p>
           <a:p>
             <a:pPr lvl="2"/>
             <a:r>
-              <a:rPr lang="en-US" smtClean="0"/>
+              <a:rPr lang="en-US"/>
               <a:t>Third level</a:t>
             </a:r>
           </a:p>
           <a:p>
             <a:pPr lvl="3"/>
             <a:r>
-              <a:rPr lang="en-US" smtClean="0"/>
+              <a:rPr lang="en-US"/>
               <a:t>Fourth level</a:t>
             </a:r>
           </a:p>
           <a:p>
             <a:pPr lvl="4"/>
             <a:r>
-              <a:rPr lang="en-US" smtClean="0"/>
+              <a:rPr lang="en-US"/>
               <a:t>Fifth level</a:t>
             </a:r>
-            <a:endParaRPr lang="en-US"/>
           </a:p>
         </p:txBody>
       </p:sp>
@@ -824,7 +832,7 @@
           <a:p>
             <a:fld id="{5BCAD085-E8A6-8845-BD4E-CB4CCA059FC4}" type="datetimeFigureOut">
               <a:rPr lang="en-US" smtClean="0"/>
-              <a:t>1/27/13</a:t>
+              <a:t>8/19/2026</a:t>
             </a:fld>
             <a:endParaRPr lang="en-US"/>
           </a:p>
@@ -927,10 +935,9 @@
           </a:lstStyle>
           <a:p>
             <a:r>
-              <a:rPr lang="en-US" smtClean="0"/>
+              <a:rPr lang="en-US"/>
               <a:t>Click to edit Master title style</a:t>
             </a:r>
-            <a:endParaRPr lang="en-US"/>
           </a:p>
         </p:txBody>
       </p:sp>
@@ -1047,7 +1054,7 @@
           <a:p>
             <a:pPr lvl="0"/>
             <a:r>
-              <a:rPr lang="en-US" smtClean="0"/>
+              <a:rPr lang="en-US"/>
               <a:t>Click to edit Master text styles</a:t>
             </a:r>
           </a:p>
@@ -1070,7 +1077,7 @@
           <a:p>
             <a:fld id="{5BCAD085-E8A6-8845-BD4E-CB4CCA059FC4}" type="datetimeFigureOut">
               <a:rPr lang="en-US" smtClean="0"/>
-              <a:t>1/27/13</a:t>
+              <a:t>8/19/2026</a:t>
             </a:fld>
             <a:endParaRPr lang="en-US"/>
           </a:p>
@@ -1164,10 +1171,9 @@
           <a:lstStyle/>
           <a:p>
             <a:r>
-              <a:rPr lang="en-US" smtClean="0"/>
+              <a:rPr lang="en-US"/>
               <a:t>Click to edit Master title style</a:t>
             </a:r>
-            <a:endParaRPr lang="en-US"/>
           </a:p>
         </p:txBody>
       </p:sp>
@@ -1221,38 +1227,37 @@
           <a:p>
             <a:pPr lvl="0"/>
             <a:r>
-              <a:rPr lang="en-US" smtClean="0"/>
+              <a:rPr lang="en-US"/>
               <a:t>Click to edit Master text styles</a:t>
             </a:r>
           </a:p>
           <a:p>
             <a:pPr lvl="1"/>
             <a:r>
-              <a:rPr lang="en-US" smtClean="0"/>
+              <a:rPr lang="en-US"/>
               <a:t>Second level</a:t>
             </a:r>
           </a:p>
           <a:p>
             <a:pPr lvl="2"/>
             <a:r>
-              <a:rPr lang="en-US" smtClean="0"/>
+              <a:rPr lang="en-US"/>
               <a:t>Third level</a:t>
             </a:r>
           </a:p>
           <a:p>
             <a:pPr lvl="3"/>
             <a:r>
-              <a:rPr lang="en-US" smtClean="0"/>
+              <a:rPr lang="en-US"/>
               <a:t>Fourth level</a:t>
             </a:r>
           </a:p>
           <a:p>
             <a:pPr lvl="4"/>
             <a:r>
-              <a:rPr lang="en-US" smtClean="0"/>
+              <a:rPr lang="en-US"/>
               <a:t>Fifth level</a:t>
             </a:r>
-            <a:endParaRPr lang="en-US"/>
           </a:p>
         </p:txBody>
       </p:sp>
@@ -1306,38 +1311,37 @@
           <a:p>
             <a:pPr lvl="0"/>
             <a:r>
-              <a:rPr lang="en-US" smtClean="0"/>
+              <a:rPr lang="en-US"/>
               <a:t>Click to edit Master text styles</a:t>
             </a:r>
           </a:p>
           <a:p>
             <a:pPr lvl="1"/>
             <a:r>
-              <a:rPr lang="en-US" smtClean="0"/>
+              <a:rPr lang="en-US"/>
               <a:t>Second level</a:t>
             </a:r>
           </a:p>
           <a:p>
             <a:pPr lvl="2"/>
             <a:r>
-              <a:rPr lang="en-US" smtClean="0"/>
+              <a:rPr lang="en-US"/>
               <a:t>Third level</a:t>
             </a:r>
           </a:p>
           <a:p>
             <a:pPr lvl="3"/>
             <a:r>
-              <a:rPr lang="en-US" smtClean="0"/>
+              <a:rPr lang="en-US"/>
               <a:t>Fourth level</a:t>
             </a:r>
           </a:p>
           <a:p>
             <a:pPr lvl="4"/>
             <a:r>
-              <a:rPr lang="en-US" smtClean="0"/>
+              <a:rPr lang="en-US"/>
               <a:t>Fifth level</a:t>
             </a:r>
-            <a:endParaRPr lang="en-US"/>
           </a:p>
         </p:txBody>
       </p:sp>
@@ -1358,7 +1362,7 @@
           <a:p>
             <a:fld id="{5BCAD085-E8A6-8845-BD4E-CB4CCA059FC4}" type="datetimeFigureOut">
               <a:rPr lang="en-US" smtClean="0"/>
-              <a:t>1/27/13</a:t>
+              <a:t>8/19/2026</a:t>
             </a:fld>
             <a:endParaRPr lang="en-US"/>
           </a:p>
@@ -1456,10 +1460,9 @@
           </a:lstStyle>
           <a:p>
             <a:r>
-              <a:rPr lang="en-US" smtClean="0"/>
+              <a:rPr lang="en-US"/>
               <a:t>Click to edit Master title style</a:t>
             </a:r>
-            <a:endParaRPr lang="en-US"/>
           </a:p>
         </p:txBody>
       </p:sp>
@@ -1522,7 +1525,7 @@
           <a:p>
             <a:pPr lvl="0"/>
             <a:r>
-              <a:rPr lang="en-US" smtClean="0"/>
+              <a:rPr lang="en-US"/>
               <a:t>Click to edit Master text styles</a:t>
             </a:r>
           </a:p>
@@ -1578,38 +1581,37 @@
           <a:p>
             <a:pPr lvl="0"/>
             <a:r>
-              <a:rPr lang="en-US" smtClean="0"/>
+              <a:rPr lang="en-US"/>
               <a:t>Click to edit Master text styles</a:t>
             </a:r>
           </a:p>
           <a:p>
             <a:pPr lvl="1"/>
             <a:r>
-              <a:rPr lang="en-US" smtClean="0"/>
+              <a:rPr lang="en-US"/>
               <a:t>Second level</a:t>
             </a:r>
           </a:p>
           <a:p>
             <a:pPr lvl="2"/>
             <a:r>
-              <a:rPr lang="en-US" smtClean="0"/>
+              <a:rPr lang="en-US"/>
               <a:t>Third level</a:t>
             </a:r>
           </a:p>
           <a:p>
             <a:pPr lvl="3"/>
             <a:r>
-              <a:rPr lang="en-US" smtClean="0"/>
+              <a:rPr lang="en-US"/>
               <a:t>Fourth level</a:t>
             </a:r>
           </a:p>
           <a:p>
             <a:pPr lvl="4"/>
             <a:r>
-              <a:rPr lang="en-US" smtClean="0"/>
+              <a:rPr lang="en-US"/>
               <a:t>Fifth level</a:t>
             </a:r>
-            <a:endParaRPr lang="en-US"/>
           </a:p>
         </p:txBody>
       </p:sp>
@@ -1672,7 +1674,7 @@
           <a:p>
             <a:pPr lvl="0"/>
             <a:r>
-              <a:rPr lang="en-US" smtClean="0"/>
+              <a:rPr lang="en-US"/>
               <a:t>Click to edit Master text styles</a:t>
             </a:r>
           </a:p>
@@ -1728,38 +1730,37 @@
           <a:p>
             <a:pPr lvl="0"/>
             <a:r>
-              <a:rPr lang="en-US" smtClean="0"/>
+              <a:rPr lang="en-US"/>
               <a:t>Click to edit Master text styles</a:t>
             </a:r>
           </a:p>
           <a:p>
             <a:pPr lvl="1"/>
             <a:r>
-              <a:rPr lang="en-US" smtClean="0"/>
+              <a:rPr lang="en-US"/>
               <a:t>Second level</a:t>
             </a:r>
           </a:p>
           <a:p>
             <a:pPr lvl="2"/>
             <a:r>
-              <a:rPr lang="en-US" smtClean="0"/>
+              <a:rPr lang="en-US"/>
               <a:t>Third level</a:t>
             </a:r>
           </a:p>
           <a:p>
             <a:pPr lvl="3"/>
             <a:r>
-              <a:rPr lang="en-US" smtClean="0"/>
+              <a:rPr lang="en-US"/>
               <a:t>Fourth level</a:t>
             </a:r>
           </a:p>
           <a:p>
             <a:pPr lvl="4"/>
             <a:r>
-              <a:rPr lang="en-US" smtClean="0"/>
+              <a:rPr lang="en-US"/>
               <a:t>Fifth level</a:t>
             </a:r>
-            <a:endParaRPr lang="en-US"/>
           </a:p>
         </p:txBody>
       </p:sp>
@@ -1780,7 +1781,7 @@
           <a:p>
             <a:fld id="{5BCAD085-E8A6-8845-BD4E-CB4CCA059FC4}" type="datetimeFigureOut">
               <a:rPr lang="en-US" smtClean="0"/>
-              <a:t>1/27/13</a:t>
+              <a:t>8/19/2026</a:t>
             </a:fld>
             <a:endParaRPr lang="en-US"/>
           </a:p>
@@ -1874,10 +1875,9 @@
           <a:lstStyle/>
           <a:p>
             <a:r>
-              <a:rPr lang="en-US" smtClean="0"/>
+              <a:rPr lang="en-US"/>
               <a:t>Click to edit Master title style</a:t>
             </a:r>
-            <a:endParaRPr lang="en-US"/>
           </a:p>
         </p:txBody>
       </p:sp>
@@ -1898,7 +1898,7 @@
           <a:p>
             <a:fld id="{5BCAD085-E8A6-8845-BD4E-CB4CCA059FC4}" type="datetimeFigureOut">
               <a:rPr lang="en-US" smtClean="0"/>
-              <a:t>1/27/13</a:t>
+              <a:t>8/19/2026</a:t>
             </a:fld>
             <a:endParaRPr lang="en-US"/>
           </a:p>
@@ -1993,7 +1993,7 @@
           <a:p>
             <a:fld id="{5BCAD085-E8A6-8845-BD4E-CB4CCA059FC4}" type="datetimeFigureOut">
               <a:rPr lang="en-US" smtClean="0"/>
-              <a:t>1/27/13</a:t>
+              <a:t>8/19/2026</a:t>
             </a:fld>
             <a:endParaRPr lang="en-US"/>
           </a:p>
@@ -2096,10 +2096,9 @@
           </a:lstStyle>
           <a:p>
             <a:r>
-              <a:rPr lang="en-US" smtClean="0"/>
+              <a:rPr lang="en-US"/>
               <a:t>Click to edit Master title style</a:t>
             </a:r>
-            <a:endParaRPr lang="en-US"/>
           </a:p>
         </p:txBody>
       </p:sp>
@@ -2153,38 +2152,37 @@
           <a:p>
             <a:pPr lvl="0"/>
             <a:r>
-              <a:rPr lang="en-US" smtClean="0"/>
+              <a:rPr lang="en-US"/>
               <a:t>Click to edit Master text styles</a:t>
             </a:r>
           </a:p>
           <a:p>
             <a:pPr lvl="1"/>
             <a:r>
-              <a:rPr lang="en-US" smtClean="0"/>
+              <a:rPr lang="en-US"/>
               <a:t>Second level</a:t>
             </a:r>
           </a:p>
           <a:p>
             <a:pPr lvl="2"/>
             <a:r>
-              <a:rPr lang="en-US" smtClean="0"/>
+              <a:rPr lang="en-US"/>
               <a:t>Third level</a:t>
             </a:r>
           </a:p>
           <a:p>
             <a:pPr lvl="3"/>
             <a:r>
-              <a:rPr lang="en-US" smtClean="0"/>
+              <a:rPr lang="en-US"/>
               <a:t>Fourth level</a:t>
             </a:r>
           </a:p>
           <a:p>
             <a:pPr lvl="4"/>
             <a:r>
-              <a:rPr lang="en-US" smtClean="0"/>
+              <a:rPr lang="en-US"/>
               <a:t>Fifth level</a:t>
             </a:r>
-            <a:endParaRPr lang="en-US"/>
           </a:p>
         </p:txBody>
       </p:sp>
@@ -2247,7 +2245,7 @@
           <a:p>
             <a:pPr lvl="0"/>
             <a:r>
-              <a:rPr lang="en-US" smtClean="0"/>
+              <a:rPr lang="en-US"/>
               <a:t>Click to edit Master text styles</a:t>
             </a:r>
           </a:p>
@@ -2270,7 +2268,7 @@
           <a:p>
             <a:fld id="{5BCAD085-E8A6-8845-BD4E-CB4CCA059FC4}" type="datetimeFigureOut">
               <a:rPr lang="en-US" smtClean="0"/>
-              <a:t>1/27/13</a:t>
+              <a:t>8/19/2026</a:t>
             </a:fld>
             <a:endParaRPr lang="en-US"/>
           </a:p>
@@ -2373,10 +2371,9 @@
           </a:lstStyle>
           <a:p>
             <a:r>
-              <a:rPr lang="en-US" smtClean="0"/>
+              <a:rPr lang="en-US"/>
               <a:t>Click to edit Master title style</a:t>
             </a:r>
-            <a:endParaRPr lang="en-US"/>
           </a:p>
         </p:txBody>
       </p:sp>
@@ -2500,7 +2497,7 @@
           <a:p>
             <a:pPr lvl="0"/>
             <a:r>
-              <a:rPr lang="en-US" smtClean="0"/>
+              <a:rPr lang="en-US"/>
               <a:t>Click to edit Master text styles</a:t>
             </a:r>
           </a:p>
@@ -2523,7 +2520,7 @@
           <a:p>
             <a:fld id="{5BCAD085-E8A6-8845-BD4E-CB4CCA059FC4}" type="datetimeFigureOut">
               <a:rPr lang="en-US" smtClean="0"/>
-              <a:t>1/27/13</a:t>
+              <a:t>8/19/2026</a:t>
             </a:fld>
             <a:endParaRPr lang="en-US"/>
           </a:p>
@@ -2632,10 +2629,9 @@
           <a:lstStyle/>
           <a:p>
             <a:r>
-              <a:rPr lang="en-US" smtClean="0"/>
+              <a:rPr lang="en-US"/>
               <a:t>Click to edit Master title style</a:t>
             </a:r>
-            <a:endParaRPr lang="en-US"/>
           </a:p>
         </p:txBody>
       </p:sp>
@@ -2666,38 +2662,37 @@
           <a:p>
             <a:pPr lvl="0"/>
             <a:r>
-              <a:rPr lang="en-US" smtClean="0"/>
+              <a:rPr lang="en-US"/>
               <a:t>Click to edit Master text styles</a:t>
             </a:r>
           </a:p>
           <a:p>
             <a:pPr lvl="1"/>
             <a:r>
-              <a:rPr lang="en-US" smtClean="0"/>
+              <a:rPr lang="en-US"/>
               <a:t>Second level</a:t>
             </a:r>
           </a:p>
           <a:p>
             <a:pPr lvl="2"/>
             <a:r>
-              <a:rPr lang="en-US" smtClean="0"/>
+              <a:rPr lang="en-US"/>
               <a:t>Third level</a:t>
             </a:r>
           </a:p>
           <a:p>
             <a:pPr lvl="3"/>
             <a:r>
-              <a:rPr lang="en-US" smtClean="0"/>
+              <a:rPr lang="en-US"/>
               <a:t>Fourth level</a:t>
             </a:r>
           </a:p>
           <a:p>
             <a:pPr lvl="4"/>
             <a:r>
-              <a:rPr lang="en-US" smtClean="0"/>
+              <a:rPr lang="en-US"/>
               <a:t>Fifth level</a:t>
             </a:r>
-            <a:endParaRPr lang="en-US"/>
           </a:p>
         </p:txBody>
       </p:sp>
@@ -2736,7 +2731,7 @@
           <a:p>
             <a:fld id="{5BCAD085-E8A6-8845-BD4E-CB4CCA059FC4}" type="datetimeFigureOut">
               <a:rPr lang="en-US" smtClean="0"/>
-              <a:t>1/27/13</a:t>
+              <a:t>8/19/2026</a:t>
             </a:fld>
             <a:endParaRPr lang="en-US"/>
           </a:p>
@@ -3095,7 +3090,7 @@
 </file>
 
 <file path=ppt/slides/slide1.xml><?xml version="1.0" encoding="utf-8"?>
-<p:sld xmlns:a="http://schemas.openxmlformats.org/drawingml/2006/main" xmlns:p="http://schemas.openxmlformats.org/presentationml/2006/main" xmlns:r="http://schemas.openxmlformats.org/officeDocument/2006/relationships">
+<p:sld xmlns:a="http://schemas.openxmlformats.org/drawingml/2006/main" xmlns:r="http://schemas.openxmlformats.org/officeDocument/2006/relationships" xmlns:p="http://schemas.openxmlformats.org/presentationml/2006/main">
   <p:cSld>
     <p:bg>
       <p:bgPr>
@@ -3111,7 +3106,14 @@
         <p:cNvGrpSpPr/>
         <p:nvPr/>
       </p:nvGrpSpPr>
-      <p:grpSpPr/>
+      <p:grpSpPr>
+        <a:xfrm>
+          <a:off x="0" y="0"/>
+          <a:ext cx="0" cy="0"/>
+          <a:chOff x="0" y="0"/>
+          <a:chExt cx="0" cy="0"/>
+        </a:xfrm>
+      </p:grpSpPr>
       <p:sp>
         <p:nvSpPr>
           <p:cNvPr id="2" name="TextBox 1"/>
@@ -3129,7 +3131,7 @@
           <a:noFill/>
         </p:spPr>
         <p:txBody>
-          <a:bodyPr wrap="square" lIns="0" rIns="0" tIns="0" bIns="0">
+          <a:bodyPr wrap="square" lIns="0" tIns="0" rIns="0" bIns="0">
             <a:spAutoFit/>
           </a:bodyPr>
           <a:lstStyle/>
@@ -3168,7 +3170,7 @@
           <a:noFill/>
         </p:spPr>
         <p:txBody>
-          <a:bodyPr wrap="square" lIns="0" rIns="0" tIns="0" bIns="0">
+          <a:bodyPr wrap="square" lIns="0" tIns="0" rIns="0" bIns="0">
             <a:spAutoFit/>
           </a:bodyPr>
           <a:lstStyle/>
@@ -3207,7 +3209,7 @@
           <a:noFill/>
         </p:spPr>
         <p:txBody>
-          <a:bodyPr wrap="square" lIns="0" rIns="0" tIns="0" bIns="0">
+          <a:bodyPr wrap="square" lIns="0" tIns="0" rIns="0" bIns="0">
             <a:spAutoFit/>
           </a:bodyPr>
           <a:lstStyle/>
@@ -3246,7 +3248,7 @@
           <a:noFill/>
         </p:spPr>
         <p:txBody>
-          <a:bodyPr wrap="square" lIns="0" rIns="0" tIns="0" bIns="0">
+          <a:bodyPr wrap="square" lIns="0" tIns="0" rIns="0" bIns="0">
             <a:spAutoFit/>
           </a:bodyPr>
           <a:lstStyle/>
@@ -3285,7 +3287,7 @@
           <a:noFill/>
         </p:spPr>
         <p:txBody>
-          <a:bodyPr wrap="square" lIns="0" rIns="0" tIns="0" bIns="0">
+          <a:bodyPr wrap="square" lIns="0" tIns="0" rIns="0" bIns="0">
             <a:spAutoFit/>
           </a:bodyPr>
           <a:lstStyle/>
@@ -3324,7 +3326,7 @@
           <a:noFill/>
         </p:spPr>
         <p:txBody>
-          <a:bodyPr wrap="square" lIns="0" rIns="0" tIns="0" bIns="0">
+          <a:bodyPr wrap="square" lIns="0" tIns="0" rIns="0" bIns="0">
             <a:spAutoFit/>
           </a:bodyPr>
           <a:lstStyle/>
@@ -3363,7 +3365,7 @@
           <a:noFill/>
         </p:spPr>
         <p:txBody>
-          <a:bodyPr wrap="square" lIns="0" rIns="0" tIns="0" bIns="0">
+          <a:bodyPr wrap="square" lIns="0" tIns="0" rIns="0" bIns="0">
             <a:spAutoFit/>
           </a:bodyPr>
           <a:lstStyle/>
@@ -3402,7 +3404,7 @@
           <a:noFill/>
         </p:spPr>
         <p:txBody>
-          <a:bodyPr wrap="square" lIns="0" rIns="0" tIns="0" bIns="0">
+          <a:bodyPr wrap="square" lIns="0" tIns="0" rIns="0" bIns="0">
             <a:spAutoFit/>
           </a:bodyPr>
           <a:lstStyle/>
@@ -3441,7 +3443,7 @@
           <a:noFill/>
         </p:spPr>
         <p:txBody>
-          <a:bodyPr wrap="square" lIns="0" rIns="0" tIns="0" bIns="0">
+          <a:bodyPr wrap="square" lIns="0" tIns="0" rIns="0" bIns="0">
             <a:spAutoFit/>
           </a:bodyPr>
           <a:lstStyle/>
@@ -3480,7 +3482,7 @@
           <a:noFill/>
         </p:spPr>
         <p:txBody>
-          <a:bodyPr wrap="square" lIns="0" rIns="0" tIns="0" bIns="0">
+          <a:bodyPr wrap="square" lIns="0" tIns="0" rIns="0" bIns="0">
             <a:spAutoFit/>
           </a:bodyPr>
           <a:lstStyle/>
@@ -3519,7 +3521,7 @@
           <a:noFill/>
         </p:spPr>
         <p:txBody>
-          <a:bodyPr wrap="square" lIns="0" rIns="0" tIns="0" bIns="0">
+          <a:bodyPr wrap="square" lIns="0" tIns="0" rIns="0" bIns="0">
             <a:spAutoFit/>
           </a:bodyPr>
           <a:lstStyle/>
@@ -3550,7 +3552,7 @@
 </file>
 
 <file path=ppt/slides/slide10.xml><?xml version="1.0" encoding="utf-8"?>
-<p:sld xmlns:a="http://schemas.openxmlformats.org/drawingml/2006/main" xmlns:p="http://schemas.openxmlformats.org/presentationml/2006/main" xmlns:r="http://schemas.openxmlformats.org/officeDocument/2006/relationships">
+<p:sld xmlns:a="http://schemas.openxmlformats.org/drawingml/2006/main" xmlns:r="http://schemas.openxmlformats.org/officeDocument/2006/relationships" xmlns:p="http://schemas.openxmlformats.org/presentationml/2006/main">
   <p:cSld>
     <p:bg>
       <p:bgPr>
@@ -3566,7 +3568,14 @@
         <p:cNvGrpSpPr/>
         <p:nvPr/>
       </p:nvGrpSpPr>
-      <p:grpSpPr/>
+      <p:grpSpPr>
+        <a:xfrm>
+          <a:off x="0" y="0"/>
+          <a:ext cx="0" cy="0"/>
+          <a:chOff x="0" y="0"/>
+          <a:chExt cx="0" cy="0"/>
+        </a:xfrm>
+      </p:grpSpPr>
       <p:sp>
         <p:nvSpPr>
           <p:cNvPr id="2" name="TextBox 1"/>
@@ -3584,7 +3593,7 @@
           <a:noFill/>
         </p:spPr>
         <p:txBody>
-          <a:bodyPr wrap="square" lIns="0" rIns="0" tIns="0" bIns="0">
+          <a:bodyPr wrap="square" lIns="0" tIns="0" rIns="0" bIns="0">
             <a:spAutoFit/>
           </a:bodyPr>
           <a:lstStyle/>
@@ -3623,7 +3632,7 @@
           <a:noFill/>
         </p:spPr>
         <p:txBody>
-          <a:bodyPr wrap="square" lIns="0" rIns="0" tIns="0" bIns="0">
+          <a:bodyPr wrap="square" lIns="0" tIns="0" rIns="0" bIns="0">
             <a:spAutoFit/>
           </a:bodyPr>
           <a:lstStyle/>
@@ -3684,7 +3693,7 @@
           </a:fontRef>
         </p:style>
         <p:txBody>
-          <a:bodyPr rtlCol="0" anchor="ctr" tIns="54864" bIns="54864" wrap="none"/>
+          <a:bodyPr wrap="none" tIns="54864" bIns="54864" rtlCol="0" anchor="ctr"/>
           <a:lstStyle/>
           <a:p>
             <a:pPr algn="ctr"/>
@@ -3717,7 +3726,7 @@
           <a:noFill/>
         </p:spPr>
         <p:txBody>
-          <a:bodyPr wrap="none" lIns="0" rIns="0" tIns="0" bIns="0" anchor="ctr">
+          <a:bodyPr wrap="none" lIns="0" tIns="0" rIns="0" bIns="0" anchor="ctr">
             <a:spAutoFit/>
           </a:bodyPr>
           <a:lstStyle/>
@@ -3778,7 +3787,7 @@
           </a:fontRef>
         </p:style>
         <p:txBody>
-          <a:bodyPr rtlCol="0" anchor="ctr" tIns="54864" bIns="54864" wrap="none"/>
+          <a:bodyPr wrap="none" tIns="54864" bIns="54864" rtlCol="0" anchor="ctr"/>
           <a:lstStyle/>
           <a:p>
             <a:pPr algn="ctr"/>
@@ -3811,7 +3820,7 @@
           <a:noFill/>
         </p:spPr>
         <p:txBody>
-          <a:bodyPr wrap="none" lIns="0" rIns="0" tIns="0" bIns="0" anchor="ctr">
+          <a:bodyPr wrap="none" lIns="0" tIns="0" rIns="0" bIns="0" anchor="ctr">
             <a:spAutoFit/>
           </a:bodyPr>
           <a:lstStyle/>
@@ -3872,7 +3881,7 @@
           </a:fontRef>
         </p:style>
         <p:txBody>
-          <a:bodyPr rtlCol="0" anchor="ctr" tIns="54864" bIns="54864" wrap="none"/>
+          <a:bodyPr wrap="none" tIns="54864" bIns="54864" rtlCol="0" anchor="ctr"/>
           <a:lstStyle/>
           <a:p>
             <a:pPr algn="ctr"/>
@@ -3905,7 +3914,7 @@
           <a:noFill/>
         </p:spPr>
         <p:txBody>
-          <a:bodyPr wrap="none" lIns="0" rIns="0" tIns="0" bIns="0" anchor="ctr">
+          <a:bodyPr wrap="none" lIns="0" tIns="0" rIns="0" bIns="0" anchor="ctr">
             <a:spAutoFit/>
           </a:bodyPr>
           <a:lstStyle/>
@@ -3966,7 +3975,7 @@
           </a:fontRef>
         </p:style>
         <p:txBody>
-          <a:bodyPr rtlCol="0" anchor="ctr" tIns="54864" bIns="54864" wrap="none"/>
+          <a:bodyPr wrap="none" tIns="54864" bIns="54864" rtlCol="0" anchor="ctr"/>
           <a:lstStyle/>
           <a:p>
             <a:pPr algn="ctr"/>
@@ -3999,7 +4008,7 @@
           <a:noFill/>
         </p:spPr>
         <p:txBody>
-          <a:bodyPr wrap="none" lIns="0" rIns="0" tIns="0" bIns="0" anchor="ctr">
+          <a:bodyPr wrap="none" lIns="0" tIns="0" rIns="0" bIns="0" anchor="ctr">
             <a:spAutoFit/>
           </a:bodyPr>
           <a:lstStyle/>
@@ -4060,7 +4069,7 @@
           </a:fontRef>
         </p:style>
         <p:txBody>
-          <a:bodyPr rtlCol="0" anchor="ctr" tIns="54864" bIns="54864" wrap="none"/>
+          <a:bodyPr wrap="none" tIns="54864" bIns="54864" rtlCol="0" anchor="ctr"/>
           <a:lstStyle/>
           <a:p>
             <a:pPr algn="ctr"/>
@@ -4093,7 +4102,7 @@
           <a:noFill/>
         </p:spPr>
         <p:txBody>
-          <a:bodyPr wrap="none" lIns="0" rIns="0" tIns="0" bIns="0" anchor="ctr">
+          <a:bodyPr wrap="none" lIns="0" tIns="0" rIns="0" bIns="0" anchor="ctr">
             <a:spAutoFit/>
           </a:bodyPr>
           <a:lstStyle/>
@@ -4154,7 +4163,7 @@
           </a:fontRef>
         </p:style>
         <p:txBody>
-          <a:bodyPr rtlCol="0" anchor="ctr" tIns="54864" bIns="54864" wrap="none"/>
+          <a:bodyPr wrap="none" tIns="54864" bIns="54864" rtlCol="0" anchor="ctr"/>
           <a:lstStyle/>
           <a:p>
             <a:pPr algn="ctr"/>
@@ -4189,17 +4198,53 @@
                 <a:tableStyleId>{5C22544A-7EE6-4342-B048-85BDC9FD1C3A}</a:tableStyleId>
               </a:tblPr>
               <a:tblGrid>
-                <a:gridCol w="384048"/>
-                <a:gridCol w="1691640"/>
-                <a:gridCol w="868680"/>
-                <a:gridCol w="384048"/>
-                <a:gridCol w="1691640"/>
-                <a:gridCol w="868680"/>
+                <a:gridCol w="384048">
+                  <a:extLst>
+                    <a:ext uri="{9D8B030D-6E8A-4147-A177-3AD203B41FA5}">
+                      <a16:colId xmlns:a16="http://schemas.microsoft.com/office/drawing/2014/main" val="20000"/>
+                    </a:ext>
+                  </a:extLst>
+                </a:gridCol>
+                <a:gridCol w="1691640">
+                  <a:extLst>
+                    <a:ext uri="{9D8B030D-6E8A-4147-A177-3AD203B41FA5}">
+                      <a16:colId xmlns:a16="http://schemas.microsoft.com/office/drawing/2014/main" val="20001"/>
+                    </a:ext>
+                  </a:extLst>
+                </a:gridCol>
+                <a:gridCol w="868680">
+                  <a:extLst>
+                    <a:ext uri="{9D8B030D-6E8A-4147-A177-3AD203B41FA5}">
+                      <a16:colId xmlns:a16="http://schemas.microsoft.com/office/drawing/2014/main" val="20002"/>
+                    </a:ext>
+                  </a:extLst>
+                </a:gridCol>
+                <a:gridCol w="384048">
+                  <a:extLst>
+                    <a:ext uri="{9D8B030D-6E8A-4147-A177-3AD203B41FA5}">
+                      <a16:colId xmlns:a16="http://schemas.microsoft.com/office/drawing/2014/main" val="20003"/>
+                    </a:ext>
+                  </a:extLst>
+                </a:gridCol>
+                <a:gridCol w="1691640">
+                  <a:extLst>
+                    <a:ext uri="{9D8B030D-6E8A-4147-A177-3AD203B41FA5}">
+                      <a16:colId xmlns:a16="http://schemas.microsoft.com/office/drawing/2014/main" val="20004"/>
+                    </a:ext>
+                  </a:extLst>
+                </a:gridCol>
+                <a:gridCol w="868680">
+                  <a:extLst>
+                    <a:ext uri="{9D8B030D-6E8A-4147-A177-3AD203B41FA5}">
+                      <a16:colId xmlns:a16="http://schemas.microsoft.com/office/drawing/2014/main" val="20005"/>
+                    </a:ext>
+                  </a:extLst>
+                </a:gridCol>
               </a:tblGrid>
               <a:tr h="320040">
                 <a:tc>
                   <a:txBody>
-                    <a:bodyPr wrap="square"/>
+                    <a:bodyPr/>
                     <a:lstStyle/>
                     <a:p>
                       <a:r>
@@ -4221,7 +4266,7 @@
                 </a:tc>
                 <a:tc>
                   <a:txBody>
-                    <a:bodyPr wrap="square"/>
+                    <a:bodyPr/>
                     <a:lstStyle/>
                     <a:p>
                       <a:r>
@@ -4243,7 +4288,7 @@
                 </a:tc>
                 <a:tc>
                   <a:txBody>
-                    <a:bodyPr wrap="square"/>
+                    <a:bodyPr/>
                     <a:lstStyle/>
                     <a:p>
                       <a:r>
@@ -4265,7 +4310,7 @@
                 </a:tc>
                 <a:tc>
                   <a:txBody>
-                    <a:bodyPr wrap="square"/>
+                    <a:bodyPr/>
                     <a:lstStyle/>
                     <a:p>
                       <a:r>
@@ -4287,7 +4332,7 @@
                 </a:tc>
                 <a:tc>
                   <a:txBody>
-                    <a:bodyPr wrap="square"/>
+                    <a:bodyPr/>
                     <a:lstStyle/>
                     <a:p>
                       <a:r>
@@ -4309,7 +4354,7 @@
                 </a:tc>
                 <a:tc>
                   <a:txBody>
-                    <a:bodyPr wrap="square"/>
+                    <a:bodyPr/>
                     <a:lstStyle/>
                     <a:p>
                       <a:r>
@@ -4329,11 +4374,16 @@
                     </a:solidFill>
                   </a:tcPr>
                 </a:tc>
+                <a:extLst>
+                  <a:ext uri="{0D108BD9-81ED-4DB2-BD59-A6C34878D82A}">
+                    <a16:rowId xmlns:a16="http://schemas.microsoft.com/office/drawing/2014/main" val="10000"/>
+                  </a:ext>
+                </a:extLst>
               </a:tr>
               <a:tr h="320040">
                 <a:tc>
                   <a:txBody>
-                    <a:bodyPr wrap="square"/>
+                    <a:bodyPr/>
                     <a:lstStyle/>
                     <a:p>
                       <a:r>
@@ -4355,7 +4405,7 @@
                 </a:tc>
                 <a:tc>
                   <a:txBody>
-                    <a:bodyPr wrap="square"/>
+                    <a:bodyPr/>
                     <a:lstStyle/>
                     <a:p>
                       <a:r>
@@ -4377,7 +4427,7 @@
                 </a:tc>
                 <a:tc>
                   <a:txBody>
-                    <a:bodyPr wrap="square"/>
+                    <a:bodyPr/>
                     <a:lstStyle/>
                     <a:p>
                       <a:r>
@@ -4399,7 +4449,7 @@
                 </a:tc>
                 <a:tc>
                   <a:txBody>
-                    <a:bodyPr wrap="square"/>
+                    <a:bodyPr/>
                     <a:lstStyle/>
                     <a:p>
                       <a:r>
@@ -4421,7 +4471,7 @@
                 </a:tc>
                 <a:tc>
                   <a:txBody>
-                    <a:bodyPr wrap="square"/>
+                    <a:bodyPr/>
                     <a:lstStyle/>
                     <a:p>
                       <a:r>
@@ -4443,7 +4493,7 @@
                 </a:tc>
                 <a:tc>
                   <a:txBody>
-                    <a:bodyPr wrap="square"/>
+                    <a:bodyPr/>
                     <a:lstStyle/>
                     <a:p>
                       <a:r>
@@ -4463,11 +4513,16 @@
                     </a:solidFill>
                   </a:tcPr>
                 </a:tc>
+                <a:extLst>
+                  <a:ext uri="{0D108BD9-81ED-4DB2-BD59-A6C34878D82A}">
+                    <a16:rowId xmlns:a16="http://schemas.microsoft.com/office/drawing/2014/main" val="10001"/>
+                  </a:ext>
+                </a:extLst>
               </a:tr>
               <a:tr h="320040">
                 <a:tc>
                   <a:txBody>
-                    <a:bodyPr wrap="square"/>
+                    <a:bodyPr/>
                     <a:lstStyle/>
                     <a:p>
                       <a:r>
@@ -4489,7 +4544,7 @@
                 </a:tc>
                 <a:tc>
                   <a:txBody>
-                    <a:bodyPr wrap="square"/>
+                    <a:bodyPr/>
                     <a:lstStyle/>
                     <a:p>
                       <a:r>
@@ -4511,7 +4566,7 @@
                 </a:tc>
                 <a:tc>
                   <a:txBody>
-                    <a:bodyPr wrap="square"/>
+                    <a:bodyPr/>
                     <a:lstStyle/>
                     <a:p>
                       <a:r>
@@ -4533,7 +4588,7 @@
                 </a:tc>
                 <a:tc>
                   <a:txBody>
-                    <a:bodyPr wrap="square"/>
+                    <a:bodyPr/>
                     <a:lstStyle/>
                     <a:p>
                       <a:r>
@@ -4555,7 +4610,7 @@
                 </a:tc>
                 <a:tc>
                   <a:txBody>
-                    <a:bodyPr wrap="square"/>
+                    <a:bodyPr/>
                     <a:lstStyle/>
                     <a:p>
                       <a:r>
@@ -4577,7 +4632,7 @@
                 </a:tc>
                 <a:tc>
                   <a:txBody>
-                    <a:bodyPr wrap="square"/>
+                    <a:bodyPr/>
                     <a:lstStyle/>
                     <a:p>
                       <a:r>
@@ -4597,11 +4652,16 @@
                     </a:solidFill>
                   </a:tcPr>
                 </a:tc>
+                <a:extLst>
+                  <a:ext uri="{0D108BD9-81ED-4DB2-BD59-A6C34878D82A}">
+                    <a16:rowId xmlns:a16="http://schemas.microsoft.com/office/drawing/2014/main" val="10002"/>
+                  </a:ext>
+                </a:extLst>
               </a:tr>
               <a:tr h="320040">
                 <a:tc>
                   <a:txBody>
-                    <a:bodyPr wrap="square"/>
+                    <a:bodyPr/>
                     <a:lstStyle/>
                     <a:p>
                       <a:r>
@@ -4623,7 +4683,7 @@
                 </a:tc>
                 <a:tc>
                   <a:txBody>
-                    <a:bodyPr wrap="square"/>
+                    <a:bodyPr/>
                     <a:lstStyle/>
                     <a:p>
                       <a:r>
@@ -4645,7 +4705,7 @@
                 </a:tc>
                 <a:tc>
                   <a:txBody>
-                    <a:bodyPr wrap="square"/>
+                    <a:bodyPr/>
                     <a:lstStyle/>
                     <a:p>
                       <a:r>
@@ -4667,7 +4727,7 @@
                 </a:tc>
                 <a:tc>
                   <a:txBody>
-                    <a:bodyPr wrap="square"/>
+                    <a:bodyPr/>
                     <a:lstStyle/>
                     <a:p>
                       <a:r>
@@ -4689,7 +4749,7 @@
                 </a:tc>
                 <a:tc>
                   <a:txBody>
-                    <a:bodyPr wrap="square"/>
+                    <a:bodyPr/>
                     <a:lstStyle/>
                     <a:p>
                       <a:r>
@@ -4711,7 +4771,7 @@
                 </a:tc>
                 <a:tc>
                   <a:txBody>
-                    <a:bodyPr wrap="square"/>
+                    <a:bodyPr/>
                     <a:lstStyle/>
                     <a:p>
                       <a:r>
@@ -4731,11 +4791,16 @@
                     </a:solidFill>
                   </a:tcPr>
                 </a:tc>
+                <a:extLst>
+                  <a:ext uri="{0D108BD9-81ED-4DB2-BD59-A6C34878D82A}">
+                    <a16:rowId xmlns:a16="http://schemas.microsoft.com/office/drawing/2014/main" val="10003"/>
+                  </a:ext>
+                </a:extLst>
               </a:tr>
               <a:tr h="320040">
                 <a:tc>
                   <a:txBody>
-                    <a:bodyPr wrap="square"/>
+                    <a:bodyPr/>
                     <a:lstStyle/>
                     <a:p>
                       <a:r>
@@ -4757,7 +4822,7 @@
                 </a:tc>
                 <a:tc>
                   <a:txBody>
-                    <a:bodyPr wrap="square"/>
+                    <a:bodyPr/>
                     <a:lstStyle/>
                     <a:p>
                       <a:r>
@@ -4779,7 +4844,7 @@
                 </a:tc>
                 <a:tc>
                   <a:txBody>
-                    <a:bodyPr wrap="square"/>
+                    <a:bodyPr/>
                     <a:lstStyle/>
                     <a:p>
                       <a:r>
@@ -4801,7 +4866,7 @@
                 </a:tc>
                 <a:tc>
                   <a:txBody>
-                    <a:bodyPr wrap="square"/>
+                    <a:bodyPr/>
                     <a:lstStyle/>
                     <a:p>
                       <a:r>
@@ -4823,7 +4888,7 @@
                 </a:tc>
                 <a:tc>
                   <a:txBody>
-                    <a:bodyPr wrap="square"/>
+                    <a:bodyPr/>
                     <a:lstStyle/>
                     <a:p>
                       <a:r>
@@ -4845,7 +4910,7 @@
                 </a:tc>
                 <a:tc>
                   <a:txBody>
-                    <a:bodyPr wrap="square"/>
+                    <a:bodyPr/>
                     <a:lstStyle/>
                     <a:p>
                       <a:r>
@@ -4865,11 +4930,16 @@
                     </a:solidFill>
                   </a:tcPr>
                 </a:tc>
+                <a:extLst>
+                  <a:ext uri="{0D108BD9-81ED-4DB2-BD59-A6C34878D82A}">
+                    <a16:rowId xmlns:a16="http://schemas.microsoft.com/office/drawing/2014/main" val="10004"/>
+                  </a:ext>
+                </a:extLst>
               </a:tr>
               <a:tr h="320040">
                 <a:tc>
                   <a:txBody>
-                    <a:bodyPr wrap="square"/>
+                    <a:bodyPr/>
                     <a:lstStyle/>
                     <a:p>
                       <a:r>
@@ -4891,7 +4961,7 @@
                 </a:tc>
                 <a:tc>
                   <a:txBody>
-                    <a:bodyPr wrap="square"/>
+                    <a:bodyPr/>
                     <a:lstStyle/>
                     <a:p>
                       <a:r>
@@ -4913,7 +4983,7 @@
                 </a:tc>
                 <a:tc>
                   <a:txBody>
-                    <a:bodyPr wrap="square"/>
+                    <a:bodyPr/>
                     <a:lstStyle/>
                     <a:p>
                       <a:r>
@@ -4935,7 +5005,7 @@
                 </a:tc>
                 <a:tc>
                   <a:txBody>
-                    <a:bodyPr wrap="square"/>
+                    <a:bodyPr/>
                     <a:lstStyle/>
                     <a:p>
                       <a:r>
@@ -4957,7 +5027,7 @@
                 </a:tc>
                 <a:tc>
                   <a:txBody>
-                    <a:bodyPr wrap="square"/>
+                    <a:bodyPr/>
                     <a:lstStyle/>
                     <a:p>
                       <a:r>
@@ -4979,7 +5049,7 @@
                 </a:tc>
                 <a:tc>
                   <a:txBody>
-                    <a:bodyPr wrap="square"/>
+                    <a:bodyPr/>
                     <a:lstStyle/>
                     <a:p>
                       <a:r>
@@ -4999,11 +5069,16 @@
                     </a:solidFill>
                   </a:tcPr>
                 </a:tc>
+                <a:extLst>
+                  <a:ext uri="{0D108BD9-81ED-4DB2-BD59-A6C34878D82A}">
+                    <a16:rowId xmlns:a16="http://schemas.microsoft.com/office/drawing/2014/main" val="10005"/>
+                  </a:ext>
+                </a:extLst>
               </a:tr>
               <a:tr h="320040">
                 <a:tc>
                   <a:txBody>
-                    <a:bodyPr wrap="square"/>
+                    <a:bodyPr/>
                     <a:lstStyle/>
                     <a:p>
                       <a:r>
@@ -5025,7 +5100,7 @@
                 </a:tc>
                 <a:tc>
                   <a:txBody>
-                    <a:bodyPr wrap="square"/>
+                    <a:bodyPr/>
                     <a:lstStyle/>
                     <a:p>
                       <a:r>
@@ -5047,7 +5122,7 @@
                 </a:tc>
                 <a:tc>
                   <a:txBody>
-                    <a:bodyPr wrap="square"/>
+                    <a:bodyPr/>
                     <a:lstStyle/>
                     <a:p>
                       <a:r>
@@ -5069,7 +5144,7 @@
                 </a:tc>
                 <a:tc>
                   <a:txBody>
-                    <a:bodyPr wrap="square"/>
+                    <a:bodyPr/>
                     <a:lstStyle/>
                     <a:p>
                       <a:r>
@@ -5091,7 +5166,7 @@
                 </a:tc>
                 <a:tc>
                   <a:txBody>
-                    <a:bodyPr wrap="square"/>
+                    <a:bodyPr/>
                     <a:lstStyle/>
                     <a:p>
                       <a:r>
@@ -5113,7 +5188,7 @@
                 </a:tc>
                 <a:tc>
                   <a:txBody>
-                    <a:bodyPr wrap="square"/>
+                    <a:bodyPr/>
                     <a:lstStyle/>
                     <a:p>
                       <a:r>
@@ -5133,11 +5208,16 @@
                     </a:solidFill>
                   </a:tcPr>
                 </a:tc>
+                <a:extLst>
+                  <a:ext uri="{0D108BD9-81ED-4DB2-BD59-A6C34878D82A}">
+                    <a16:rowId xmlns:a16="http://schemas.microsoft.com/office/drawing/2014/main" val="10006"/>
+                  </a:ext>
+                </a:extLst>
               </a:tr>
               <a:tr h="320040">
                 <a:tc>
                   <a:txBody>
-                    <a:bodyPr wrap="square"/>
+                    <a:bodyPr/>
                     <a:lstStyle/>
                     <a:p>
                       <a:r>
@@ -5159,7 +5239,7 @@
                 </a:tc>
                 <a:tc>
                   <a:txBody>
-                    <a:bodyPr wrap="square"/>
+                    <a:bodyPr/>
                     <a:lstStyle/>
                     <a:p>
                       <a:r>
@@ -5181,7 +5261,7 @@
                 </a:tc>
                 <a:tc>
                   <a:txBody>
-                    <a:bodyPr wrap="square"/>
+                    <a:bodyPr/>
                     <a:lstStyle/>
                     <a:p>
                       <a:r>
@@ -5203,7 +5283,7 @@
                 </a:tc>
                 <a:tc>
                   <a:txBody>
-                    <a:bodyPr wrap="square"/>
+                    <a:bodyPr/>
                     <a:lstStyle/>
                     <a:p>
                       <a:r>
@@ -5225,7 +5305,7 @@
                 </a:tc>
                 <a:tc>
                   <a:txBody>
-                    <a:bodyPr wrap="square"/>
+                    <a:bodyPr/>
                     <a:lstStyle/>
                     <a:p>
                       <a:r>
@@ -5247,7 +5327,7 @@
                 </a:tc>
                 <a:tc>
                   <a:txBody>
-                    <a:bodyPr wrap="square"/>
+                    <a:bodyPr/>
                     <a:lstStyle/>
                     <a:p>
                       <a:r>
@@ -5267,11 +5347,16 @@
                     </a:solidFill>
                   </a:tcPr>
                 </a:tc>
+                <a:extLst>
+                  <a:ext uri="{0D108BD9-81ED-4DB2-BD59-A6C34878D82A}">
+                    <a16:rowId xmlns:a16="http://schemas.microsoft.com/office/drawing/2014/main" val="10007"/>
+                  </a:ext>
+                </a:extLst>
               </a:tr>
               <a:tr h="320040">
                 <a:tc>
                   <a:txBody>
-                    <a:bodyPr wrap="square"/>
+                    <a:bodyPr/>
                     <a:lstStyle/>
                     <a:p>
                       <a:r>
@@ -5293,7 +5378,7 @@
                 </a:tc>
                 <a:tc>
                   <a:txBody>
-                    <a:bodyPr wrap="square"/>
+                    <a:bodyPr/>
                     <a:lstStyle/>
                     <a:p>
                       <a:r>
@@ -5315,7 +5400,7 @@
                 </a:tc>
                 <a:tc>
                   <a:txBody>
-                    <a:bodyPr wrap="square"/>
+                    <a:bodyPr/>
                     <a:lstStyle/>
                     <a:p>
                       <a:r>
@@ -5337,7 +5422,7 @@
                 </a:tc>
                 <a:tc>
                   <a:txBody>
-                    <a:bodyPr wrap="square"/>
+                    <a:bodyPr/>
                     <a:lstStyle/>
                     <a:p>
                       <a:r>
@@ -5359,7 +5444,7 @@
                 </a:tc>
                 <a:tc>
                   <a:txBody>
-                    <a:bodyPr wrap="square"/>
+                    <a:bodyPr/>
                     <a:lstStyle/>
                     <a:p>
                       <a:r>
@@ -5381,7 +5466,7 @@
                 </a:tc>
                 <a:tc>
                   <a:txBody>
-                    <a:bodyPr wrap="square"/>
+                    <a:bodyPr/>
                     <a:lstStyle/>
                     <a:p>
                       <a:r>
@@ -5401,11 +5486,16 @@
                     </a:solidFill>
                   </a:tcPr>
                 </a:tc>
+                <a:extLst>
+                  <a:ext uri="{0D108BD9-81ED-4DB2-BD59-A6C34878D82A}">
+                    <a16:rowId xmlns:a16="http://schemas.microsoft.com/office/drawing/2014/main" val="10008"/>
+                  </a:ext>
+                </a:extLst>
               </a:tr>
               <a:tr h="320040">
                 <a:tc>
                   <a:txBody>
-                    <a:bodyPr wrap="square"/>
+                    <a:bodyPr/>
                     <a:lstStyle/>
                     <a:p>
                       <a:r>
@@ -5427,7 +5517,7 @@
                 </a:tc>
                 <a:tc>
                   <a:txBody>
-                    <a:bodyPr wrap="square"/>
+                    <a:bodyPr/>
                     <a:lstStyle/>
                     <a:p>
                       <a:r>
@@ -5449,7 +5539,7 @@
                 </a:tc>
                 <a:tc>
                   <a:txBody>
-                    <a:bodyPr wrap="square"/>
+                    <a:bodyPr/>
                     <a:lstStyle/>
                     <a:p>
                       <a:r>
@@ -5471,7 +5561,7 @@
                 </a:tc>
                 <a:tc>
                   <a:txBody>
-                    <a:bodyPr wrap="square"/>
+                    <a:bodyPr/>
                     <a:lstStyle/>
                     <a:p>
                       <a:r>
@@ -5493,7 +5583,7 @@
                 </a:tc>
                 <a:tc>
                   <a:txBody>
-                    <a:bodyPr wrap="square"/>
+                    <a:bodyPr/>
                     <a:lstStyle/>
                     <a:p>
                       <a:r>
@@ -5515,7 +5605,7 @@
                 </a:tc>
                 <a:tc>
                   <a:txBody>
-                    <a:bodyPr wrap="square"/>
+                    <a:bodyPr/>
                     <a:lstStyle/>
                     <a:p>
                       <a:r>
@@ -5535,11 +5625,16 @@
                     </a:solidFill>
                   </a:tcPr>
                 </a:tc>
+                <a:extLst>
+                  <a:ext uri="{0D108BD9-81ED-4DB2-BD59-A6C34878D82A}">
+                    <a16:rowId xmlns:a16="http://schemas.microsoft.com/office/drawing/2014/main" val="10009"/>
+                  </a:ext>
+                </a:extLst>
               </a:tr>
               <a:tr h="320040">
                 <a:tc>
                   <a:txBody>
-                    <a:bodyPr wrap="square"/>
+                    <a:bodyPr/>
                     <a:lstStyle/>
                     <a:p>
                       <a:r>
@@ -5561,7 +5656,7 @@
                 </a:tc>
                 <a:tc>
                   <a:txBody>
-                    <a:bodyPr wrap="square"/>
+                    <a:bodyPr/>
                     <a:lstStyle/>
                     <a:p>
                       <a:r>
@@ -5583,7 +5678,7 @@
                 </a:tc>
                 <a:tc>
                   <a:txBody>
-                    <a:bodyPr wrap="square"/>
+                    <a:bodyPr/>
                     <a:lstStyle/>
                     <a:p>
                       <a:r>
@@ -5605,7 +5700,7 @@
                 </a:tc>
                 <a:tc>
                   <a:txBody>
-                    <a:bodyPr wrap="square"/>
+                    <a:bodyPr/>
                     <a:lstStyle/>
                     <a:p>
                       <a:r>
@@ -5627,7 +5722,7 @@
                 </a:tc>
                 <a:tc>
                   <a:txBody>
-                    <a:bodyPr wrap="square"/>
+                    <a:bodyPr/>
                     <a:lstStyle/>
                     <a:p>
                       <a:r>
@@ -5649,7 +5744,7 @@
                 </a:tc>
                 <a:tc>
                   <a:txBody>
-                    <a:bodyPr wrap="square"/>
+                    <a:bodyPr/>
                     <a:lstStyle/>
                     <a:p>
                       <a:r>
@@ -5669,11 +5764,16 @@
                     </a:solidFill>
                   </a:tcPr>
                 </a:tc>
+                <a:extLst>
+                  <a:ext uri="{0D108BD9-81ED-4DB2-BD59-A6C34878D82A}">
+                    <a16:rowId xmlns:a16="http://schemas.microsoft.com/office/drawing/2014/main" val="10010"/>
+                  </a:ext>
+                </a:extLst>
               </a:tr>
               <a:tr h="320040">
                 <a:tc>
                   <a:txBody>
-                    <a:bodyPr wrap="square"/>
+                    <a:bodyPr/>
                     <a:lstStyle/>
                     <a:p>
                       <a:r>
@@ -5695,7 +5795,7 @@
                 </a:tc>
                 <a:tc>
                   <a:txBody>
-                    <a:bodyPr wrap="square"/>
+                    <a:bodyPr/>
                     <a:lstStyle/>
                     <a:p>
                       <a:r>
@@ -5717,7 +5817,7 @@
                 </a:tc>
                 <a:tc>
                   <a:txBody>
-                    <a:bodyPr wrap="square"/>
+                    <a:bodyPr/>
                     <a:lstStyle/>
                     <a:p>
                       <a:r>
@@ -5739,7 +5839,7 @@
                 </a:tc>
                 <a:tc>
                   <a:txBody>
-                    <a:bodyPr wrap="square"/>
+                    <a:bodyPr/>
                     <a:lstStyle/>
                     <a:p>
                       <a:r>
@@ -5761,7 +5861,7 @@
                 </a:tc>
                 <a:tc>
                   <a:txBody>
-                    <a:bodyPr wrap="square"/>
+                    <a:bodyPr/>
                     <a:lstStyle/>
                     <a:p>
                       <a:r>
@@ -5783,7 +5883,7 @@
                 </a:tc>
                 <a:tc>
                   <a:txBody>
-                    <a:bodyPr wrap="square"/>
+                    <a:bodyPr/>
                     <a:lstStyle/>
                     <a:p>
                       <a:r>
@@ -5803,11 +5903,16 @@
                     </a:solidFill>
                   </a:tcPr>
                 </a:tc>
+                <a:extLst>
+                  <a:ext uri="{0D108BD9-81ED-4DB2-BD59-A6C34878D82A}">
+                    <a16:rowId xmlns:a16="http://schemas.microsoft.com/office/drawing/2014/main" val="10011"/>
+                  </a:ext>
+                </a:extLst>
               </a:tr>
               <a:tr h="320040">
                 <a:tc>
                   <a:txBody>
-                    <a:bodyPr wrap="square"/>
+                    <a:bodyPr/>
                     <a:lstStyle/>
                     <a:p>
                       <a:r>
@@ -5829,7 +5934,7 @@
                 </a:tc>
                 <a:tc>
                   <a:txBody>
-                    <a:bodyPr wrap="square"/>
+                    <a:bodyPr/>
                     <a:lstStyle/>
                     <a:p>
                       <a:r>
@@ -5851,7 +5956,7 @@
                 </a:tc>
                 <a:tc>
                   <a:txBody>
-                    <a:bodyPr wrap="square"/>
+                    <a:bodyPr/>
                     <a:lstStyle/>
                     <a:p>
                       <a:r>
@@ -5873,18 +5978,10 @@
                 </a:tc>
                 <a:tc>
                   <a:txBody>
-                    <a:bodyPr wrap="square"/>
+                    <a:bodyPr/>
                     <a:lstStyle/>
                     <a:p>
-                      <a:r>
-                        <a:rPr sz="1050" b="0">
-                          <a:solidFill>
-                            <a:srgbClr val="161B22"/>
-                          </a:solidFill>
-                          <a:latin typeface="Consolas"/>
-                        </a:rPr>
-                        <a:t/>
-                      </a:r>
+                      <a:endParaRPr/>
                     </a:p>
                   </a:txBody>
                   <a:tcPr marL="54864" marR="54864" marT="18288" marB="18288" anchor="ctr">
@@ -5895,18 +5992,10 @@
                 </a:tc>
                 <a:tc>
                   <a:txBody>
-                    <a:bodyPr wrap="square"/>
+                    <a:bodyPr/>
                     <a:lstStyle/>
                     <a:p>
-                      <a:r>
-                        <a:rPr sz="1050" b="0">
-                          <a:solidFill>
-                            <a:srgbClr val="161B22"/>
-                          </a:solidFill>
-                          <a:latin typeface="Consolas"/>
-                        </a:rPr>
-                        <a:t/>
-                      </a:r>
+                      <a:endParaRPr/>
                     </a:p>
                   </a:txBody>
                   <a:tcPr marL="54864" marR="54864" marT="18288" marB="18288" anchor="ctr">
@@ -5917,18 +6006,10 @@
                 </a:tc>
                 <a:tc>
                   <a:txBody>
-                    <a:bodyPr wrap="square"/>
+                    <a:bodyPr/>
                     <a:lstStyle/>
                     <a:p>
-                      <a:r>
-                        <a:rPr sz="1050" b="0">
-                          <a:solidFill>
-                            <a:srgbClr val="161B22"/>
-                          </a:solidFill>
-                          <a:latin typeface="Consolas"/>
-                        </a:rPr>
-                        <a:t/>
-                      </a:r>
+                      <a:endParaRPr/>
                     </a:p>
                   </a:txBody>
                   <a:tcPr marL="54864" marR="54864" marT="18288" marB="18288" anchor="ctr">
@@ -5937,6 +6018,11 @@
                     </a:solidFill>
                   </a:tcPr>
                 </a:tc>
+                <a:extLst>
+                  <a:ext uri="{0D108BD9-81ED-4DB2-BD59-A6C34878D82A}">
+                    <a16:rowId xmlns:a16="http://schemas.microsoft.com/office/drawing/2014/main" val="10012"/>
+                  </a:ext>
+                </a:extLst>
               </a:tr>
             </a:tbl>
           </a:graphicData>
@@ -5981,10 +6067,11 @@
           </a:fontRef>
         </p:style>
         <p:txBody>
-          <a:bodyPr rtlCol="0" anchor="ctr" tIns="54864" bIns="54864"/>
+          <a:bodyPr tIns="54864" bIns="54864" rtlCol="0" anchor="ctr"/>
           <a:lstStyle/>
           <a:p>
             <a:pPr algn="ctr"/>
+            <a:endParaRPr/>
           </a:p>
         </p:txBody>
       </p:sp>
@@ -6025,10 +6112,11 @@
           </a:fontRef>
         </p:style>
         <p:txBody>
-          <a:bodyPr rtlCol="0" anchor="ctr" tIns="54864" bIns="54864"/>
+          <a:bodyPr tIns="54864" bIns="54864" rtlCol="0" anchor="ctr"/>
           <a:lstStyle/>
           <a:p>
             <a:pPr algn="ctr"/>
+            <a:endParaRPr/>
           </a:p>
         </p:txBody>
       </p:sp>
@@ -6049,7 +6137,7 @@
           <a:noFill/>
         </p:spPr>
         <p:txBody>
-          <a:bodyPr wrap="square" lIns="0" rIns="0" tIns="0" bIns="0">
+          <a:bodyPr wrap="square" lIns="0" tIns="0" rIns="0" bIns="0">
             <a:spAutoFit/>
           </a:bodyPr>
           <a:lstStyle/>
@@ -6088,7 +6176,7 @@
           <a:noFill/>
         </p:spPr>
         <p:txBody>
-          <a:bodyPr wrap="square" lIns="0" rIns="0" tIns="0" bIns="0">
+          <a:bodyPr wrap="square" lIns="0" tIns="0" rIns="0" bIns="0">
             <a:spAutoFit/>
           </a:bodyPr>
           <a:lstStyle/>
@@ -6151,10 +6239,11 @@
           </a:fontRef>
         </p:style>
         <p:txBody>
-          <a:bodyPr rtlCol="0" anchor="ctr" tIns="54864" bIns="54864"/>
+          <a:bodyPr tIns="54864" bIns="54864" rtlCol="0" anchor="ctr"/>
           <a:lstStyle/>
           <a:p>
             <a:pPr algn="ctr"/>
+            <a:endParaRPr/>
           </a:p>
         </p:txBody>
       </p:sp>
@@ -6175,7 +6264,7 @@
           <a:noFill/>
         </p:spPr>
         <p:txBody>
-          <a:bodyPr wrap="square" lIns="0" rIns="0" tIns="0" bIns="0">
+          <a:bodyPr wrap="square" lIns="0" tIns="0" rIns="0" bIns="0">
             <a:spAutoFit/>
           </a:bodyPr>
           <a:lstStyle/>
@@ -6214,7 +6303,7 @@
           <a:noFill/>
         </p:spPr>
         <p:txBody>
-          <a:bodyPr wrap="square" lIns="0" rIns="0" tIns="0" bIns="0">
+          <a:bodyPr wrap="square" lIns="0" tIns="0" rIns="0" bIns="0">
             <a:spAutoFit/>
           </a:bodyPr>
           <a:lstStyle/>
@@ -6245,7 +6334,7 @@
 </file>
 
 <file path=ppt/slides/slide11.xml><?xml version="1.0" encoding="utf-8"?>
-<p:sld xmlns:a="http://schemas.openxmlformats.org/drawingml/2006/main" xmlns:p="http://schemas.openxmlformats.org/presentationml/2006/main" xmlns:r="http://schemas.openxmlformats.org/officeDocument/2006/relationships">
+<p:sld xmlns:a="http://schemas.openxmlformats.org/drawingml/2006/main" xmlns:r="http://schemas.openxmlformats.org/officeDocument/2006/relationships" xmlns:p="http://schemas.openxmlformats.org/presentationml/2006/main">
   <p:cSld>
     <p:bg>
       <p:bgPr>
@@ -6261,7 +6350,14 @@
         <p:cNvGrpSpPr/>
         <p:nvPr/>
       </p:nvGrpSpPr>
-      <p:grpSpPr/>
+      <p:grpSpPr>
+        <a:xfrm>
+          <a:off x="0" y="0"/>
+          <a:ext cx="0" cy="0"/>
+          <a:chOff x="0" y="0"/>
+          <a:chExt cx="0" cy="0"/>
+        </a:xfrm>
+      </p:grpSpPr>
       <p:sp>
         <p:nvSpPr>
           <p:cNvPr id="2" name="TextBox 1"/>
@@ -6279,7 +6375,7 @@
           <a:noFill/>
         </p:spPr>
         <p:txBody>
-          <a:bodyPr wrap="square" lIns="0" rIns="0" tIns="0" bIns="0">
+          <a:bodyPr wrap="square" lIns="0" tIns="0" rIns="0" bIns="0">
             <a:spAutoFit/>
           </a:bodyPr>
           <a:lstStyle/>
@@ -6318,7 +6414,7 @@
           <a:noFill/>
         </p:spPr>
         <p:txBody>
-          <a:bodyPr wrap="square" lIns="0" rIns="0" tIns="0" bIns="0">
+          <a:bodyPr wrap="square" lIns="0" tIns="0" rIns="0" bIns="0">
             <a:spAutoFit/>
           </a:bodyPr>
           <a:lstStyle/>
@@ -6379,7 +6475,7 @@
           </a:fontRef>
         </p:style>
         <p:txBody>
-          <a:bodyPr rtlCol="0" anchor="ctr" tIns="54864" bIns="54864" wrap="none"/>
+          <a:bodyPr wrap="none" tIns="54864" bIns="54864" rtlCol="0" anchor="ctr"/>
           <a:lstStyle/>
           <a:p>
             <a:pPr algn="ctr"/>
@@ -6412,7 +6508,7 @@
           <a:noFill/>
         </p:spPr>
         <p:txBody>
-          <a:bodyPr wrap="none" lIns="0" rIns="0" tIns="0" bIns="0" anchor="ctr">
+          <a:bodyPr wrap="none" lIns="0" tIns="0" rIns="0" bIns="0" anchor="ctr">
             <a:spAutoFit/>
           </a:bodyPr>
           <a:lstStyle/>
@@ -6473,7 +6569,7 @@
           </a:fontRef>
         </p:style>
         <p:txBody>
-          <a:bodyPr rtlCol="0" anchor="ctr" tIns="54864" bIns="54864" wrap="none"/>
+          <a:bodyPr wrap="none" tIns="54864" bIns="54864" rtlCol="0" anchor="ctr"/>
           <a:lstStyle/>
           <a:p>
             <a:pPr algn="ctr"/>
@@ -6506,7 +6602,7 @@
           <a:noFill/>
         </p:spPr>
         <p:txBody>
-          <a:bodyPr wrap="none" lIns="0" rIns="0" tIns="0" bIns="0" anchor="ctr">
+          <a:bodyPr wrap="none" lIns="0" tIns="0" rIns="0" bIns="0" anchor="ctr">
             <a:spAutoFit/>
           </a:bodyPr>
           <a:lstStyle/>
@@ -6567,7 +6663,7 @@
           </a:fontRef>
         </p:style>
         <p:txBody>
-          <a:bodyPr rtlCol="0" anchor="ctr" tIns="54864" bIns="54864" wrap="none"/>
+          <a:bodyPr wrap="none" tIns="54864" bIns="54864" rtlCol="0" anchor="ctr"/>
           <a:lstStyle/>
           <a:p>
             <a:pPr algn="ctr"/>
@@ -6600,7 +6696,7 @@
           <a:noFill/>
         </p:spPr>
         <p:txBody>
-          <a:bodyPr wrap="none" lIns="0" rIns="0" tIns="0" bIns="0" anchor="ctr">
+          <a:bodyPr wrap="none" lIns="0" tIns="0" rIns="0" bIns="0" anchor="ctr">
             <a:spAutoFit/>
           </a:bodyPr>
           <a:lstStyle/>
@@ -6661,7 +6757,7 @@
           </a:fontRef>
         </p:style>
         <p:txBody>
-          <a:bodyPr rtlCol="0" anchor="ctr" tIns="54864" bIns="54864" wrap="none"/>
+          <a:bodyPr wrap="none" tIns="54864" bIns="54864" rtlCol="0" anchor="ctr"/>
           <a:lstStyle/>
           <a:p>
             <a:pPr algn="ctr"/>
@@ -6694,7 +6790,7 @@
           <a:noFill/>
         </p:spPr>
         <p:txBody>
-          <a:bodyPr wrap="none" lIns="0" rIns="0" tIns="0" bIns="0" anchor="ctr">
+          <a:bodyPr wrap="none" lIns="0" tIns="0" rIns="0" bIns="0" anchor="ctr">
             <a:spAutoFit/>
           </a:bodyPr>
           <a:lstStyle/>
@@ -6755,7 +6851,7 @@
           </a:fontRef>
         </p:style>
         <p:txBody>
-          <a:bodyPr rtlCol="0" anchor="ctr" tIns="54864" bIns="54864" wrap="none"/>
+          <a:bodyPr wrap="none" tIns="54864" bIns="54864" rtlCol="0" anchor="ctr"/>
           <a:lstStyle/>
           <a:p>
             <a:pPr algn="ctr"/>
@@ -6788,7 +6884,7 @@
           <a:noFill/>
         </p:spPr>
         <p:txBody>
-          <a:bodyPr wrap="none" lIns="0" rIns="0" tIns="0" bIns="0" anchor="ctr">
+          <a:bodyPr wrap="none" lIns="0" tIns="0" rIns="0" bIns="0" anchor="ctr">
             <a:spAutoFit/>
           </a:bodyPr>
           <a:lstStyle/>
@@ -6849,7 +6945,7 @@
           </a:fontRef>
         </p:style>
         <p:txBody>
-          <a:bodyPr rtlCol="0" anchor="ctr" tIns="54864" bIns="54864" wrap="none"/>
+          <a:bodyPr wrap="none" tIns="54864" bIns="54864" rtlCol="0" anchor="ctr"/>
           <a:lstStyle/>
           <a:p>
             <a:pPr algn="ctr"/>
@@ -6882,7 +6978,7 @@
           <a:noFill/>
         </p:spPr>
         <p:txBody>
-          <a:bodyPr wrap="square" lIns="0" rIns="0" tIns="0" bIns="0">
+          <a:bodyPr wrap="square" lIns="0" tIns="0" rIns="0" bIns="0">
             <a:spAutoFit/>
           </a:bodyPr>
           <a:lstStyle/>
@@ -6945,10 +7041,11 @@
           </a:fontRef>
         </p:style>
         <p:txBody>
-          <a:bodyPr rtlCol="0" anchor="ctr" tIns="54864" bIns="54864"/>
+          <a:bodyPr tIns="54864" bIns="54864" rtlCol="0" anchor="ctr"/>
           <a:lstStyle/>
           <a:p>
             <a:pPr algn="ctr"/>
+            <a:endParaRPr/>
           </a:p>
         </p:txBody>
       </p:sp>
@@ -6969,7 +7066,7 @@
           <a:noFill/>
         </p:spPr>
         <p:txBody>
-          <a:bodyPr wrap="square" lIns="0" rIns="0" tIns="0" bIns="0">
+          <a:bodyPr wrap="square" lIns="0" tIns="0" rIns="0" bIns="0">
             <a:spAutoFit/>
           </a:bodyPr>
           <a:lstStyle/>
@@ -7008,7 +7105,7 @@
           <a:noFill/>
         </p:spPr>
         <p:txBody>
-          <a:bodyPr wrap="square" lIns="0" rIns="0" tIns="0" bIns="0">
+          <a:bodyPr wrap="square" lIns="0" tIns="0" rIns="0" bIns="0">
             <a:spAutoFit/>
           </a:bodyPr>
           <a:lstStyle/>
@@ -7071,10 +7168,11 @@
           </a:fontRef>
         </p:style>
         <p:txBody>
-          <a:bodyPr rtlCol="0" anchor="ctr" tIns="54864" bIns="54864"/>
+          <a:bodyPr tIns="54864" bIns="54864" rtlCol="0" anchor="ctr"/>
           <a:lstStyle/>
           <a:p>
             <a:pPr algn="ctr"/>
+            <a:endParaRPr/>
           </a:p>
         </p:txBody>
       </p:sp>
@@ -7095,7 +7193,7 @@
           <a:noFill/>
         </p:spPr>
         <p:txBody>
-          <a:bodyPr wrap="square" lIns="0" rIns="0" tIns="0" bIns="0">
+          <a:bodyPr wrap="square" lIns="0" tIns="0" rIns="0" bIns="0">
             <a:spAutoFit/>
           </a:bodyPr>
           <a:lstStyle/>
@@ -7134,7 +7232,7 @@
           <a:noFill/>
         </p:spPr>
         <p:txBody>
-          <a:bodyPr wrap="square" lIns="0" rIns="0" tIns="0" bIns="0">
+          <a:bodyPr wrap="square" lIns="0" tIns="0" rIns="0" bIns="0">
             <a:spAutoFit/>
           </a:bodyPr>
           <a:lstStyle/>
@@ -7197,10 +7295,11 @@
           </a:fontRef>
         </p:style>
         <p:txBody>
-          <a:bodyPr rtlCol="0" anchor="ctr" tIns="54864" bIns="54864"/>
+          <a:bodyPr tIns="54864" bIns="54864" rtlCol="0" anchor="ctr"/>
           <a:lstStyle/>
           <a:p>
             <a:pPr algn="ctr"/>
+            <a:endParaRPr/>
           </a:p>
         </p:txBody>
       </p:sp>
@@ -7221,7 +7320,7 @@
           <a:noFill/>
         </p:spPr>
         <p:txBody>
-          <a:bodyPr wrap="square" lIns="0" rIns="0" tIns="0" bIns="0">
+          <a:bodyPr wrap="square" lIns="0" tIns="0" rIns="0" bIns="0">
             <a:spAutoFit/>
           </a:bodyPr>
           <a:lstStyle/>
@@ -7260,7 +7359,7 @@
           <a:noFill/>
         </p:spPr>
         <p:txBody>
-          <a:bodyPr wrap="square" lIns="0" rIns="0" tIns="0" bIns="0">
+          <a:bodyPr wrap="square" lIns="0" tIns="0" rIns="0" bIns="0">
             <a:spAutoFit/>
           </a:bodyPr>
           <a:lstStyle/>
@@ -7323,10 +7422,11 @@
           </a:fontRef>
         </p:style>
         <p:txBody>
-          <a:bodyPr rtlCol="0" anchor="ctr" tIns="54864" bIns="54864"/>
+          <a:bodyPr tIns="54864" bIns="54864" rtlCol="0" anchor="ctr"/>
           <a:lstStyle/>
           <a:p>
             <a:pPr algn="ctr"/>
+            <a:endParaRPr/>
           </a:p>
         </p:txBody>
       </p:sp>
@@ -7347,7 +7447,7 @@
           <a:noFill/>
         </p:spPr>
         <p:txBody>
-          <a:bodyPr wrap="square" lIns="0" rIns="0" tIns="0" bIns="0">
+          <a:bodyPr wrap="square" lIns="0" tIns="0" rIns="0" bIns="0">
             <a:spAutoFit/>
           </a:bodyPr>
           <a:lstStyle/>
@@ -7386,7 +7486,7 @@
           <a:noFill/>
         </p:spPr>
         <p:txBody>
-          <a:bodyPr wrap="square" lIns="0" rIns="0" tIns="0" bIns="0">
+          <a:bodyPr wrap="square" lIns="0" tIns="0" rIns="0" bIns="0">
             <a:spAutoFit/>
           </a:bodyPr>
           <a:lstStyle/>
@@ -7417,7 +7517,7 @@
 </file>
 
 <file path=ppt/slides/slide12.xml><?xml version="1.0" encoding="utf-8"?>
-<p:sld xmlns:a="http://schemas.openxmlformats.org/drawingml/2006/main" xmlns:p="http://schemas.openxmlformats.org/presentationml/2006/main" xmlns:r="http://schemas.openxmlformats.org/officeDocument/2006/relationships">
+<p:sld xmlns:a="http://schemas.openxmlformats.org/drawingml/2006/main" xmlns:r="http://schemas.openxmlformats.org/officeDocument/2006/relationships" xmlns:p="http://schemas.openxmlformats.org/presentationml/2006/main">
   <p:cSld>
     <p:bg>
       <p:bgPr>
@@ -7433,7 +7533,14 @@
         <p:cNvGrpSpPr/>
         <p:nvPr/>
       </p:nvGrpSpPr>
-      <p:grpSpPr/>
+      <p:grpSpPr>
+        <a:xfrm>
+          <a:off x="0" y="0"/>
+          <a:ext cx="0" cy="0"/>
+          <a:chOff x="0" y="0"/>
+          <a:chExt cx="0" cy="0"/>
+        </a:xfrm>
+      </p:grpSpPr>
       <p:sp>
         <p:nvSpPr>
           <p:cNvPr id="2" name="TextBox 1"/>
@@ -7451,7 +7558,7 @@
           <a:noFill/>
         </p:spPr>
         <p:txBody>
-          <a:bodyPr wrap="square" lIns="0" rIns="0" tIns="0" bIns="0">
+          <a:bodyPr wrap="square" lIns="0" tIns="0" rIns="0" bIns="0">
             <a:spAutoFit/>
           </a:bodyPr>
           <a:lstStyle/>
@@ -7490,7 +7597,7 @@
           <a:noFill/>
         </p:spPr>
         <p:txBody>
-          <a:bodyPr wrap="square" lIns="0" rIns="0" tIns="0" bIns="0">
+          <a:bodyPr wrap="square" lIns="0" tIns="0" rIns="0" bIns="0">
             <a:spAutoFit/>
           </a:bodyPr>
           <a:lstStyle/>
@@ -7551,7 +7658,7 @@
           </a:fontRef>
         </p:style>
         <p:txBody>
-          <a:bodyPr rtlCol="0" anchor="ctr" tIns="54864" bIns="54864" wrap="none"/>
+          <a:bodyPr wrap="none" tIns="54864" bIns="54864" rtlCol="0" anchor="ctr"/>
           <a:lstStyle/>
           <a:p>
             <a:pPr algn="ctr"/>
@@ -7584,7 +7691,7 @@
           <a:noFill/>
         </p:spPr>
         <p:txBody>
-          <a:bodyPr wrap="none" lIns="0" rIns="0" tIns="0" bIns="0" anchor="ctr">
+          <a:bodyPr wrap="none" lIns="0" tIns="0" rIns="0" bIns="0" anchor="ctr">
             <a:spAutoFit/>
           </a:bodyPr>
           <a:lstStyle/>
@@ -7645,7 +7752,7 @@
           </a:fontRef>
         </p:style>
         <p:txBody>
-          <a:bodyPr rtlCol="0" anchor="ctr" tIns="54864" bIns="54864" wrap="none"/>
+          <a:bodyPr wrap="none" tIns="54864" bIns="54864" rtlCol="0" anchor="ctr"/>
           <a:lstStyle/>
           <a:p>
             <a:pPr algn="ctr"/>
@@ -7678,7 +7785,7 @@
           <a:noFill/>
         </p:spPr>
         <p:txBody>
-          <a:bodyPr wrap="none" lIns="0" rIns="0" tIns="0" bIns="0" anchor="ctr">
+          <a:bodyPr wrap="none" lIns="0" tIns="0" rIns="0" bIns="0" anchor="ctr">
             <a:spAutoFit/>
           </a:bodyPr>
           <a:lstStyle/>
@@ -7739,7 +7846,7 @@
           </a:fontRef>
         </p:style>
         <p:txBody>
-          <a:bodyPr rtlCol="0" anchor="ctr" tIns="54864" bIns="54864" wrap="none"/>
+          <a:bodyPr wrap="none" tIns="54864" bIns="54864" rtlCol="0" anchor="ctr"/>
           <a:lstStyle/>
           <a:p>
             <a:pPr algn="ctr"/>
@@ -7772,7 +7879,7 @@
           <a:noFill/>
         </p:spPr>
         <p:txBody>
-          <a:bodyPr wrap="none" lIns="0" rIns="0" tIns="0" bIns="0" anchor="ctr">
+          <a:bodyPr wrap="none" lIns="0" tIns="0" rIns="0" bIns="0" anchor="ctr">
             <a:spAutoFit/>
           </a:bodyPr>
           <a:lstStyle/>
@@ -7833,7 +7940,7 @@
           </a:fontRef>
         </p:style>
         <p:txBody>
-          <a:bodyPr rtlCol="0" anchor="ctr" tIns="54864" bIns="54864" wrap="none"/>
+          <a:bodyPr wrap="none" tIns="54864" bIns="54864" rtlCol="0" anchor="ctr"/>
           <a:lstStyle/>
           <a:p>
             <a:pPr algn="ctr"/>
@@ -7866,7 +7973,7 @@
           <a:noFill/>
         </p:spPr>
         <p:txBody>
-          <a:bodyPr wrap="none" lIns="0" rIns="0" tIns="0" bIns="0" anchor="ctr">
+          <a:bodyPr wrap="none" lIns="0" tIns="0" rIns="0" bIns="0" anchor="ctr">
             <a:spAutoFit/>
           </a:bodyPr>
           <a:lstStyle/>
@@ -7927,7 +8034,7 @@
           </a:fontRef>
         </p:style>
         <p:txBody>
-          <a:bodyPr rtlCol="0" anchor="ctr" tIns="54864" bIns="54864" wrap="none"/>
+          <a:bodyPr wrap="none" tIns="54864" bIns="54864" rtlCol="0" anchor="ctr"/>
           <a:lstStyle/>
           <a:p>
             <a:pPr algn="ctr"/>
@@ -7960,7 +8067,7 @@
           <a:noFill/>
         </p:spPr>
         <p:txBody>
-          <a:bodyPr wrap="none" lIns="0" rIns="0" tIns="0" bIns="0" anchor="ctr">
+          <a:bodyPr wrap="none" lIns="0" tIns="0" rIns="0" bIns="0" anchor="ctr">
             <a:spAutoFit/>
           </a:bodyPr>
           <a:lstStyle/>
@@ -8021,7 +8128,7 @@
           </a:fontRef>
         </p:style>
         <p:txBody>
-          <a:bodyPr rtlCol="0" anchor="ctr" tIns="54864" bIns="54864" wrap="none"/>
+          <a:bodyPr wrap="none" tIns="54864" bIns="54864" rtlCol="0" anchor="ctr"/>
           <a:lstStyle/>
           <a:p>
             <a:pPr algn="ctr"/>
@@ -8076,10 +8183,11 @@
           </a:fontRef>
         </p:style>
         <p:txBody>
-          <a:bodyPr rtlCol="0" anchor="ctr" tIns="54864" bIns="54864"/>
+          <a:bodyPr tIns="54864" bIns="54864" rtlCol="0" anchor="ctr"/>
           <a:lstStyle/>
           <a:p>
             <a:pPr algn="ctr"/>
+            <a:endParaRPr/>
           </a:p>
         </p:txBody>
       </p:sp>
@@ -8122,10 +8230,11 @@
           </a:fontRef>
         </p:style>
         <p:txBody>
-          <a:bodyPr rtlCol="0" anchor="ctr" tIns="54864" bIns="54864"/>
+          <a:bodyPr tIns="54864" bIns="54864" rtlCol="0" anchor="ctr"/>
           <a:lstStyle/>
           <a:p>
             <a:pPr algn="ctr"/>
+            <a:endParaRPr/>
           </a:p>
         </p:txBody>
       </p:sp>
@@ -8168,10 +8277,11 @@
           </a:fontRef>
         </p:style>
         <p:txBody>
-          <a:bodyPr rtlCol="0" anchor="ctr" tIns="54864" bIns="54864"/>
+          <a:bodyPr tIns="54864" bIns="54864" rtlCol="0" anchor="ctr"/>
           <a:lstStyle/>
           <a:p>
             <a:pPr algn="ctr"/>
+            <a:endParaRPr/>
           </a:p>
         </p:txBody>
       </p:sp>
@@ -8214,10 +8324,11 @@
           </a:fontRef>
         </p:style>
         <p:txBody>
-          <a:bodyPr rtlCol="0" anchor="ctr" tIns="54864" bIns="54864"/>
+          <a:bodyPr tIns="54864" bIns="54864" rtlCol="0" anchor="ctr"/>
           <a:lstStyle/>
           <a:p>
             <a:pPr algn="ctr"/>
+            <a:endParaRPr/>
           </a:p>
         </p:txBody>
       </p:sp>
@@ -8260,10 +8371,11 @@
           </a:fontRef>
         </p:style>
         <p:txBody>
-          <a:bodyPr rtlCol="0" anchor="ctr" tIns="54864" bIns="54864"/>
+          <a:bodyPr tIns="54864" bIns="54864" rtlCol="0" anchor="ctr"/>
           <a:lstStyle/>
           <a:p>
             <a:pPr algn="ctr"/>
+            <a:endParaRPr/>
           </a:p>
         </p:txBody>
       </p:sp>
@@ -8306,10 +8418,11 @@
           </a:fontRef>
         </p:style>
         <p:txBody>
-          <a:bodyPr rtlCol="0" anchor="ctr" tIns="54864" bIns="54864"/>
+          <a:bodyPr tIns="54864" bIns="54864" rtlCol="0" anchor="ctr"/>
           <a:lstStyle/>
           <a:p>
             <a:pPr algn="ctr"/>
+            <a:endParaRPr/>
           </a:p>
         </p:txBody>
       </p:sp>
@@ -8352,10 +8465,11 @@
           </a:fontRef>
         </p:style>
         <p:txBody>
-          <a:bodyPr rtlCol="0" anchor="ctr" tIns="54864" bIns="54864"/>
+          <a:bodyPr tIns="54864" bIns="54864" rtlCol="0" anchor="ctr"/>
           <a:lstStyle/>
           <a:p>
             <a:pPr algn="ctr"/>
+            <a:endParaRPr/>
           </a:p>
         </p:txBody>
       </p:sp>
@@ -8398,10 +8512,11 @@
           </a:fontRef>
         </p:style>
         <p:txBody>
-          <a:bodyPr rtlCol="0" anchor="ctr" tIns="54864" bIns="54864"/>
+          <a:bodyPr tIns="54864" bIns="54864" rtlCol="0" anchor="ctr"/>
           <a:lstStyle/>
           <a:p>
             <a:pPr algn="ctr"/>
+            <a:endParaRPr/>
           </a:p>
         </p:txBody>
       </p:sp>
@@ -8444,10 +8559,11 @@
           </a:fontRef>
         </p:style>
         <p:txBody>
-          <a:bodyPr rtlCol="0" anchor="ctr" tIns="54864" bIns="54864"/>
+          <a:bodyPr tIns="54864" bIns="54864" rtlCol="0" anchor="ctr"/>
           <a:lstStyle/>
           <a:p>
             <a:pPr algn="ctr"/>
+            <a:endParaRPr/>
           </a:p>
         </p:txBody>
       </p:sp>
@@ -8490,10 +8606,11 @@
           </a:fontRef>
         </p:style>
         <p:txBody>
-          <a:bodyPr rtlCol="0" anchor="ctr" tIns="54864" bIns="54864"/>
+          <a:bodyPr tIns="54864" bIns="54864" rtlCol="0" anchor="ctr"/>
           <a:lstStyle/>
           <a:p>
             <a:pPr algn="ctr"/>
+            <a:endParaRPr/>
           </a:p>
         </p:txBody>
       </p:sp>
@@ -8536,10 +8653,11 @@
           </a:fontRef>
         </p:style>
         <p:txBody>
-          <a:bodyPr rtlCol="0" anchor="ctr" tIns="54864" bIns="54864"/>
+          <a:bodyPr tIns="54864" bIns="54864" rtlCol="0" anchor="ctr"/>
           <a:lstStyle/>
           <a:p>
             <a:pPr algn="ctr"/>
+            <a:endParaRPr/>
           </a:p>
         </p:txBody>
       </p:sp>
@@ -8582,10 +8700,11 @@
           </a:fontRef>
         </p:style>
         <p:txBody>
-          <a:bodyPr rtlCol="0" anchor="ctr" tIns="54864" bIns="54864"/>
+          <a:bodyPr tIns="54864" bIns="54864" rtlCol="0" anchor="ctr"/>
           <a:lstStyle/>
           <a:p>
             <a:pPr algn="ctr"/>
+            <a:endParaRPr/>
           </a:p>
         </p:txBody>
       </p:sp>
@@ -8628,10 +8747,11 @@
           </a:fontRef>
         </p:style>
         <p:txBody>
-          <a:bodyPr rtlCol="0" anchor="ctr" tIns="54864" bIns="54864"/>
+          <a:bodyPr tIns="54864" bIns="54864" rtlCol="0" anchor="ctr"/>
           <a:lstStyle/>
           <a:p>
             <a:pPr algn="ctr"/>
+            <a:endParaRPr/>
           </a:p>
         </p:txBody>
       </p:sp>
@@ -8674,10 +8794,11 @@
           </a:fontRef>
         </p:style>
         <p:txBody>
-          <a:bodyPr rtlCol="0" anchor="ctr" tIns="54864" bIns="54864"/>
+          <a:bodyPr tIns="54864" bIns="54864" rtlCol="0" anchor="ctr"/>
           <a:lstStyle/>
           <a:p>
             <a:pPr algn="ctr"/>
+            <a:endParaRPr/>
           </a:p>
         </p:txBody>
       </p:sp>
@@ -8720,10 +8841,11 @@
           </a:fontRef>
         </p:style>
         <p:txBody>
-          <a:bodyPr rtlCol="0" anchor="ctr" tIns="54864" bIns="54864"/>
+          <a:bodyPr tIns="54864" bIns="54864" rtlCol="0" anchor="ctr"/>
           <a:lstStyle/>
           <a:p>
             <a:pPr algn="ctr"/>
+            <a:endParaRPr/>
           </a:p>
         </p:txBody>
       </p:sp>
@@ -8766,10 +8888,11 @@
           </a:fontRef>
         </p:style>
         <p:txBody>
-          <a:bodyPr rtlCol="0" anchor="ctr" tIns="54864" bIns="54864"/>
+          <a:bodyPr tIns="54864" bIns="54864" rtlCol="0" anchor="ctr"/>
           <a:lstStyle/>
           <a:p>
             <a:pPr algn="ctr"/>
+            <a:endParaRPr/>
           </a:p>
         </p:txBody>
       </p:sp>
@@ -8812,10 +8935,11 @@
           </a:fontRef>
         </p:style>
         <p:txBody>
-          <a:bodyPr rtlCol="0" anchor="ctr" tIns="54864" bIns="54864"/>
+          <a:bodyPr tIns="54864" bIns="54864" rtlCol="0" anchor="ctr"/>
           <a:lstStyle/>
           <a:p>
             <a:pPr algn="ctr"/>
+            <a:endParaRPr/>
           </a:p>
         </p:txBody>
       </p:sp>
@@ -8858,10 +8982,11 @@
           </a:fontRef>
         </p:style>
         <p:txBody>
-          <a:bodyPr rtlCol="0" anchor="ctr" tIns="54864" bIns="54864"/>
+          <a:bodyPr tIns="54864" bIns="54864" rtlCol="0" anchor="ctr"/>
           <a:lstStyle/>
           <a:p>
             <a:pPr algn="ctr"/>
+            <a:endParaRPr/>
           </a:p>
         </p:txBody>
       </p:sp>
@@ -8904,10 +9029,11 @@
           </a:fontRef>
         </p:style>
         <p:txBody>
-          <a:bodyPr rtlCol="0" anchor="ctr" tIns="54864" bIns="54864"/>
+          <a:bodyPr tIns="54864" bIns="54864" rtlCol="0" anchor="ctr"/>
           <a:lstStyle/>
           <a:p>
             <a:pPr algn="ctr"/>
+            <a:endParaRPr/>
           </a:p>
         </p:txBody>
       </p:sp>
@@ -8950,10 +9076,11 @@
           </a:fontRef>
         </p:style>
         <p:txBody>
-          <a:bodyPr rtlCol="0" anchor="ctr" tIns="54864" bIns="54864"/>
+          <a:bodyPr tIns="54864" bIns="54864" rtlCol="0" anchor="ctr"/>
           <a:lstStyle/>
           <a:p>
             <a:pPr algn="ctr"/>
+            <a:endParaRPr/>
           </a:p>
         </p:txBody>
       </p:sp>
@@ -8996,10 +9123,11 @@
           </a:fontRef>
         </p:style>
         <p:txBody>
-          <a:bodyPr rtlCol="0" anchor="ctr" tIns="54864" bIns="54864"/>
+          <a:bodyPr tIns="54864" bIns="54864" rtlCol="0" anchor="ctr"/>
           <a:lstStyle/>
           <a:p>
             <a:pPr algn="ctr"/>
+            <a:endParaRPr/>
           </a:p>
         </p:txBody>
       </p:sp>
@@ -9042,10 +9170,11 @@
           </a:fontRef>
         </p:style>
         <p:txBody>
-          <a:bodyPr rtlCol="0" anchor="ctr" tIns="54864" bIns="54864"/>
+          <a:bodyPr tIns="54864" bIns="54864" rtlCol="0" anchor="ctr"/>
           <a:lstStyle/>
           <a:p>
             <a:pPr algn="ctr"/>
+            <a:endParaRPr/>
           </a:p>
         </p:txBody>
       </p:sp>
@@ -9088,10 +9217,11 @@
           </a:fontRef>
         </p:style>
         <p:txBody>
-          <a:bodyPr rtlCol="0" anchor="ctr" tIns="54864" bIns="54864"/>
+          <a:bodyPr tIns="54864" bIns="54864" rtlCol="0" anchor="ctr"/>
           <a:lstStyle/>
           <a:p>
             <a:pPr algn="ctr"/>
+            <a:endParaRPr/>
           </a:p>
         </p:txBody>
       </p:sp>
@@ -9134,10 +9264,11 @@
           </a:fontRef>
         </p:style>
         <p:txBody>
-          <a:bodyPr rtlCol="0" anchor="ctr" tIns="54864" bIns="54864"/>
+          <a:bodyPr tIns="54864" bIns="54864" rtlCol="0" anchor="ctr"/>
           <a:lstStyle/>
           <a:p>
             <a:pPr algn="ctr"/>
+            <a:endParaRPr/>
           </a:p>
         </p:txBody>
       </p:sp>
@@ -9180,10 +9311,11 @@
           </a:fontRef>
         </p:style>
         <p:txBody>
-          <a:bodyPr rtlCol="0" anchor="ctr" tIns="54864" bIns="54864"/>
+          <a:bodyPr tIns="54864" bIns="54864" rtlCol="0" anchor="ctr"/>
           <a:lstStyle/>
           <a:p>
             <a:pPr algn="ctr"/>
+            <a:endParaRPr/>
           </a:p>
         </p:txBody>
       </p:sp>
@@ -9226,10 +9358,11 @@
           </a:fontRef>
         </p:style>
         <p:txBody>
-          <a:bodyPr rtlCol="0" anchor="ctr" tIns="54864" bIns="54864"/>
+          <a:bodyPr tIns="54864" bIns="54864" rtlCol="0" anchor="ctr"/>
           <a:lstStyle/>
           <a:p>
             <a:pPr algn="ctr"/>
+            <a:endParaRPr/>
           </a:p>
         </p:txBody>
       </p:sp>
@@ -9272,10 +9405,11 @@
           </a:fontRef>
         </p:style>
         <p:txBody>
-          <a:bodyPr rtlCol="0" anchor="ctr" tIns="54864" bIns="54864"/>
+          <a:bodyPr tIns="54864" bIns="54864" rtlCol="0" anchor="ctr"/>
           <a:lstStyle/>
           <a:p>
             <a:pPr algn="ctr"/>
+            <a:endParaRPr/>
           </a:p>
         </p:txBody>
       </p:sp>
@@ -9318,10 +9452,11 @@
           </a:fontRef>
         </p:style>
         <p:txBody>
-          <a:bodyPr rtlCol="0" anchor="ctr" tIns="54864" bIns="54864"/>
+          <a:bodyPr tIns="54864" bIns="54864" rtlCol="0" anchor="ctr"/>
           <a:lstStyle/>
           <a:p>
             <a:pPr algn="ctr"/>
+            <a:endParaRPr/>
           </a:p>
         </p:txBody>
       </p:sp>
@@ -9364,10 +9499,11 @@
           </a:fontRef>
         </p:style>
         <p:txBody>
-          <a:bodyPr rtlCol="0" anchor="ctr" tIns="54864" bIns="54864"/>
+          <a:bodyPr tIns="54864" bIns="54864" rtlCol="0" anchor="ctr"/>
           <a:lstStyle/>
           <a:p>
             <a:pPr algn="ctr"/>
+            <a:endParaRPr/>
           </a:p>
         </p:txBody>
       </p:sp>
@@ -9410,10 +9546,11 @@
           </a:fontRef>
         </p:style>
         <p:txBody>
-          <a:bodyPr rtlCol="0" anchor="ctr" tIns="54864" bIns="54864"/>
+          <a:bodyPr tIns="54864" bIns="54864" rtlCol="0" anchor="ctr"/>
           <a:lstStyle/>
           <a:p>
             <a:pPr algn="ctr"/>
+            <a:endParaRPr/>
           </a:p>
         </p:txBody>
       </p:sp>
@@ -9456,10 +9593,11 @@
           </a:fontRef>
         </p:style>
         <p:txBody>
-          <a:bodyPr rtlCol="0" anchor="ctr" tIns="54864" bIns="54864"/>
+          <a:bodyPr tIns="54864" bIns="54864" rtlCol="0" anchor="ctr"/>
           <a:lstStyle/>
           <a:p>
             <a:pPr algn="ctr"/>
+            <a:endParaRPr/>
           </a:p>
         </p:txBody>
       </p:sp>
@@ -9502,10 +9640,11 @@
           </a:fontRef>
         </p:style>
         <p:txBody>
-          <a:bodyPr rtlCol="0" anchor="ctr" tIns="54864" bIns="54864"/>
+          <a:bodyPr tIns="54864" bIns="54864" rtlCol="0" anchor="ctr"/>
           <a:lstStyle/>
           <a:p>
             <a:pPr algn="ctr"/>
+            <a:endParaRPr/>
           </a:p>
         </p:txBody>
       </p:sp>
@@ -9548,10 +9687,11 @@
           </a:fontRef>
         </p:style>
         <p:txBody>
-          <a:bodyPr rtlCol="0" anchor="ctr" tIns="54864" bIns="54864"/>
+          <a:bodyPr tIns="54864" bIns="54864" rtlCol="0" anchor="ctr"/>
           <a:lstStyle/>
           <a:p>
             <a:pPr algn="ctr"/>
+            <a:endParaRPr/>
           </a:p>
         </p:txBody>
       </p:sp>
@@ -9594,10 +9734,11 @@
           </a:fontRef>
         </p:style>
         <p:txBody>
-          <a:bodyPr rtlCol="0" anchor="ctr" tIns="54864" bIns="54864"/>
+          <a:bodyPr tIns="54864" bIns="54864" rtlCol="0" anchor="ctr"/>
           <a:lstStyle/>
           <a:p>
             <a:pPr algn="ctr"/>
+            <a:endParaRPr/>
           </a:p>
         </p:txBody>
       </p:sp>
@@ -9640,10 +9781,11 @@
           </a:fontRef>
         </p:style>
         <p:txBody>
-          <a:bodyPr rtlCol="0" anchor="ctr" tIns="54864" bIns="54864"/>
+          <a:bodyPr tIns="54864" bIns="54864" rtlCol="0" anchor="ctr"/>
           <a:lstStyle/>
           <a:p>
             <a:pPr algn="ctr"/>
+            <a:endParaRPr/>
           </a:p>
         </p:txBody>
       </p:sp>
@@ -9686,10 +9828,11 @@
           </a:fontRef>
         </p:style>
         <p:txBody>
-          <a:bodyPr rtlCol="0" anchor="ctr" tIns="54864" bIns="54864"/>
+          <a:bodyPr tIns="54864" bIns="54864" rtlCol="0" anchor="ctr"/>
           <a:lstStyle/>
           <a:p>
             <a:pPr algn="ctr"/>
+            <a:endParaRPr/>
           </a:p>
         </p:txBody>
       </p:sp>
@@ -9732,10 +9875,11 @@
           </a:fontRef>
         </p:style>
         <p:txBody>
-          <a:bodyPr rtlCol="0" anchor="ctr" tIns="54864" bIns="54864"/>
+          <a:bodyPr tIns="54864" bIns="54864" rtlCol="0" anchor="ctr"/>
           <a:lstStyle/>
           <a:p>
             <a:pPr algn="ctr"/>
+            <a:endParaRPr/>
           </a:p>
         </p:txBody>
       </p:sp>
@@ -9778,10 +9922,11 @@
           </a:fontRef>
         </p:style>
         <p:txBody>
-          <a:bodyPr rtlCol="0" anchor="ctr" tIns="54864" bIns="54864"/>
+          <a:bodyPr tIns="54864" bIns="54864" rtlCol="0" anchor="ctr"/>
           <a:lstStyle/>
           <a:p>
             <a:pPr algn="ctr"/>
+            <a:endParaRPr/>
           </a:p>
         </p:txBody>
       </p:sp>
@@ -9824,10 +9969,11 @@
           </a:fontRef>
         </p:style>
         <p:txBody>
-          <a:bodyPr rtlCol="0" anchor="ctr" tIns="54864" bIns="54864"/>
+          <a:bodyPr tIns="54864" bIns="54864" rtlCol="0" anchor="ctr"/>
           <a:lstStyle/>
           <a:p>
             <a:pPr algn="ctr"/>
+            <a:endParaRPr/>
           </a:p>
         </p:txBody>
       </p:sp>
@@ -9870,10 +10016,11 @@
           </a:fontRef>
         </p:style>
         <p:txBody>
-          <a:bodyPr rtlCol="0" anchor="ctr" tIns="54864" bIns="54864"/>
+          <a:bodyPr tIns="54864" bIns="54864" rtlCol="0" anchor="ctr"/>
           <a:lstStyle/>
           <a:p>
             <a:pPr algn="ctr"/>
+            <a:endParaRPr/>
           </a:p>
         </p:txBody>
       </p:sp>
@@ -9916,10 +10063,11 @@
           </a:fontRef>
         </p:style>
         <p:txBody>
-          <a:bodyPr rtlCol="0" anchor="ctr" tIns="54864" bIns="54864"/>
+          <a:bodyPr tIns="54864" bIns="54864" rtlCol="0" anchor="ctr"/>
           <a:lstStyle/>
           <a:p>
             <a:pPr algn="ctr"/>
+            <a:endParaRPr/>
           </a:p>
         </p:txBody>
       </p:sp>
@@ -9962,10 +10110,11 @@
           </a:fontRef>
         </p:style>
         <p:txBody>
-          <a:bodyPr rtlCol="0" anchor="ctr" tIns="54864" bIns="54864"/>
+          <a:bodyPr tIns="54864" bIns="54864" rtlCol="0" anchor="ctr"/>
           <a:lstStyle/>
           <a:p>
             <a:pPr algn="ctr"/>
+            <a:endParaRPr/>
           </a:p>
         </p:txBody>
       </p:sp>
@@ -10008,10 +10157,11 @@
           </a:fontRef>
         </p:style>
         <p:txBody>
-          <a:bodyPr rtlCol="0" anchor="ctr" tIns="54864" bIns="54864"/>
+          <a:bodyPr tIns="54864" bIns="54864" rtlCol="0" anchor="ctr"/>
           <a:lstStyle/>
           <a:p>
             <a:pPr algn="ctr"/>
+            <a:endParaRPr/>
           </a:p>
         </p:txBody>
       </p:sp>
@@ -10054,10 +10204,11 @@
           </a:fontRef>
         </p:style>
         <p:txBody>
-          <a:bodyPr rtlCol="0" anchor="ctr" tIns="54864" bIns="54864"/>
+          <a:bodyPr tIns="54864" bIns="54864" rtlCol="0" anchor="ctr"/>
           <a:lstStyle/>
           <a:p>
             <a:pPr algn="ctr"/>
+            <a:endParaRPr/>
           </a:p>
         </p:txBody>
       </p:sp>
@@ -10100,10 +10251,11 @@
           </a:fontRef>
         </p:style>
         <p:txBody>
-          <a:bodyPr rtlCol="0" anchor="ctr" tIns="54864" bIns="54864"/>
+          <a:bodyPr tIns="54864" bIns="54864" rtlCol="0" anchor="ctr"/>
           <a:lstStyle/>
           <a:p>
             <a:pPr algn="ctr"/>
+            <a:endParaRPr/>
           </a:p>
         </p:txBody>
       </p:sp>
@@ -10146,10 +10298,11 @@
           </a:fontRef>
         </p:style>
         <p:txBody>
-          <a:bodyPr rtlCol="0" anchor="ctr" tIns="54864" bIns="54864"/>
+          <a:bodyPr tIns="54864" bIns="54864" rtlCol="0" anchor="ctr"/>
           <a:lstStyle/>
           <a:p>
             <a:pPr algn="ctr"/>
+            <a:endParaRPr/>
           </a:p>
         </p:txBody>
       </p:sp>
@@ -10192,10 +10345,11 @@
           </a:fontRef>
         </p:style>
         <p:txBody>
-          <a:bodyPr rtlCol="0" anchor="ctr" tIns="54864" bIns="54864"/>
+          <a:bodyPr tIns="54864" bIns="54864" rtlCol="0" anchor="ctr"/>
           <a:lstStyle/>
           <a:p>
             <a:pPr algn="ctr"/>
+            <a:endParaRPr/>
           </a:p>
         </p:txBody>
       </p:sp>
@@ -10238,10 +10392,11 @@
           </a:fontRef>
         </p:style>
         <p:txBody>
-          <a:bodyPr rtlCol="0" anchor="ctr" tIns="54864" bIns="54864"/>
+          <a:bodyPr tIns="54864" bIns="54864" rtlCol="0" anchor="ctr"/>
           <a:lstStyle/>
           <a:p>
             <a:pPr algn="ctr"/>
+            <a:endParaRPr/>
           </a:p>
         </p:txBody>
       </p:sp>
@@ -10284,10 +10439,11 @@
           </a:fontRef>
         </p:style>
         <p:txBody>
-          <a:bodyPr rtlCol="0" anchor="ctr" tIns="54864" bIns="54864"/>
+          <a:bodyPr tIns="54864" bIns="54864" rtlCol="0" anchor="ctr"/>
           <a:lstStyle/>
           <a:p>
             <a:pPr algn="ctr"/>
+            <a:endParaRPr/>
           </a:p>
         </p:txBody>
       </p:sp>
@@ -10330,10 +10486,11 @@
           </a:fontRef>
         </p:style>
         <p:txBody>
-          <a:bodyPr rtlCol="0" anchor="ctr" tIns="54864" bIns="54864"/>
+          <a:bodyPr tIns="54864" bIns="54864" rtlCol="0" anchor="ctr"/>
           <a:lstStyle/>
           <a:p>
             <a:pPr algn="ctr"/>
+            <a:endParaRPr/>
           </a:p>
         </p:txBody>
       </p:sp>
@@ -10376,10 +10533,11 @@
           </a:fontRef>
         </p:style>
         <p:txBody>
-          <a:bodyPr rtlCol="0" anchor="ctr" tIns="54864" bIns="54864"/>
+          <a:bodyPr tIns="54864" bIns="54864" rtlCol="0" anchor="ctr"/>
           <a:lstStyle/>
           <a:p>
             <a:pPr algn="ctr"/>
+            <a:endParaRPr/>
           </a:p>
         </p:txBody>
       </p:sp>
@@ -10422,10 +10580,11 @@
           </a:fontRef>
         </p:style>
         <p:txBody>
-          <a:bodyPr rtlCol="0" anchor="ctr" tIns="54864" bIns="54864"/>
+          <a:bodyPr tIns="54864" bIns="54864" rtlCol="0" anchor="ctr"/>
           <a:lstStyle/>
           <a:p>
             <a:pPr algn="ctr"/>
+            <a:endParaRPr/>
           </a:p>
         </p:txBody>
       </p:sp>
@@ -10468,10 +10627,11 @@
           </a:fontRef>
         </p:style>
         <p:txBody>
-          <a:bodyPr rtlCol="0" anchor="ctr" tIns="54864" bIns="54864"/>
+          <a:bodyPr tIns="54864" bIns="54864" rtlCol="0" anchor="ctr"/>
           <a:lstStyle/>
           <a:p>
             <a:pPr algn="ctr"/>
+            <a:endParaRPr/>
           </a:p>
         </p:txBody>
       </p:sp>
@@ -10514,10 +10674,11 @@
           </a:fontRef>
         </p:style>
         <p:txBody>
-          <a:bodyPr rtlCol="0" anchor="ctr" tIns="54864" bIns="54864"/>
+          <a:bodyPr tIns="54864" bIns="54864" rtlCol="0" anchor="ctr"/>
           <a:lstStyle/>
           <a:p>
             <a:pPr algn="ctr"/>
+            <a:endParaRPr/>
           </a:p>
         </p:txBody>
       </p:sp>
@@ -10560,10 +10721,11 @@
           </a:fontRef>
         </p:style>
         <p:txBody>
-          <a:bodyPr rtlCol="0" anchor="ctr" tIns="54864" bIns="54864"/>
+          <a:bodyPr tIns="54864" bIns="54864" rtlCol="0" anchor="ctr"/>
           <a:lstStyle/>
           <a:p>
             <a:pPr algn="ctr"/>
+            <a:endParaRPr/>
           </a:p>
         </p:txBody>
       </p:sp>
@@ -10606,10 +10768,11 @@
           </a:fontRef>
         </p:style>
         <p:txBody>
-          <a:bodyPr rtlCol="0" anchor="ctr" tIns="54864" bIns="54864"/>
+          <a:bodyPr tIns="54864" bIns="54864" rtlCol="0" anchor="ctr"/>
           <a:lstStyle/>
           <a:p>
             <a:pPr algn="ctr"/>
+            <a:endParaRPr/>
           </a:p>
         </p:txBody>
       </p:sp>
@@ -10652,10 +10815,11 @@
           </a:fontRef>
         </p:style>
         <p:txBody>
-          <a:bodyPr rtlCol="0" anchor="ctr" tIns="54864" bIns="54864"/>
+          <a:bodyPr tIns="54864" bIns="54864" rtlCol="0" anchor="ctr"/>
           <a:lstStyle/>
           <a:p>
             <a:pPr algn="ctr"/>
+            <a:endParaRPr/>
           </a:p>
         </p:txBody>
       </p:sp>
@@ -10698,10 +10862,11 @@
           </a:fontRef>
         </p:style>
         <p:txBody>
-          <a:bodyPr rtlCol="0" anchor="ctr" tIns="54864" bIns="54864"/>
+          <a:bodyPr tIns="54864" bIns="54864" rtlCol="0" anchor="ctr"/>
           <a:lstStyle/>
           <a:p>
             <a:pPr algn="ctr"/>
+            <a:endParaRPr/>
           </a:p>
         </p:txBody>
       </p:sp>
@@ -10744,10 +10909,11 @@
           </a:fontRef>
         </p:style>
         <p:txBody>
-          <a:bodyPr rtlCol="0" anchor="ctr" tIns="54864" bIns="54864"/>
+          <a:bodyPr tIns="54864" bIns="54864" rtlCol="0" anchor="ctr"/>
           <a:lstStyle/>
           <a:p>
             <a:pPr algn="ctr"/>
+            <a:endParaRPr/>
           </a:p>
         </p:txBody>
       </p:sp>
@@ -10790,10 +10956,11 @@
           </a:fontRef>
         </p:style>
         <p:txBody>
-          <a:bodyPr rtlCol="0" anchor="ctr" tIns="54864" bIns="54864"/>
+          <a:bodyPr tIns="54864" bIns="54864" rtlCol="0" anchor="ctr"/>
           <a:lstStyle/>
           <a:p>
             <a:pPr algn="ctr"/>
+            <a:endParaRPr/>
           </a:p>
         </p:txBody>
       </p:sp>
@@ -10836,10 +11003,11 @@
           </a:fontRef>
         </p:style>
         <p:txBody>
-          <a:bodyPr rtlCol="0" anchor="ctr" tIns="54864" bIns="54864"/>
+          <a:bodyPr tIns="54864" bIns="54864" rtlCol="0" anchor="ctr"/>
           <a:lstStyle/>
           <a:p>
             <a:pPr algn="ctr"/>
+            <a:endParaRPr/>
           </a:p>
         </p:txBody>
       </p:sp>
@@ -10882,10 +11050,11 @@
           </a:fontRef>
         </p:style>
         <p:txBody>
-          <a:bodyPr rtlCol="0" anchor="ctr" tIns="54864" bIns="54864"/>
+          <a:bodyPr tIns="54864" bIns="54864" rtlCol="0" anchor="ctr"/>
           <a:lstStyle/>
           <a:p>
             <a:pPr algn="ctr"/>
+            <a:endParaRPr/>
           </a:p>
         </p:txBody>
       </p:sp>
@@ -10928,10 +11097,11 @@
           </a:fontRef>
         </p:style>
         <p:txBody>
-          <a:bodyPr rtlCol="0" anchor="ctr" tIns="54864" bIns="54864"/>
+          <a:bodyPr tIns="54864" bIns="54864" rtlCol="0" anchor="ctr"/>
           <a:lstStyle/>
           <a:p>
             <a:pPr algn="ctr"/>
+            <a:endParaRPr/>
           </a:p>
         </p:txBody>
       </p:sp>
@@ -10974,10 +11144,11 @@
           </a:fontRef>
         </p:style>
         <p:txBody>
-          <a:bodyPr rtlCol="0" anchor="ctr" tIns="54864" bIns="54864"/>
+          <a:bodyPr tIns="54864" bIns="54864" rtlCol="0" anchor="ctr"/>
           <a:lstStyle/>
           <a:p>
             <a:pPr algn="ctr"/>
+            <a:endParaRPr/>
           </a:p>
         </p:txBody>
       </p:sp>
@@ -11020,10 +11191,11 @@
           </a:fontRef>
         </p:style>
         <p:txBody>
-          <a:bodyPr rtlCol="0" anchor="ctr" tIns="54864" bIns="54864"/>
+          <a:bodyPr tIns="54864" bIns="54864" rtlCol="0" anchor="ctr"/>
           <a:lstStyle/>
           <a:p>
             <a:pPr algn="ctr"/>
+            <a:endParaRPr/>
           </a:p>
         </p:txBody>
       </p:sp>
@@ -11066,10 +11238,11 @@
           </a:fontRef>
         </p:style>
         <p:txBody>
-          <a:bodyPr rtlCol="0" anchor="ctr" tIns="54864" bIns="54864"/>
+          <a:bodyPr tIns="54864" bIns="54864" rtlCol="0" anchor="ctr"/>
           <a:lstStyle/>
           <a:p>
             <a:pPr algn="ctr"/>
+            <a:endParaRPr/>
           </a:p>
         </p:txBody>
       </p:sp>
@@ -11112,10 +11285,11 @@
           </a:fontRef>
         </p:style>
         <p:txBody>
-          <a:bodyPr rtlCol="0" anchor="ctr" tIns="54864" bIns="54864"/>
+          <a:bodyPr tIns="54864" bIns="54864" rtlCol="0" anchor="ctr"/>
           <a:lstStyle/>
           <a:p>
             <a:pPr algn="ctr"/>
+            <a:endParaRPr/>
           </a:p>
         </p:txBody>
       </p:sp>
@@ -11158,10 +11332,11 @@
           </a:fontRef>
         </p:style>
         <p:txBody>
-          <a:bodyPr rtlCol="0" anchor="ctr" tIns="54864" bIns="54864"/>
+          <a:bodyPr tIns="54864" bIns="54864" rtlCol="0" anchor="ctr"/>
           <a:lstStyle/>
           <a:p>
             <a:pPr algn="ctr"/>
+            <a:endParaRPr/>
           </a:p>
         </p:txBody>
       </p:sp>
@@ -11204,10 +11379,11 @@
           </a:fontRef>
         </p:style>
         <p:txBody>
-          <a:bodyPr rtlCol="0" anchor="ctr" tIns="54864" bIns="54864"/>
+          <a:bodyPr tIns="54864" bIns="54864" rtlCol="0" anchor="ctr"/>
           <a:lstStyle/>
           <a:p>
             <a:pPr algn="ctr"/>
+            <a:endParaRPr/>
           </a:p>
         </p:txBody>
       </p:sp>
@@ -11250,10 +11426,11 @@
           </a:fontRef>
         </p:style>
         <p:txBody>
-          <a:bodyPr rtlCol="0" anchor="ctr" tIns="54864" bIns="54864"/>
+          <a:bodyPr tIns="54864" bIns="54864" rtlCol="0" anchor="ctr"/>
           <a:lstStyle/>
           <a:p>
             <a:pPr algn="ctr"/>
+            <a:endParaRPr/>
           </a:p>
         </p:txBody>
       </p:sp>
@@ -11296,10 +11473,11 @@
           </a:fontRef>
         </p:style>
         <p:txBody>
-          <a:bodyPr rtlCol="0" anchor="ctr" tIns="54864" bIns="54864"/>
+          <a:bodyPr tIns="54864" bIns="54864" rtlCol="0" anchor="ctr"/>
           <a:lstStyle/>
           <a:p>
             <a:pPr algn="ctr"/>
+            <a:endParaRPr/>
           </a:p>
         </p:txBody>
       </p:sp>
@@ -11342,10 +11520,11 @@
           </a:fontRef>
         </p:style>
         <p:txBody>
-          <a:bodyPr rtlCol="0" anchor="ctr" tIns="54864" bIns="54864"/>
+          <a:bodyPr tIns="54864" bIns="54864" rtlCol="0" anchor="ctr"/>
           <a:lstStyle/>
           <a:p>
             <a:pPr algn="ctr"/>
+            <a:endParaRPr/>
           </a:p>
         </p:txBody>
       </p:sp>
@@ -11388,10 +11567,11 @@
           </a:fontRef>
         </p:style>
         <p:txBody>
-          <a:bodyPr rtlCol="0" anchor="ctr" tIns="54864" bIns="54864"/>
+          <a:bodyPr tIns="54864" bIns="54864" rtlCol="0" anchor="ctr"/>
           <a:lstStyle/>
           <a:p>
             <a:pPr algn="ctr"/>
+            <a:endParaRPr/>
           </a:p>
         </p:txBody>
       </p:sp>
@@ -11434,10 +11614,11 @@
           </a:fontRef>
         </p:style>
         <p:txBody>
-          <a:bodyPr rtlCol="0" anchor="ctr" tIns="54864" bIns="54864"/>
+          <a:bodyPr tIns="54864" bIns="54864" rtlCol="0" anchor="ctr"/>
           <a:lstStyle/>
           <a:p>
             <a:pPr algn="ctr"/>
+            <a:endParaRPr/>
           </a:p>
         </p:txBody>
       </p:sp>
@@ -11480,10 +11661,11 @@
           </a:fontRef>
         </p:style>
         <p:txBody>
-          <a:bodyPr rtlCol="0" anchor="ctr" tIns="54864" bIns="54864"/>
+          <a:bodyPr tIns="54864" bIns="54864" rtlCol="0" anchor="ctr"/>
           <a:lstStyle/>
           <a:p>
             <a:pPr algn="ctr"/>
+            <a:endParaRPr/>
           </a:p>
         </p:txBody>
       </p:sp>
@@ -11526,10 +11708,11 @@
           </a:fontRef>
         </p:style>
         <p:txBody>
-          <a:bodyPr rtlCol="0" anchor="ctr" tIns="54864" bIns="54864"/>
+          <a:bodyPr tIns="54864" bIns="54864" rtlCol="0" anchor="ctr"/>
           <a:lstStyle/>
           <a:p>
             <a:pPr algn="ctr"/>
+            <a:endParaRPr/>
           </a:p>
         </p:txBody>
       </p:sp>
@@ -11572,10 +11755,11 @@
           </a:fontRef>
         </p:style>
         <p:txBody>
-          <a:bodyPr rtlCol="0" anchor="ctr" tIns="54864" bIns="54864"/>
+          <a:bodyPr tIns="54864" bIns="54864" rtlCol="0" anchor="ctr"/>
           <a:lstStyle/>
           <a:p>
             <a:pPr algn="ctr"/>
+            <a:endParaRPr/>
           </a:p>
         </p:txBody>
       </p:sp>
@@ -11618,10 +11802,11 @@
           </a:fontRef>
         </p:style>
         <p:txBody>
-          <a:bodyPr rtlCol="0" anchor="ctr" tIns="54864" bIns="54864"/>
+          <a:bodyPr tIns="54864" bIns="54864" rtlCol="0" anchor="ctr"/>
           <a:lstStyle/>
           <a:p>
             <a:pPr algn="ctr"/>
+            <a:endParaRPr/>
           </a:p>
         </p:txBody>
       </p:sp>
@@ -11664,10 +11849,11 @@
           </a:fontRef>
         </p:style>
         <p:txBody>
-          <a:bodyPr rtlCol="0" anchor="ctr" tIns="54864" bIns="54864"/>
+          <a:bodyPr tIns="54864" bIns="54864" rtlCol="0" anchor="ctr"/>
           <a:lstStyle/>
           <a:p>
             <a:pPr algn="ctr"/>
+            <a:endParaRPr/>
           </a:p>
         </p:txBody>
       </p:sp>
@@ -11710,10 +11896,11 @@
           </a:fontRef>
         </p:style>
         <p:txBody>
-          <a:bodyPr rtlCol="0" anchor="ctr" tIns="54864" bIns="54864"/>
+          <a:bodyPr tIns="54864" bIns="54864" rtlCol="0" anchor="ctr"/>
           <a:lstStyle/>
           <a:p>
             <a:pPr algn="ctr"/>
+            <a:endParaRPr/>
           </a:p>
         </p:txBody>
       </p:sp>
@@ -11756,10 +11943,11 @@
           </a:fontRef>
         </p:style>
         <p:txBody>
-          <a:bodyPr rtlCol="0" anchor="ctr" tIns="54864" bIns="54864"/>
+          <a:bodyPr tIns="54864" bIns="54864" rtlCol="0" anchor="ctr"/>
           <a:lstStyle/>
           <a:p>
             <a:pPr algn="ctr"/>
+            <a:endParaRPr/>
           </a:p>
         </p:txBody>
       </p:sp>
@@ -11802,10 +11990,11 @@
           </a:fontRef>
         </p:style>
         <p:txBody>
-          <a:bodyPr rtlCol="0" anchor="ctr" tIns="54864" bIns="54864"/>
+          <a:bodyPr tIns="54864" bIns="54864" rtlCol="0" anchor="ctr"/>
           <a:lstStyle/>
           <a:p>
             <a:pPr algn="ctr"/>
+            <a:endParaRPr/>
           </a:p>
         </p:txBody>
       </p:sp>
@@ -11848,10 +12037,11 @@
           </a:fontRef>
         </p:style>
         <p:txBody>
-          <a:bodyPr rtlCol="0" anchor="ctr" tIns="54864" bIns="54864"/>
+          <a:bodyPr tIns="54864" bIns="54864" rtlCol="0" anchor="ctr"/>
           <a:lstStyle/>
           <a:p>
             <a:pPr algn="ctr"/>
+            <a:endParaRPr/>
           </a:p>
         </p:txBody>
       </p:sp>
@@ -11894,10 +12084,11 @@
           </a:fontRef>
         </p:style>
         <p:txBody>
-          <a:bodyPr rtlCol="0" anchor="ctr" tIns="54864" bIns="54864"/>
+          <a:bodyPr tIns="54864" bIns="54864" rtlCol="0" anchor="ctr"/>
           <a:lstStyle/>
           <a:p>
             <a:pPr algn="ctr"/>
+            <a:endParaRPr/>
           </a:p>
         </p:txBody>
       </p:sp>
@@ -11940,10 +12131,11 @@
           </a:fontRef>
         </p:style>
         <p:txBody>
-          <a:bodyPr rtlCol="0" anchor="ctr" tIns="54864" bIns="54864"/>
+          <a:bodyPr tIns="54864" bIns="54864" rtlCol="0" anchor="ctr"/>
           <a:lstStyle/>
           <a:p>
             <a:pPr algn="ctr"/>
+            <a:endParaRPr/>
           </a:p>
         </p:txBody>
       </p:sp>
@@ -11986,10 +12178,11 @@
           </a:fontRef>
         </p:style>
         <p:txBody>
-          <a:bodyPr rtlCol="0" anchor="ctr" tIns="54864" bIns="54864"/>
+          <a:bodyPr tIns="54864" bIns="54864" rtlCol="0" anchor="ctr"/>
           <a:lstStyle/>
           <a:p>
             <a:pPr algn="ctr"/>
+            <a:endParaRPr/>
           </a:p>
         </p:txBody>
       </p:sp>
@@ -12032,10 +12225,11 @@
           </a:fontRef>
         </p:style>
         <p:txBody>
-          <a:bodyPr rtlCol="0" anchor="ctr" tIns="54864" bIns="54864"/>
+          <a:bodyPr tIns="54864" bIns="54864" rtlCol="0" anchor="ctr"/>
           <a:lstStyle/>
           <a:p>
             <a:pPr algn="ctr"/>
+            <a:endParaRPr/>
           </a:p>
         </p:txBody>
       </p:sp>
@@ -12078,10 +12272,11 @@
           </a:fontRef>
         </p:style>
         <p:txBody>
-          <a:bodyPr rtlCol="0" anchor="ctr" tIns="54864" bIns="54864"/>
+          <a:bodyPr tIns="54864" bIns="54864" rtlCol="0" anchor="ctr"/>
           <a:lstStyle/>
           <a:p>
             <a:pPr algn="ctr"/>
+            <a:endParaRPr/>
           </a:p>
         </p:txBody>
       </p:sp>
@@ -12124,10 +12319,11 @@
           </a:fontRef>
         </p:style>
         <p:txBody>
-          <a:bodyPr rtlCol="0" anchor="ctr" tIns="54864" bIns="54864"/>
+          <a:bodyPr tIns="54864" bIns="54864" rtlCol="0" anchor="ctr"/>
           <a:lstStyle/>
           <a:p>
             <a:pPr algn="ctr"/>
+            <a:endParaRPr/>
           </a:p>
         </p:txBody>
       </p:sp>
@@ -12170,10 +12366,11 @@
           </a:fontRef>
         </p:style>
         <p:txBody>
-          <a:bodyPr rtlCol="0" anchor="ctr" tIns="54864" bIns="54864"/>
+          <a:bodyPr tIns="54864" bIns="54864" rtlCol="0" anchor="ctr"/>
           <a:lstStyle/>
           <a:p>
             <a:pPr algn="ctr"/>
+            <a:endParaRPr/>
           </a:p>
         </p:txBody>
       </p:sp>
@@ -12216,10 +12413,11 @@
           </a:fontRef>
         </p:style>
         <p:txBody>
-          <a:bodyPr rtlCol="0" anchor="ctr" tIns="54864" bIns="54864"/>
+          <a:bodyPr tIns="54864" bIns="54864" rtlCol="0" anchor="ctr"/>
           <a:lstStyle/>
           <a:p>
             <a:pPr algn="ctr"/>
+            <a:endParaRPr/>
           </a:p>
         </p:txBody>
       </p:sp>
@@ -12262,10 +12460,11 @@
           </a:fontRef>
         </p:style>
         <p:txBody>
-          <a:bodyPr rtlCol="0" anchor="ctr" tIns="54864" bIns="54864"/>
+          <a:bodyPr tIns="54864" bIns="54864" rtlCol="0" anchor="ctr"/>
           <a:lstStyle/>
           <a:p>
             <a:pPr algn="ctr"/>
+            <a:endParaRPr/>
           </a:p>
         </p:txBody>
       </p:sp>
@@ -12308,10 +12507,11 @@
           </a:fontRef>
         </p:style>
         <p:txBody>
-          <a:bodyPr rtlCol="0" anchor="ctr" tIns="54864" bIns="54864"/>
+          <a:bodyPr tIns="54864" bIns="54864" rtlCol="0" anchor="ctr"/>
           <a:lstStyle/>
           <a:p>
             <a:pPr algn="ctr"/>
+            <a:endParaRPr/>
           </a:p>
         </p:txBody>
       </p:sp>
@@ -12354,10 +12554,11 @@
           </a:fontRef>
         </p:style>
         <p:txBody>
-          <a:bodyPr rtlCol="0" anchor="ctr" tIns="54864" bIns="54864"/>
+          <a:bodyPr tIns="54864" bIns="54864" rtlCol="0" anchor="ctr"/>
           <a:lstStyle/>
           <a:p>
             <a:pPr algn="ctr"/>
+            <a:endParaRPr/>
           </a:p>
         </p:txBody>
       </p:sp>
@@ -12400,10 +12601,11 @@
           </a:fontRef>
         </p:style>
         <p:txBody>
-          <a:bodyPr rtlCol="0" anchor="ctr" tIns="54864" bIns="54864"/>
+          <a:bodyPr tIns="54864" bIns="54864" rtlCol="0" anchor="ctr"/>
           <a:lstStyle/>
           <a:p>
             <a:pPr algn="ctr"/>
+            <a:endParaRPr/>
           </a:p>
         </p:txBody>
       </p:sp>
@@ -12446,10 +12648,11 @@
           </a:fontRef>
         </p:style>
         <p:txBody>
-          <a:bodyPr rtlCol="0" anchor="ctr" tIns="54864" bIns="54864"/>
+          <a:bodyPr tIns="54864" bIns="54864" rtlCol="0" anchor="ctr"/>
           <a:lstStyle/>
           <a:p>
             <a:pPr algn="ctr"/>
+            <a:endParaRPr/>
           </a:p>
         </p:txBody>
       </p:sp>
@@ -12492,10 +12695,11 @@
           </a:fontRef>
         </p:style>
         <p:txBody>
-          <a:bodyPr rtlCol="0" anchor="ctr" tIns="54864" bIns="54864"/>
+          <a:bodyPr tIns="54864" bIns="54864" rtlCol="0" anchor="ctr"/>
           <a:lstStyle/>
           <a:p>
             <a:pPr algn="ctr"/>
+            <a:endParaRPr/>
           </a:p>
         </p:txBody>
       </p:sp>
@@ -12538,10 +12742,11 @@
           </a:fontRef>
         </p:style>
         <p:txBody>
-          <a:bodyPr rtlCol="0" anchor="ctr" tIns="54864" bIns="54864"/>
+          <a:bodyPr tIns="54864" bIns="54864" rtlCol="0" anchor="ctr"/>
           <a:lstStyle/>
           <a:p>
             <a:pPr algn="ctr"/>
+            <a:endParaRPr/>
           </a:p>
         </p:txBody>
       </p:sp>
@@ -12584,10 +12789,11 @@
           </a:fontRef>
         </p:style>
         <p:txBody>
-          <a:bodyPr rtlCol="0" anchor="ctr" tIns="54864" bIns="54864"/>
+          <a:bodyPr tIns="54864" bIns="54864" rtlCol="0" anchor="ctr"/>
           <a:lstStyle/>
           <a:p>
             <a:pPr algn="ctr"/>
+            <a:endParaRPr/>
           </a:p>
         </p:txBody>
       </p:sp>
@@ -12630,10 +12836,11 @@
           </a:fontRef>
         </p:style>
         <p:txBody>
-          <a:bodyPr rtlCol="0" anchor="ctr" tIns="54864" bIns="54864"/>
+          <a:bodyPr tIns="54864" bIns="54864" rtlCol="0" anchor="ctr"/>
           <a:lstStyle/>
           <a:p>
             <a:pPr algn="ctr"/>
+            <a:endParaRPr/>
           </a:p>
         </p:txBody>
       </p:sp>
@@ -12654,7 +12861,7 @@
           <a:noFill/>
         </p:spPr>
         <p:txBody>
-          <a:bodyPr wrap="square" lIns="0" rIns="0" tIns="0" bIns="0">
+          <a:bodyPr wrap="square" lIns="0" tIns="0" rIns="0" bIns="0">
             <a:spAutoFit/>
           </a:bodyPr>
           <a:lstStyle/>
@@ -12717,10 +12924,11 @@
           </a:fontRef>
         </p:style>
         <p:txBody>
-          <a:bodyPr rtlCol="0" anchor="ctr" tIns="54864" bIns="54864"/>
+          <a:bodyPr tIns="54864" bIns="54864" rtlCol="0" anchor="ctr"/>
           <a:lstStyle/>
           <a:p>
             <a:pPr algn="ctr"/>
+            <a:endParaRPr/>
           </a:p>
         </p:txBody>
       </p:sp>
@@ -12741,7 +12949,7 @@
           <a:noFill/>
         </p:spPr>
         <p:txBody>
-          <a:bodyPr wrap="square" lIns="0" rIns="0" tIns="0" bIns="0">
+          <a:bodyPr wrap="square" lIns="0" tIns="0" rIns="0" bIns="0">
             <a:spAutoFit/>
           </a:bodyPr>
           <a:lstStyle/>
@@ -12852,10 +13060,11 @@
           </a:fontRef>
         </p:style>
         <p:txBody>
-          <a:bodyPr rtlCol="0" anchor="ctr" tIns="54864" bIns="54864"/>
+          <a:bodyPr tIns="54864" bIns="54864" rtlCol="0" anchor="ctr"/>
           <a:lstStyle/>
           <a:p>
             <a:pPr algn="ctr"/>
+            <a:endParaRPr/>
           </a:p>
         </p:txBody>
       </p:sp>
@@ -12876,7 +13085,7 @@
           <a:noFill/>
         </p:spPr>
         <p:txBody>
-          <a:bodyPr wrap="square" lIns="0" rIns="0" tIns="0" bIns="0">
+          <a:bodyPr wrap="square" lIns="0" tIns="0" rIns="0" bIns="0">
             <a:spAutoFit/>
           </a:bodyPr>
           <a:lstStyle/>
@@ -12915,7 +13124,7 @@
           <a:noFill/>
         </p:spPr>
         <p:txBody>
-          <a:bodyPr wrap="square" lIns="0" rIns="0" tIns="0" bIns="0">
+          <a:bodyPr wrap="square" lIns="0" tIns="0" rIns="0" bIns="0">
             <a:spAutoFit/>
           </a:bodyPr>
           <a:lstStyle/>
@@ -12978,10 +13187,11 @@
           </a:fontRef>
         </p:style>
         <p:txBody>
-          <a:bodyPr rtlCol="0" anchor="ctr" tIns="54864" bIns="54864"/>
+          <a:bodyPr tIns="54864" bIns="54864" rtlCol="0" anchor="ctr"/>
           <a:lstStyle/>
           <a:p>
             <a:pPr algn="ctr"/>
+            <a:endParaRPr/>
           </a:p>
         </p:txBody>
       </p:sp>
@@ -13002,7 +13212,7 @@
           <a:noFill/>
         </p:spPr>
         <p:txBody>
-          <a:bodyPr wrap="square" lIns="0" rIns="0" tIns="0" bIns="0">
+          <a:bodyPr wrap="square" lIns="0" tIns="0" rIns="0" bIns="0">
             <a:spAutoFit/>
           </a:bodyPr>
           <a:lstStyle/>
@@ -13097,7 +13307,7 @@
 </file>
 
 <file path=ppt/slides/slide13.xml><?xml version="1.0" encoding="utf-8"?>
-<p:sld xmlns:a="http://schemas.openxmlformats.org/drawingml/2006/main" xmlns:p="http://schemas.openxmlformats.org/presentationml/2006/main" xmlns:r="http://schemas.openxmlformats.org/officeDocument/2006/relationships">
+<p:sld xmlns:a="http://schemas.openxmlformats.org/drawingml/2006/main" xmlns:r="http://schemas.openxmlformats.org/officeDocument/2006/relationships" xmlns:p="http://schemas.openxmlformats.org/presentationml/2006/main">
   <p:cSld>
     <p:bg>
       <p:bgPr>
@@ -13113,7 +13323,14 @@
         <p:cNvGrpSpPr/>
         <p:nvPr/>
       </p:nvGrpSpPr>
-      <p:grpSpPr/>
+      <p:grpSpPr>
+        <a:xfrm>
+          <a:off x="0" y="0"/>
+          <a:ext cx="0" cy="0"/>
+          <a:chOff x="0" y="0"/>
+          <a:chExt cx="0" cy="0"/>
+        </a:xfrm>
+      </p:grpSpPr>
       <p:sp>
         <p:nvSpPr>
           <p:cNvPr id="2" name="TextBox 1"/>
@@ -13131,7 +13348,7 @@
           <a:noFill/>
         </p:spPr>
         <p:txBody>
-          <a:bodyPr wrap="square" lIns="0" rIns="0" tIns="0" bIns="0">
+          <a:bodyPr wrap="square" lIns="0" tIns="0" rIns="0" bIns="0">
             <a:spAutoFit/>
           </a:bodyPr>
           <a:lstStyle/>
@@ -13170,7 +13387,7 @@
           <a:noFill/>
         </p:spPr>
         <p:txBody>
-          <a:bodyPr wrap="square" lIns="0" rIns="0" tIns="0" bIns="0">
+          <a:bodyPr wrap="square" lIns="0" tIns="0" rIns="0" bIns="0">
             <a:spAutoFit/>
           </a:bodyPr>
           <a:lstStyle/>
@@ -13231,7 +13448,7 @@
           </a:fontRef>
         </p:style>
         <p:txBody>
-          <a:bodyPr rtlCol="0" anchor="ctr" tIns="54864" bIns="54864" wrap="none"/>
+          <a:bodyPr wrap="none" tIns="54864" bIns="54864" rtlCol="0" anchor="ctr"/>
           <a:lstStyle/>
           <a:p>
             <a:pPr algn="ctr"/>
@@ -13264,7 +13481,7 @@
           <a:noFill/>
         </p:spPr>
         <p:txBody>
-          <a:bodyPr wrap="none" lIns="0" rIns="0" tIns="0" bIns="0" anchor="ctr">
+          <a:bodyPr wrap="none" lIns="0" tIns="0" rIns="0" bIns="0" anchor="ctr">
             <a:spAutoFit/>
           </a:bodyPr>
           <a:lstStyle/>
@@ -13325,7 +13542,7 @@
           </a:fontRef>
         </p:style>
         <p:txBody>
-          <a:bodyPr rtlCol="0" anchor="ctr" tIns="54864" bIns="54864" wrap="none"/>
+          <a:bodyPr wrap="none" tIns="54864" bIns="54864" rtlCol="0" anchor="ctr"/>
           <a:lstStyle/>
           <a:p>
             <a:pPr algn="ctr"/>
@@ -13358,7 +13575,7 @@
           <a:noFill/>
         </p:spPr>
         <p:txBody>
-          <a:bodyPr wrap="none" lIns="0" rIns="0" tIns="0" bIns="0" anchor="ctr">
+          <a:bodyPr wrap="none" lIns="0" tIns="0" rIns="0" bIns="0" anchor="ctr">
             <a:spAutoFit/>
           </a:bodyPr>
           <a:lstStyle/>
@@ -13419,7 +13636,7 @@
           </a:fontRef>
         </p:style>
         <p:txBody>
-          <a:bodyPr rtlCol="0" anchor="ctr" tIns="54864" bIns="54864" wrap="none"/>
+          <a:bodyPr wrap="none" tIns="54864" bIns="54864" rtlCol="0" anchor="ctr"/>
           <a:lstStyle/>
           <a:p>
             <a:pPr algn="ctr"/>
@@ -13452,7 +13669,7 @@
           <a:noFill/>
         </p:spPr>
         <p:txBody>
-          <a:bodyPr wrap="none" lIns="0" rIns="0" tIns="0" bIns="0" anchor="ctr">
+          <a:bodyPr wrap="none" lIns="0" tIns="0" rIns="0" bIns="0" anchor="ctr">
             <a:spAutoFit/>
           </a:bodyPr>
           <a:lstStyle/>
@@ -13513,7 +13730,7 @@
           </a:fontRef>
         </p:style>
         <p:txBody>
-          <a:bodyPr rtlCol="0" anchor="ctr" tIns="54864" bIns="54864" wrap="none"/>
+          <a:bodyPr wrap="none" tIns="54864" bIns="54864" rtlCol="0" anchor="ctr"/>
           <a:lstStyle/>
           <a:p>
             <a:pPr algn="ctr"/>
@@ -13546,7 +13763,7 @@
           <a:noFill/>
         </p:spPr>
         <p:txBody>
-          <a:bodyPr wrap="none" lIns="0" rIns="0" tIns="0" bIns="0" anchor="ctr">
+          <a:bodyPr wrap="none" lIns="0" tIns="0" rIns="0" bIns="0" anchor="ctr">
             <a:spAutoFit/>
           </a:bodyPr>
           <a:lstStyle/>
@@ -13607,7 +13824,7 @@
           </a:fontRef>
         </p:style>
         <p:txBody>
-          <a:bodyPr rtlCol="0" anchor="ctr" tIns="54864" bIns="54864" wrap="none"/>
+          <a:bodyPr wrap="none" tIns="54864" bIns="54864" rtlCol="0" anchor="ctr"/>
           <a:lstStyle/>
           <a:p>
             <a:pPr algn="ctr"/>
@@ -13640,7 +13857,7 @@
           <a:noFill/>
         </p:spPr>
         <p:txBody>
-          <a:bodyPr wrap="none" lIns="0" rIns="0" tIns="0" bIns="0" anchor="ctr">
+          <a:bodyPr wrap="none" lIns="0" tIns="0" rIns="0" bIns="0" anchor="ctr">
             <a:spAutoFit/>
           </a:bodyPr>
           <a:lstStyle/>
@@ -13701,7 +13918,7 @@
           </a:fontRef>
         </p:style>
         <p:txBody>
-          <a:bodyPr rtlCol="0" anchor="ctr" tIns="54864" bIns="54864" wrap="none"/>
+          <a:bodyPr wrap="none" tIns="54864" bIns="54864" rtlCol="0" anchor="ctr"/>
           <a:lstStyle/>
           <a:p>
             <a:pPr algn="ctr"/>
@@ -13756,10 +13973,11 @@
           </a:fontRef>
         </p:style>
         <p:txBody>
-          <a:bodyPr rtlCol="0" anchor="ctr" tIns="54864" bIns="54864"/>
+          <a:bodyPr tIns="54864" bIns="54864" rtlCol="0" anchor="ctr"/>
           <a:lstStyle/>
           <a:p>
             <a:pPr algn="ctr"/>
+            <a:endParaRPr/>
           </a:p>
         </p:txBody>
       </p:sp>
@@ -13780,7 +13998,7 @@
           <a:noFill/>
         </p:spPr>
         <p:txBody>
-          <a:bodyPr wrap="square" lIns="0" rIns="0" tIns="0" bIns="0" anchor="ctr">
+          <a:bodyPr wrap="square" lIns="0" tIns="0" rIns="0" bIns="0" anchor="ctr">
             <a:spAutoFit/>
           </a:bodyPr>
           <a:lstStyle/>
@@ -13841,10 +14059,11 @@
           </a:fontRef>
         </p:style>
         <p:txBody>
-          <a:bodyPr rtlCol="0" anchor="ctr" tIns="54864" bIns="54864"/>
+          <a:bodyPr tIns="54864" bIns="54864" rtlCol="0" anchor="ctr"/>
           <a:lstStyle/>
           <a:p>
             <a:pPr algn="ctr"/>
+            <a:endParaRPr/>
           </a:p>
         </p:txBody>
       </p:sp>
@@ -13865,7 +14084,7 @@
           <a:noFill/>
         </p:spPr>
         <p:txBody>
-          <a:bodyPr wrap="square" lIns="0" rIns="0" tIns="0" bIns="0" anchor="ctr">
+          <a:bodyPr wrap="square" lIns="0" tIns="0" rIns="0" bIns="0" anchor="ctr">
             <a:spAutoFit/>
           </a:bodyPr>
           <a:lstStyle/>
@@ -13926,10 +14145,11 @@
           </a:fontRef>
         </p:style>
         <p:txBody>
-          <a:bodyPr rtlCol="0" anchor="ctr" tIns="54864" bIns="54864"/>
+          <a:bodyPr tIns="54864" bIns="54864" rtlCol="0" anchor="ctr"/>
           <a:lstStyle/>
           <a:p>
             <a:pPr algn="ctr"/>
+            <a:endParaRPr/>
           </a:p>
         </p:txBody>
       </p:sp>
@@ -13950,7 +14170,7 @@
           <a:noFill/>
         </p:spPr>
         <p:txBody>
-          <a:bodyPr wrap="square" lIns="0" rIns="0" tIns="0" bIns="0" anchor="ctr">
+          <a:bodyPr wrap="square" lIns="0" tIns="0" rIns="0" bIns="0" anchor="ctr">
             <a:spAutoFit/>
           </a:bodyPr>
           <a:lstStyle/>
@@ -14011,10 +14231,11 @@
           </a:fontRef>
         </p:style>
         <p:txBody>
-          <a:bodyPr rtlCol="0" anchor="ctr" tIns="54864" bIns="54864"/>
+          <a:bodyPr tIns="54864" bIns="54864" rtlCol="0" anchor="ctr"/>
           <a:lstStyle/>
           <a:p>
             <a:pPr algn="ctr"/>
+            <a:endParaRPr/>
           </a:p>
         </p:txBody>
       </p:sp>
@@ -14035,7 +14256,7 @@
           <a:noFill/>
         </p:spPr>
         <p:txBody>
-          <a:bodyPr wrap="square" lIns="0" rIns="0" tIns="0" bIns="0" anchor="ctr">
+          <a:bodyPr wrap="square" lIns="0" tIns="0" rIns="0" bIns="0" anchor="ctr">
             <a:spAutoFit/>
           </a:bodyPr>
           <a:lstStyle/>
@@ -14242,10 +14463,11 @@
           </a:fontRef>
         </p:style>
         <p:txBody>
-          <a:bodyPr rtlCol="0" anchor="ctr" tIns="54864" bIns="54864"/>
+          <a:bodyPr tIns="54864" bIns="54864" rtlCol="0" anchor="ctr"/>
           <a:lstStyle/>
           <a:p>
             <a:pPr algn="ctr"/>
+            <a:endParaRPr/>
           </a:p>
         </p:txBody>
       </p:sp>
@@ -14266,7 +14488,7 @@
           <a:noFill/>
         </p:spPr>
         <p:txBody>
-          <a:bodyPr wrap="square" lIns="0" rIns="0" tIns="0" bIns="0" anchor="ctr">
+          <a:bodyPr wrap="square" lIns="0" tIns="0" rIns="0" bIns="0" anchor="ctr">
             <a:spAutoFit/>
           </a:bodyPr>
           <a:lstStyle/>
@@ -14305,7 +14527,7 @@
           <a:noFill/>
         </p:spPr>
         <p:txBody>
-          <a:bodyPr wrap="square" lIns="0" rIns="0" tIns="0" bIns="0">
+          <a:bodyPr wrap="square" lIns="0" tIns="0" rIns="0" bIns="0">
             <a:spAutoFit/>
           </a:bodyPr>
           <a:lstStyle/>
@@ -14403,10 +14625,11 @@
           </a:fontRef>
         </p:style>
         <p:txBody>
-          <a:bodyPr rtlCol="0" anchor="ctr" tIns="54864" bIns="54864"/>
+          <a:bodyPr tIns="54864" bIns="54864" rtlCol="0" anchor="ctr"/>
           <a:lstStyle/>
           <a:p>
             <a:pPr algn="ctr"/>
+            <a:endParaRPr/>
           </a:p>
         </p:txBody>
       </p:sp>
@@ -14427,7 +14650,7 @@
           <a:noFill/>
         </p:spPr>
         <p:txBody>
-          <a:bodyPr wrap="square" lIns="0" rIns="0" tIns="0" bIns="0" anchor="ctr">
+          <a:bodyPr wrap="square" lIns="0" tIns="0" rIns="0" bIns="0" anchor="ctr">
             <a:spAutoFit/>
           </a:bodyPr>
           <a:lstStyle/>
@@ -14525,10 +14748,11 @@
           </a:fontRef>
         </p:style>
         <p:txBody>
-          <a:bodyPr rtlCol="0" anchor="ctr" tIns="54864" bIns="54864"/>
+          <a:bodyPr tIns="54864" bIns="54864" rtlCol="0" anchor="ctr"/>
           <a:lstStyle/>
           <a:p>
             <a:pPr algn="ctr"/>
+            <a:endParaRPr/>
           </a:p>
         </p:txBody>
       </p:sp>
@@ -14549,7 +14773,7 @@
           <a:noFill/>
         </p:spPr>
         <p:txBody>
-          <a:bodyPr wrap="square" lIns="0" rIns="0" tIns="0" bIns="0" anchor="ctr">
+          <a:bodyPr wrap="square" lIns="0" tIns="0" rIns="0" bIns="0" anchor="ctr">
             <a:spAutoFit/>
           </a:bodyPr>
           <a:lstStyle/>
@@ -14649,10 +14873,11 @@
           </a:fontRef>
         </p:style>
         <p:txBody>
-          <a:bodyPr rtlCol="0" anchor="ctr" tIns="54864" bIns="54864"/>
+          <a:bodyPr tIns="54864" bIns="54864" rtlCol="0" anchor="ctr"/>
           <a:lstStyle/>
           <a:p>
             <a:pPr algn="ctr"/>
+            <a:endParaRPr/>
           </a:p>
         </p:txBody>
       </p:sp>
@@ -14673,7 +14898,7 @@
           <a:noFill/>
         </p:spPr>
         <p:txBody>
-          <a:bodyPr wrap="square" lIns="0" rIns="0" tIns="0" bIns="0">
+          <a:bodyPr wrap="square" lIns="0" tIns="0" rIns="0" bIns="0">
             <a:spAutoFit/>
           </a:bodyPr>
           <a:lstStyle/>
@@ -14712,7 +14937,7 @@
           <a:noFill/>
         </p:spPr>
         <p:txBody>
-          <a:bodyPr wrap="square" lIns="0" rIns="0" tIns="0" bIns="0">
+          <a:bodyPr wrap="square" lIns="0" tIns="0" rIns="0" bIns="0">
             <a:spAutoFit/>
           </a:bodyPr>
           <a:lstStyle/>
@@ -14754,7 +14979,7 @@
           <a:noFill/>
         </p:spPr>
         <p:txBody>
-          <a:bodyPr wrap="square" lIns="0" rIns="0" tIns="0" bIns="0">
+          <a:bodyPr wrap="square" lIns="0" tIns="0" rIns="0" bIns="0">
             <a:spAutoFit/>
           </a:bodyPr>
           <a:lstStyle/>
@@ -14793,7 +15018,7 @@
           <a:noFill/>
         </p:spPr>
         <p:txBody>
-          <a:bodyPr wrap="square" lIns="0" rIns="0" tIns="0" bIns="0">
+          <a:bodyPr wrap="square" lIns="0" tIns="0" rIns="0" bIns="0">
             <a:spAutoFit/>
           </a:bodyPr>
           <a:lstStyle/>
@@ -14854,10 +15079,11 @@
           </a:fontRef>
         </p:style>
         <p:txBody>
-          <a:bodyPr rtlCol="0" anchor="ctr" tIns="54864" bIns="54864"/>
+          <a:bodyPr tIns="54864" bIns="54864" rtlCol="0" anchor="ctr"/>
           <a:lstStyle/>
           <a:p>
             <a:pPr algn="ctr"/>
+            <a:endParaRPr/>
           </a:p>
         </p:txBody>
       </p:sp>
@@ -14898,10 +15124,11 @@
           </a:fontRef>
         </p:style>
         <p:txBody>
-          <a:bodyPr rtlCol="0" anchor="ctr" tIns="54864" bIns="54864"/>
+          <a:bodyPr tIns="54864" bIns="54864" rtlCol="0" anchor="ctr"/>
           <a:lstStyle/>
           <a:p>
             <a:pPr algn="ctr"/>
+            <a:endParaRPr/>
           </a:p>
         </p:txBody>
       </p:sp>
@@ -14922,7 +15149,7 @@
           <a:noFill/>
         </p:spPr>
         <p:txBody>
-          <a:bodyPr wrap="square" lIns="0" rIns="0" tIns="0" bIns="0">
+          <a:bodyPr wrap="square" lIns="0" tIns="0" rIns="0" bIns="0">
             <a:spAutoFit/>
           </a:bodyPr>
           <a:lstStyle/>
@@ -14961,7 +15188,7 @@
           <a:noFill/>
         </p:spPr>
         <p:txBody>
-          <a:bodyPr wrap="square" lIns="0" rIns="0" tIns="0" bIns="0">
+          <a:bodyPr wrap="square" lIns="0" tIns="0" rIns="0" bIns="0">
             <a:spAutoFit/>
           </a:bodyPr>
           <a:lstStyle/>
@@ -14992,7 +15219,7 @@
 </file>
 
 <file path=ppt/slides/slide14.xml><?xml version="1.0" encoding="utf-8"?>
-<p:sld xmlns:a="http://schemas.openxmlformats.org/drawingml/2006/main" xmlns:p="http://schemas.openxmlformats.org/presentationml/2006/main" xmlns:r="http://schemas.openxmlformats.org/officeDocument/2006/relationships">
+<p:sld xmlns:a="http://schemas.openxmlformats.org/drawingml/2006/main" xmlns:r="http://schemas.openxmlformats.org/officeDocument/2006/relationships" xmlns:p="http://schemas.openxmlformats.org/presentationml/2006/main">
   <p:cSld>
     <p:bg>
       <p:bgPr>
@@ -15008,7 +15235,14 @@
         <p:cNvGrpSpPr/>
         <p:nvPr/>
       </p:nvGrpSpPr>
-      <p:grpSpPr/>
+      <p:grpSpPr>
+        <a:xfrm>
+          <a:off x="0" y="0"/>
+          <a:ext cx="0" cy="0"/>
+          <a:chOff x="0" y="0"/>
+          <a:chExt cx="0" cy="0"/>
+        </a:xfrm>
+      </p:grpSpPr>
       <p:sp>
         <p:nvSpPr>
           <p:cNvPr id="2" name="TextBox 1"/>
@@ -15026,7 +15260,7 @@
           <a:noFill/>
         </p:spPr>
         <p:txBody>
-          <a:bodyPr wrap="square" lIns="0" rIns="0" tIns="0" bIns="0">
+          <a:bodyPr wrap="square" lIns="0" tIns="0" rIns="0" bIns="0">
             <a:spAutoFit/>
           </a:bodyPr>
           <a:lstStyle/>
@@ -15065,7 +15299,7 @@
           <a:noFill/>
         </p:spPr>
         <p:txBody>
-          <a:bodyPr wrap="square" lIns="0" rIns="0" tIns="0" bIns="0">
+          <a:bodyPr wrap="square" lIns="0" tIns="0" rIns="0" bIns="0">
             <a:spAutoFit/>
           </a:bodyPr>
           <a:lstStyle/>
@@ -15104,7 +15338,7 @@
           <a:noFill/>
         </p:spPr>
         <p:txBody>
-          <a:bodyPr wrap="square" lIns="0" rIns="0" tIns="0" bIns="0">
+          <a:bodyPr wrap="square" lIns="0" tIns="0" rIns="0" bIns="0">
             <a:spAutoFit/>
           </a:bodyPr>
           <a:lstStyle/>
@@ -15134,7 +15368,7 @@
         </p:nvSpPr>
         <p:spPr>
           <a:xfrm>
-            <a:off x="502920" y="2167128"/>
+            <a:off x="502920" y="2286000"/>
             <a:ext cx="960120" cy="2103120"/>
           </a:xfrm>
           <a:prstGeom prst="rect">
@@ -15163,10 +15397,11 @@
           </a:fontRef>
         </p:style>
         <p:txBody>
-          <a:bodyPr rtlCol="0" anchor="ctr" tIns="54864" bIns="54864"/>
+          <a:bodyPr tIns="54864" bIns="54864" rtlCol="0" anchor="ctr"/>
           <a:lstStyle/>
           <a:p>
             <a:pPr algn="ctr"/>
+            <a:endParaRPr/>
           </a:p>
         </p:txBody>
       </p:sp>
@@ -15178,7 +15413,7 @@
         </p:nvSpPr>
         <p:spPr>
           <a:xfrm>
-            <a:off x="502920" y="1911095"/>
+            <a:off x="502920" y="2075689"/>
             <a:ext cx="960120" cy="219456"/>
           </a:xfrm>
           <a:prstGeom prst="rect">
@@ -15187,7 +15422,7 @@
           <a:noFill/>
         </p:spPr>
         <p:txBody>
-          <a:bodyPr wrap="square" lIns="0" rIns="0" tIns="0" bIns="0">
+          <a:bodyPr wrap="square" lIns="0" tIns="0" rIns="0" bIns="0">
             <a:spAutoFit/>
           </a:bodyPr>
           <a:lstStyle/>
@@ -15198,7 +15433,7 @@
               </a:lnSpc>
             </a:pPr>
             <a:r>
-              <a:rPr sz="1100" b="1" i="0">
+              <a:rPr sz="1100" b="1" i="0" dirty="0">
                 <a:solidFill>
                   <a:srgbClr val="161B22"/>
                 </a:solidFill>
@@ -15217,7 +15452,7 @@
         </p:nvSpPr>
         <p:spPr>
           <a:xfrm>
-            <a:off x="365760" y="4325112"/>
+            <a:off x="365760" y="4392324"/>
             <a:ext cx="1234440" cy="219456"/>
           </a:xfrm>
           <a:prstGeom prst="rect">
@@ -15226,7 +15461,7 @@
           <a:noFill/>
         </p:spPr>
         <p:txBody>
-          <a:bodyPr wrap="square" lIns="0" rIns="0" tIns="0" bIns="0">
+          <a:bodyPr wrap="square" lIns="0" tIns="0" rIns="0" bIns="0">
             <a:spAutoFit/>
           </a:bodyPr>
           <a:lstStyle/>
@@ -15237,7 +15472,7 @@
               </a:lnSpc>
             </a:pPr>
             <a:r>
-              <a:rPr sz="850" b="0" i="0">
+              <a:rPr sz="850" b="0" i="0" dirty="0">
                 <a:solidFill>
                   <a:srgbClr val="565F6E"/>
                 </a:solidFill>
@@ -15287,10 +15522,11 @@
           </a:fontRef>
         </p:style>
         <p:txBody>
-          <a:bodyPr rtlCol="0" anchor="ctr" tIns="54864" bIns="54864"/>
+          <a:bodyPr tIns="54864" bIns="54864" rtlCol="0" anchor="ctr"/>
           <a:lstStyle/>
           <a:p>
             <a:pPr algn="ctr"/>
+            <a:endParaRPr/>
           </a:p>
         </p:txBody>
       </p:sp>
@@ -15311,7 +15547,7 @@
           <a:noFill/>
         </p:spPr>
         <p:txBody>
-          <a:bodyPr wrap="square" lIns="0" rIns="0" tIns="0" bIns="0">
+          <a:bodyPr wrap="square" lIns="0" tIns="0" rIns="0" bIns="0">
             <a:spAutoFit/>
           </a:bodyPr>
           <a:lstStyle/>
@@ -15350,7 +15586,7 @@
           <a:noFill/>
         </p:spPr>
         <p:txBody>
-          <a:bodyPr wrap="square" lIns="0" rIns="0" tIns="0" bIns="0">
+          <a:bodyPr wrap="square" lIns="0" tIns="0" rIns="0" bIns="0">
             <a:spAutoFit/>
           </a:bodyPr>
           <a:lstStyle/>
@@ -15380,7 +15616,7 @@
         </p:nvCxnSpPr>
         <p:spPr>
           <a:xfrm>
-            <a:off x="1463040" y="2167128"/>
+            <a:off x="1463040" y="2372868"/>
             <a:ext cx="502920" cy="411480"/>
           </a:xfrm>
           <a:prstGeom prst="line">
@@ -15448,10 +15684,11 @@
           </a:fontRef>
         </p:style>
         <p:txBody>
-          <a:bodyPr rtlCol="0" anchor="ctr" tIns="54864" bIns="54864"/>
+          <a:bodyPr tIns="54864" bIns="54864" rtlCol="0" anchor="ctr"/>
           <a:lstStyle/>
           <a:p>
             <a:pPr algn="ctr"/>
+            <a:endParaRPr/>
           </a:p>
         </p:txBody>
       </p:sp>
@@ -15472,7 +15709,7 @@
           <a:noFill/>
         </p:spPr>
         <p:txBody>
-          <a:bodyPr wrap="square" lIns="0" rIns="0" tIns="0" bIns="0">
+          <a:bodyPr wrap="square" lIns="0" tIns="0" rIns="0" bIns="0">
             <a:spAutoFit/>
           </a:bodyPr>
           <a:lstStyle/>
@@ -15511,7 +15748,7 @@
           <a:noFill/>
         </p:spPr>
         <p:txBody>
-          <a:bodyPr wrap="square" lIns="0" rIns="0" tIns="0" bIns="0">
+          <a:bodyPr wrap="square" lIns="0" tIns="0" rIns="0" bIns="0">
             <a:spAutoFit/>
           </a:bodyPr>
           <a:lstStyle/>
@@ -15609,10 +15846,11 @@
           </a:fontRef>
         </p:style>
         <p:txBody>
-          <a:bodyPr rtlCol="0" anchor="ctr" tIns="54864" bIns="54864"/>
+          <a:bodyPr tIns="54864" bIns="54864" rtlCol="0" anchor="ctr"/>
           <a:lstStyle/>
           <a:p>
             <a:pPr algn="ctr"/>
+            <a:endParaRPr/>
           </a:p>
         </p:txBody>
       </p:sp>
@@ -15633,7 +15871,7 @@
           <a:noFill/>
         </p:spPr>
         <p:txBody>
-          <a:bodyPr wrap="square" lIns="0" rIns="0" tIns="0" bIns="0">
+          <a:bodyPr wrap="square" lIns="0" tIns="0" rIns="0" bIns="0">
             <a:spAutoFit/>
           </a:bodyPr>
           <a:lstStyle/>
@@ -15672,7 +15910,7 @@
           <a:noFill/>
         </p:spPr>
         <p:txBody>
-          <a:bodyPr wrap="square" lIns="0" rIns="0" tIns="0" bIns="0">
+          <a:bodyPr wrap="square" lIns="0" tIns="0" rIns="0" bIns="0">
             <a:spAutoFit/>
           </a:bodyPr>
           <a:lstStyle/>
@@ -15768,10 +16006,11 @@
           </a:fontRef>
         </p:style>
         <p:txBody>
-          <a:bodyPr rtlCol="0" anchor="ctr" tIns="54864" bIns="54864"/>
+          <a:bodyPr tIns="54864" bIns="54864" rtlCol="0" anchor="ctr"/>
           <a:lstStyle/>
           <a:p>
             <a:pPr algn="ctr"/>
+            <a:endParaRPr/>
           </a:p>
         </p:txBody>
       </p:sp>
@@ -15792,7 +16031,7 @@
           <a:noFill/>
         </p:spPr>
         <p:txBody>
-          <a:bodyPr wrap="square" lIns="0" rIns="0" tIns="0" bIns="0">
+          <a:bodyPr wrap="square" lIns="0" tIns="0" rIns="0" bIns="0">
             <a:spAutoFit/>
           </a:bodyPr>
           <a:lstStyle/>
@@ -15831,7 +16070,7 @@
           <a:noFill/>
         </p:spPr>
         <p:txBody>
-          <a:bodyPr wrap="square" lIns="0" rIns="0" tIns="0" bIns="0">
+          <a:bodyPr wrap="square" lIns="0" tIns="0" rIns="0" bIns="0">
             <a:spAutoFit/>
           </a:bodyPr>
           <a:lstStyle/>
@@ -15931,10 +16170,11 @@
           </a:fontRef>
         </p:style>
         <p:txBody>
-          <a:bodyPr rtlCol="0" anchor="ctr" tIns="54864" bIns="54864"/>
+          <a:bodyPr tIns="54864" bIns="54864" rtlCol="0" anchor="ctr"/>
           <a:lstStyle/>
           <a:p>
             <a:pPr algn="ctr"/>
+            <a:endParaRPr/>
           </a:p>
         </p:txBody>
       </p:sp>
@@ -15955,7 +16195,7 @@
           <a:noFill/>
         </p:spPr>
         <p:txBody>
-          <a:bodyPr wrap="square" lIns="0" rIns="0" tIns="0" bIns="0">
+          <a:bodyPr wrap="square" lIns="0" tIns="0" rIns="0" bIns="0">
             <a:spAutoFit/>
           </a:bodyPr>
           <a:lstStyle/>
@@ -15994,7 +16234,7 @@
           <a:noFill/>
         </p:spPr>
         <p:txBody>
-          <a:bodyPr wrap="square" lIns="0" rIns="0" tIns="0" bIns="0">
+          <a:bodyPr wrap="square" lIns="0" tIns="0" rIns="0" bIns="0">
             <a:spAutoFit/>
           </a:bodyPr>
           <a:lstStyle/>
@@ -16033,7 +16273,7 @@
           <a:noFill/>
         </p:spPr>
         <p:txBody>
-          <a:bodyPr wrap="square" lIns="0" rIns="0" tIns="0" bIns="0">
+          <a:bodyPr wrap="square" lIns="0" tIns="0" rIns="0" bIns="0">
             <a:spAutoFit/>
           </a:bodyPr>
           <a:lstStyle/>
@@ -16094,7 +16334,7 @@
           </a:fontRef>
         </p:style>
         <p:txBody>
-          <a:bodyPr rtlCol="0" anchor="ctr" tIns="54864" bIns="54864" wrap="none"/>
+          <a:bodyPr wrap="none" tIns="54864" bIns="54864" rtlCol="0" anchor="ctr"/>
           <a:lstStyle/>
           <a:p>
             <a:pPr algn="ctr"/>
@@ -16149,7 +16389,7 @@
           </a:fontRef>
         </p:style>
         <p:txBody>
-          <a:bodyPr rtlCol="0" anchor="ctr" tIns="54864" bIns="54864" wrap="none"/>
+          <a:bodyPr wrap="none" tIns="54864" bIns="54864" rtlCol="0" anchor="ctr"/>
           <a:lstStyle/>
           <a:p>
             <a:pPr algn="ctr"/>
@@ -16204,7 +16444,7 @@
           </a:fontRef>
         </p:style>
         <p:txBody>
-          <a:bodyPr rtlCol="0" anchor="ctr" tIns="54864" bIns="54864" wrap="none"/>
+          <a:bodyPr wrap="none" tIns="54864" bIns="54864" rtlCol="0" anchor="ctr"/>
           <a:lstStyle/>
           <a:p>
             <a:pPr algn="ctr"/>
@@ -16229,7 +16469,7 @@
 </file>
 
 <file path=ppt/slides/slide15.xml><?xml version="1.0" encoding="utf-8"?>
-<p:sld xmlns:a="http://schemas.openxmlformats.org/drawingml/2006/main" xmlns:p="http://schemas.openxmlformats.org/presentationml/2006/main" xmlns:r="http://schemas.openxmlformats.org/officeDocument/2006/relationships">
+<p:sld xmlns:a="http://schemas.openxmlformats.org/drawingml/2006/main" xmlns:r="http://schemas.openxmlformats.org/officeDocument/2006/relationships" xmlns:p="http://schemas.openxmlformats.org/presentationml/2006/main">
   <p:cSld>
     <p:bg>
       <p:bgPr>
@@ -16245,7 +16485,14 @@
         <p:cNvGrpSpPr/>
         <p:nvPr/>
       </p:nvGrpSpPr>
-      <p:grpSpPr/>
+      <p:grpSpPr>
+        <a:xfrm>
+          <a:off x="0" y="0"/>
+          <a:ext cx="0" cy="0"/>
+          <a:chOff x="0" y="0"/>
+          <a:chExt cx="0" cy="0"/>
+        </a:xfrm>
+      </p:grpSpPr>
       <p:sp>
         <p:nvSpPr>
           <p:cNvPr id="2" name="TextBox 1"/>
@@ -16263,7 +16510,7 @@
           <a:noFill/>
         </p:spPr>
         <p:txBody>
-          <a:bodyPr wrap="square" lIns="0" rIns="0" tIns="0" bIns="0">
+          <a:bodyPr wrap="square" lIns="0" tIns="0" rIns="0" bIns="0">
             <a:spAutoFit/>
           </a:bodyPr>
           <a:lstStyle/>
@@ -16302,7 +16549,7 @@
           <a:noFill/>
         </p:spPr>
         <p:txBody>
-          <a:bodyPr wrap="square" lIns="0" rIns="0" tIns="0" bIns="0">
+          <a:bodyPr wrap="square" lIns="0" tIns="0" rIns="0" bIns="0">
             <a:spAutoFit/>
           </a:bodyPr>
           <a:lstStyle/>
@@ -16363,10 +16610,11 @@
           </a:fontRef>
         </p:style>
         <p:txBody>
-          <a:bodyPr rtlCol="0" anchor="ctr" tIns="54864" bIns="54864"/>
+          <a:bodyPr tIns="54864" bIns="54864" rtlCol="0" anchor="ctr"/>
           <a:lstStyle/>
           <a:p>
             <a:pPr algn="ctr"/>
+            <a:endParaRPr/>
           </a:p>
         </p:txBody>
       </p:sp>
@@ -16407,10 +16655,11 @@
           </a:fontRef>
         </p:style>
         <p:txBody>
-          <a:bodyPr rtlCol="0" anchor="ctr" tIns="54864" bIns="54864"/>
+          <a:bodyPr tIns="54864" bIns="54864" rtlCol="0" anchor="ctr"/>
           <a:lstStyle/>
           <a:p>
             <a:pPr algn="ctr"/>
+            <a:endParaRPr/>
           </a:p>
         </p:txBody>
       </p:sp>
@@ -16431,7 +16680,7 @@
           <a:noFill/>
         </p:spPr>
         <p:txBody>
-          <a:bodyPr wrap="square" lIns="0" rIns="0" tIns="0" bIns="0">
+          <a:bodyPr wrap="square" lIns="0" tIns="0" rIns="0" bIns="0">
             <a:spAutoFit/>
           </a:bodyPr>
           <a:lstStyle/>
@@ -16470,7 +16719,7 @@
           <a:noFill/>
         </p:spPr>
         <p:txBody>
-          <a:bodyPr wrap="square" lIns="0" rIns="0" tIns="0" bIns="0">
+          <a:bodyPr wrap="square" lIns="0" tIns="0" rIns="0" bIns="0">
             <a:spAutoFit/>
           </a:bodyPr>
           <a:lstStyle/>
@@ -16531,10 +16780,11 @@
           </a:fontRef>
         </p:style>
         <p:txBody>
-          <a:bodyPr rtlCol="0" anchor="ctr" tIns="54864" bIns="54864"/>
+          <a:bodyPr tIns="54864" bIns="54864" rtlCol="0" anchor="ctr"/>
           <a:lstStyle/>
           <a:p>
             <a:pPr algn="ctr"/>
+            <a:endParaRPr/>
           </a:p>
         </p:txBody>
       </p:sp>
@@ -16575,10 +16825,11 @@
           </a:fontRef>
         </p:style>
         <p:txBody>
-          <a:bodyPr rtlCol="0" anchor="ctr" tIns="54864" bIns="54864"/>
+          <a:bodyPr tIns="54864" bIns="54864" rtlCol="0" anchor="ctr"/>
           <a:lstStyle/>
           <a:p>
             <a:pPr algn="ctr"/>
+            <a:endParaRPr/>
           </a:p>
         </p:txBody>
       </p:sp>
@@ -16599,7 +16850,7 @@
           <a:noFill/>
         </p:spPr>
         <p:txBody>
-          <a:bodyPr wrap="square" lIns="0" rIns="0" tIns="0" bIns="0">
+          <a:bodyPr wrap="square" lIns="0" tIns="0" rIns="0" bIns="0">
             <a:spAutoFit/>
           </a:bodyPr>
           <a:lstStyle/>
@@ -16638,7 +16889,7 @@
           <a:noFill/>
         </p:spPr>
         <p:txBody>
-          <a:bodyPr wrap="square" lIns="0" rIns="0" tIns="0" bIns="0">
+          <a:bodyPr wrap="square" lIns="0" tIns="0" rIns="0" bIns="0">
             <a:spAutoFit/>
           </a:bodyPr>
           <a:lstStyle/>
@@ -16699,10 +16950,11 @@
           </a:fontRef>
         </p:style>
         <p:txBody>
-          <a:bodyPr rtlCol="0" anchor="ctr" tIns="54864" bIns="54864"/>
+          <a:bodyPr tIns="54864" bIns="54864" rtlCol="0" anchor="ctr"/>
           <a:lstStyle/>
           <a:p>
             <a:pPr algn="ctr"/>
+            <a:endParaRPr/>
           </a:p>
         </p:txBody>
       </p:sp>
@@ -16743,10 +16995,11 @@
           </a:fontRef>
         </p:style>
         <p:txBody>
-          <a:bodyPr rtlCol="0" anchor="ctr" tIns="54864" bIns="54864"/>
+          <a:bodyPr tIns="54864" bIns="54864" rtlCol="0" anchor="ctr"/>
           <a:lstStyle/>
           <a:p>
             <a:pPr algn="ctr"/>
+            <a:endParaRPr/>
           </a:p>
         </p:txBody>
       </p:sp>
@@ -16767,7 +17020,7 @@
           <a:noFill/>
         </p:spPr>
         <p:txBody>
-          <a:bodyPr wrap="square" lIns="0" rIns="0" tIns="0" bIns="0">
+          <a:bodyPr wrap="square" lIns="0" tIns="0" rIns="0" bIns="0">
             <a:spAutoFit/>
           </a:bodyPr>
           <a:lstStyle/>
@@ -16806,7 +17059,7 @@
           <a:noFill/>
         </p:spPr>
         <p:txBody>
-          <a:bodyPr wrap="square" lIns="0" rIns="0" tIns="0" bIns="0">
+          <a:bodyPr wrap="square" lIns="0" tIns="0" rIns="0" bIns="0">
             <a:spAutoFit/>
           </a:bodyPr>
           <a:lstStyle/>
@@ -16867,10 +17120,11 @@
           </a:fontRef>
         </p:style>
         <p:txBody>
-          <a:bodyPr rtlCol="0" anchor="ctr" tIns="54864" bIns="54864"/>
+          <a:bodyPr tIns="54864" bIns="54864" rtlCol="0" anchor="ctr"/>
           <a:lstStyle/>
           <a:p>
             <a:pPr algn="ctr"/>
+            <a:endParaRPr/>
           </a:p>
         </p:txBody>
       </p:sp>
@@ -16911,10 +17165,11 @@
           </a:fontRef>
         </p:style>
         <p:txBody>
-          <a:bodyPr rtlCol="0" anchor="ctr" tIns="54864" bIns="54864"/>
+          <a:bodyPr tIns="54864" bIns="54864" rtlCol="0" anchor="ctr"/>
           <a:lstStyle/>
           <a:p>
             <a:pPr algn="ctr"/>
+            <a:endParaRPr/>
           </a:p>
         </p:txBody>
       </p:sp>
@@ -16935,7 +17190,7 @@
           <a:noFill/>
         </p:spPr>
         <p:txBody>
-          <a:bodyPr wrap="square" lIns="0" rIns="0" tIns="0" bIns="0">
+          <a:bodyPr wrap="square" lIns="0" tIns="0" rIns="0" bIns="0">
             <a:spAutoFit/>
           </a:bodyPr>
           <a:lstStyle/>
@@ -16974,7 +17229,7 @@
           <a:noFill/>
         </p:spPr>
         <p:txBody>
-          <a:bodyPr wrap="square" lIns="0" rIns="0" tIns="0" bIns="0">
+          <a:bodyPr wrap="square" lIns="0" tIns="0" rIns="0" bIns="0">
             <a:spAutoFit/>
           </a:bodyPr>
           <a:lstStyle/>
@@ -17037,10 +17292,11 @@
           </a:fontRef>
         </p:style>
         <p:txBody>
-          <a:bodyPr rtlCol="0" anchor="ctr" tIns="54864" bIns="54864"/>
+          <a:bodyPr tIns="54864" bIns="54864" rtlCol="0" anchor="ctr"/>
           <a:lstStyle/>
           <a:p>
             <a:pPr algn="ctr"/>
+            <a:endParaRPr/>
           </a:p>
         </p:txBody>
       </p:sp>
@@ -17061,7 +17317,7 @@
           <a:noFill/>
         </p:spPr>
         <p:txBody>
-          <a:bodyPr wrap="square" lIns="0" rIns="0" tIns="0" bIns="0">
+          <a:bodyPr wrap="square" lIns="0" tIns="0" rIns="0" bIns="0">
             <a:spAutoFit/>
           </a:bodyPr>
           <a:lstStyle/>
@@ -17100,7 +17356,7 @@
           <a:noFill/>
         </p:spPr>
         <p:txBody>
-          <a:bodyPr wrap="square" lIns="0" rIns="0" tIns="0" bIns="0">
+          <a:bodyPr wrap="square" lIns="0" tIns="0" rIns="0" bIns="0">
             <a:spAutoFit/>
           </a:bodyPr>
           <a:lstStyle/>
@@ -17131,7 +17387,7 @@
 </file>
 
 <file path=ppt/slides/slide16.xml><?xml version="1.0" encoding="utf-8"?>
-<p:sld xmlns:a="http://schemas.openxmlformats.org/drawingml/2006/main" xmlns:p="http://schemas.openxmlformats.org/presentationml/2006/main" xmlns:r="http://schemas.openxmlformats.org/officeDocument/2006/relationships">
+<p:sld xmlns:a="http://schemas.openxmlformats.org/drawingml/2006/main" xmlns:r="http://schemas.openxmlformats.org/officeDocument/2006/relationships" xmlns:p="http://schemas.openxmlformats.org/presentationml/2006/main">
   <p:cSld>
     <p:bg>
       <p:bgPr>
@@ -17147,7 +17403,14 @@
         <p:cNvGrpSpPr/>
         <p:nvPr/>
       </p:nvGrpSpPr>
-      <p:grpSpPr/>
+      <p:grpSpPr>
+        <a:xfrm>
+          <a:off x="0" y="0"/>
+          <a:ext cx="0" cy="0"/>
+          <a:chOff x="0" y="0"/>
+          <a:chExt cx="0" cy="0"/>
+        </a:xfrm>
+      </p:grpSpPr>
       <p:sp>
         <p:nvSpPr>
           <p:cNvPr id="2" name="TextBox 1"/>
@@ -17165,7 +17428,7 @@
           <a:noFill/>
         </p:spPr>
         <p:txBody>
-          <a:bodyPr wrap="square" lIns="0" rIns="0" tIns="0" bIns="0">
+          <a:bodyPr wrap="square" lIns="0" tIns="0" rIns="0" bIns="0">
             <a:spAutoFit/>
           </a:bodyPr>
           <a:lstStyle/>
@@ -17204,7 +17467,7 @@
           <a:noFill/>
         </p:spPr>
         <p:txBody>
-          <a:bodyPr wrap="square" lIns="0" rIns="0" tIns="0" bIns="0">
+          <a:bodyPr wrap="square" lIns="0" tIns="0" rIns="0" bIns="0">
             <a:spAutoFit/>
           </a:bodyPr>
           <a:lstStyle/>
@@ -17267,10 +17530,11 @@
           </a:fontRef>
         </p:style>
         <p:txBody>
-          <a:bodyPr rtlCol="0" anchor="ctr" tIns="54864" bIns="54864"/>
+          <a:bodyPr tIns="54864" bIns="54864" rtlCol="0" anchor="ctr"/>
           <a:lstStyle/>
           <a:p>
             <a:pPr algn="ctr"/>
+            <a:endParaRPr/>
           </a:p>
         </p:txBody>
       </p:sp>
@@ -17291,7 +17555,7 @@
           <a:noFill/>
         </p:spPr>
         <p:txBody>
-          <a:bodyPr wrap="square" lIns="0" rIns="0" tIns="0" bIns="0">
+          <a:bodyPr wrap="square" lIns="0" tIns="0" rIns="0" bIns="0">
             <a:spAutoFit/>
           </a:bodyPr>
           <a:lstStyle/>
@@ -17330,7 +17594,7 @@
           <a:noFill/>
         </p:spPr>
         <p:txBody>
-          <a:bodyPr wrap="square" lIns="0" rIns="0" tIns="0" bIns="0">
+          <a:bodyPr wrap="square" lIns="0" tIns="0" rIns="0" bIns="0">
             <a:spAutoFit/>
           </a:bodyPr>
           <a:lstStyle/>
@@ -17393,10 +17657,11 @@
           </a:fontRef>
         </p:style>
         <p:txBody>
-          <a:bodyPr rtlCol="0" anchor="ctr" tIns="54864" bIns="54864"/>
+          <a:bodyPr tIns="54864" bIns="54864" rtlCol="0" anchor="ctr"/>
           <a:lstStyle/>
           <a:p>
             <a:pPr algn="ctr"/>
+            <a:endParaRPr/>
           </a:p>
         </p:txBody>
       </p:sp>
@@ -17417,7 +17682,7 @@
           <a:noFill/>
         </p:spPr>
         <p:txBody>
-          <a:bodyPr wrap="square" lIns="0" rIns="0" tIns="0" bIns="0">
+          <a:bodyPr wrap="square" lIns="0" tIns="0" rIns="0" bIns="0">
             <a:spAutoFit/>
           </a:bodyPr>
           <a:lstStyle/>
@@ -17456,7 +17721,7 @@
           <a:noFill/>
         </p:spPr>
         <p:txBody>
-          <a:bodyPr wrap="square" lIns="0" rIns="0" tIns="0" bIns="0">
+          <a:bodyPr wrap="square" lIns="0" tIns="0" rIns="0" bIns="0">
             <a:spAutoFit/>
           </a:bodyPr>
           <a:lstStyle/>
@@ -17519,10 +17784,11 @@
           </a:fontRef>
         </p:style>
         <p:txBody>
-          <a:bodyPr rtlCol="0" anchor="ctr" tIns="54864" bIns="54864"/>
+          <a:bodyPr tIns="54864" bIns="54864" rtlCol="0" anchor="ctr"/>
           <a:lstStyle/>
           <a:p>
             <a:pPr algn="ctr"/>
+            <a:endParaRPr/>
           </a:p>
         </p:txBody>
       </p:sp>
@@ -17543,7 +17809,7 @@
           <a:noFill/>
         </p:spPr>
         <p:txBody>
-          <a:bodyPr wrap="square" lIns="0" rIns="0" tIns="0" bIns="0">
+          <a:bodyPr wrap="square" lIns="0" tIns="0" rIns="0" bIns="0">
             <a:spAutoFit/>
           </a:bodyPr>
           <a:lstStyle/>
@@ -17582,7 +17848,7 @@
           <a:noFill/>
         </p:spPr>
         <p:txBody>
-          <a:bodyPr wrap="square" lIns="0" rIns="0" tIns="0" bIns="0">
+          <a:bodyPr wrap="square" lIns="0" tIns="0" rIns="0" bIns="0">
             <a:spAutoFit/>
           </a:bodyPr>
           <a:lstStyle/>
@@ -17645,10 +17911,11 @@
           </a:fontRef>
         </p:style>
         <p:txBody>
-          <a:bodyPr rtlCol="0" anchor="ctr" tIns="54864" bIns="54864"/>
+          <a:bodyPr tIns="54864" bIns="54864" rtlCol="0" anchor="ctr"/>
           <a:lstStyle/>
           <a:p>
             <a:pPr algn="ctr"/>
+            <a:endParaRPr/>
           </a:p>
         </p:txBody>
       </p:sp>
@@ -17669,7 +17936,7 @@
           <a:noFill/>
         </p:spPr>
         <p:txBody>
-          <a:bodyPr wrap="square" lIns="0" rIns="0" tIns="0" bIns="0">
+          <a:bodyPr wrap="square" lIns="0" tIns="0" rIns="0" bIns="0">
             <a:spAutoFit/>
           </a:bodyPr>
           <a:lstStyle/>
@@ -17708,7 +17975,7 @@
           <a:noFill/>
         </p:spPr>
         <p:txBody>
-          <a:bodyPr wrap="square" lIns="0" rIns="0" tIns="0" bIns="0">
+          <a:bodyPr wrap="square" lIns="0" tIns="0" rIns="0" bIns="0">
             <a:spAutoFit/>
           </a:bodyPr>
           <a:lstStyle/>
@@ -17771,10 +18038,11 @@
           </a:fontRef>
         </p:style>
         <p:txBody>
-          <a:bodyPr rtlCol="0" anchor="ctr" tIns="54864" bIns="54864"/>
+          <a:bodyPr tIns="54864" bIns="54864" rtlCol="0" anchor="ctr"/>
           <a:lstStyle/>
           <a:p>
             <a:pPr algn="ctr"/>
+            <a:endParaRPr/>
           </a:p>
         </p:txBody>
       </p:sp>
@@ -17795,7 +18063,7 @@
           <a:noFill/>
         </p:spPr>
         <p:txBody>
-          <a:bodyPr wrap="square" lIns="0" rIns="0" tIns="0" bIns="0">
+          <a:bodyPr wrap="square" lIns="0" tIns="0" rIns="0" bIns="0">
             <a:spAutoFit/>
           </a:bodyPr>
           <a:lstStyle/>
@@ -17834,7 +18102,7 @@
           <a:noFill/>
         </p:spPr>
         <p:txBody>
-          <a:bodyPr wrap="square" lIns="0" rIns="0" tIns="0" bIns="0">
+          <a:bodyPr wrap="square" lIns="0" tIns="0" rIns="0" bIns="0">
             <a:spAutoFit/>
           </a:bodyPr>
           <a:lstStyle/>
@@ -17897,10 +18165,11 @@
           </a:fontRef>
         </p:style>
         <p:txBody>
-          <a:bodyPr rtlCol="0" anchor="ctr" tIns="54864" bIns="54864"/>
+          <a:bodyPr tIns="54864" bIns="54864" rtlCol="0" anchor="ctr"/>
           <a:lstStyle/>
           <a:p>
             <a:pPr algn="ctr"/>
+            <a:endParaRPr/>
           </a:p>
         </p:txBody>
       </p:sp>
@@ -17921,7 +18190,7 @@
           <a:noFill/>
         </p:spPr>
         <p:txBody>
-          <a:bodyPr wrap="square" lIns="0" rIns="0" tIns="0" bIns="0">
+          <a:bodyPr wrap="square" lIns="0" tIns="0" rIns="0" bIns="0">
             <a:spAutoFit/>
           </a:bodyPr>
           <a:lstStyle/>
@@ -17960,7 +18229,7 @@
           <a:noFill/>
         </p:spPr>
         <p:txBody>
-          <a:bodyPr wrap="square" lIns="0" rIns="0" tIns="0" bIns="0">
+          <a:bodyPr wrap="square" lIns="0" tIns="0" rIns="0" bIns="0">
             <a:spAutoFit/>
           </a:bodyPr>
           <a:lstStyle/>
@@ -17991,7 +18260,7 @@
 </file>
 
 <file path=ppt/slides/slide17.xml><?xml version="1.0" encoding="utf-8"?>
-<p:sld xmlns:a="http://schemas.openxmlformats.org/drawingml/2006/main" xmlns:p="http://schemas.openxmlformats.org/presentationml/2006/main" xmlns:r="http://schemas.openxmlformats.org/officeDocument/2006/relationships">
+<p:sld xmlns:a="http://schemas.openxmlformats.org/drawingml/2006/main" xmlns:r="http://schemas.openxmlformats.org/officeDocument/2006/relationships" xmlns:p="http://schemas.openxmlformats.org/presentationml/2006/main">
   <p:cSld>
     <p:bg>
       <p:bgPr>
@@ -18007,7 +18276,14 @@
         <p:cNvGrpSpPr/>
         <p:nvPr/>
       </p:nvGrpSpPr>
-      <p:grpSpPr/>
+      <p:grpSpPr>
+        <a:xfrm>
+          <a:off x="0" y="0"/>
+          <a:ext cx="0" cy="0"/>
+          <a:chOff x="0" y="0"/>
+          <a:chExt cx="0" cy="0"/>
+        </a:xfrm>
+      </p:grpSpPr>
       <p:sp>
         <p:nvSpPr>
           <p:cNvPr id="2" name="TextBox 1"/>
@@ -18025,7 +18301,7 @@
           <a:noFill/>
         </p:spPr>
         <p:txBody>
-          <a:bodyPr wrap="square" lIns="0" rIns="0" tIns="0" bIns="0">
+          <a:bodyPr wrap="square" lIns="0" tIns="0" rIns="0" bIns="0">
             <a:spAutoFit/>
           </a:bodyPr>
           <a:lstStyle/>
@@ -18064,7 +18340,7 @@
           <a:noFill/>
         </p:spPr>
         <p:txBody>
-          <a:bodyPr wrap="square" lIns="0" rIns="0" tIns="0" bIns="0">
+          <a:bodyPr wrap="square" lIns="0" tIns="0" rIns="0" bIns="0">
             <a:spAutoFit/>
           </a:bodyPr>
           <a:lstStyle/>
@@ -18127,10 +18403,11 @@
           </a:fontRef>
         </p:style>
         <p:txBody>
-          <a:bodyPr rtlCol="0" anchor="ctr" tIns="54864" bIns="54864"/>
+          <a:bodyPr tIns="54864" bIns="54864" rtlCol="0" anchor="ctr"/>
           <a:lstStyle/>
           <a:p>
             <a:pPr algn="ctr"/>
+            <a:endParaRPr/>
           </a:p>
         </p:txBody>
       </p:sp>
@@ -18151,7 +18428,7 @@
           <a:noFill/>
         </p:spPr>
         <p:txBody>
-          <a:bodyPr wrap="square" lIns="0" rIns="0" tIns="0" bIns="0">
+          <a:bodyPr wrap="square" lIns="0" tIns="0" rIns="0" bIns="0">
             <a:spAutoFit/>
           </a:bodyPr>
           <a:lstStyle/>
@@ -18190,7 +18467,7 @@
           <a:noFill/>
         </p:spPr>
         <p:txBody>
-          <a:bodyPr wrap="square" lIns="0" rIns="0" tIns="0" bIns="0">
+          <a:bodyPr wrap="square" lIns="0" tIns="0" rIns="0" bIns="0">
             <a:spAutoFit/>
           </a:bodyPr>
           <a:lstStyle/>
@@ -18362,10 +18639,11 @@
           </a:fontRef>
         </p:style>
         <p:txBody>
-          <a:bodyPr rtlCol="0" anchor="ctr" tIns="54864" bIns="54864"/>
+          <a:bodyPr tIns="54864" bIns="54864" rtlCol="0" anchor="ctr"/>
           <a:lstStyle/>
           <a:p>
             <a:pPr algn="ctr"/>
+            <a:endParaRPr/>
           </a:p>
         </p:txBody>
       </p:sp>
@@ -18386,7 +18664,7 @@
           <a:noFill/>
         </p:spPr>
         <p:txBody>
-          <a:bodyPr wrap="square" lIns="0" rIns="0" tIns="0" bIns="0">
+          <a:bodyPr wrap="square" lIns="0" tIns="0" rIns="0" bIns="0">
             <a:spAutoFit/>
           </a:bodyPr>
           <a:lstStyle/>
@@ -18425,7 +18703,7 @@
           <a:noFill/>
         </p:spPr>
         <p:txBody>
-          <a:bodyPr wrap="square" lIns="0" rIns="0" tIns="0" bIns="0">
+          <a:bodyPr wrap="square" lIns="0" tIns="0" rIns="0" bIns="0">
             <a:spAutoFit/>
           </a:bodyPr>
           <a:lstStyle/>
@@ -18548,7 +18826,7 @@
           <a:noFill/>
         </p:spPr>
         <p:txBody>
-          <a:bodyPr wrap="square" lIns="0" rIns="0" tIns="0" bIns="0">
+          <a:bodyPr wrap="square" lIns="0" tIns="0" rIns="0" bIns="0">
             <a:spAutoFit/>
           </a:bodyPr>
           <a:lstStyle/>
@@ -18579,7 +18857,7 @@
 </file>
 
 <file path=ppt/slides/slide2.xml><?xml version="1.0" encoding="utf-8"?>
-<p:sld xmlns:a="http://schemas.openxmlformats.org/drawingml/2006/main" xmlns:p="http://schemas.openxmlformats.org/presentationml/2006/main" xmlns:r="http://schemas.openxmlformats.org/officeDocument/2006/relationships">
+<p:sld xmlns:a="http://schemas.openxmlformats.org/drawingml/2006/main" xmlns:r="http://schemas.openxmlformats.org/officeDocument/2006/relationships" xmlns:p="http://schemas.openxmlformats.org/presentationml/2006/main">
   <p:cSld>
     <p:bg>
       <p:bgPr>
@@ -18595,7 +18873,14 @@
         <p:cNvGrpSpPr/>
         <p:nvPr/>
       </p:nvGrpSpPr>
-      <p:grpSpPr/>
+      <p:grpSpPr>
+        <a:xfrm>
+          <a:off x="0" y="0"/>
+          <a:ext cx="0" cy="0"/>
+          <a:chOff x="0" y="0"/>
+          <a:chExt cx="0" cy="0"/>
+        </a:xfrm>
+      </p:grpSpPr>
       <p:sp>
         <p:nvSpPr>
           <p:cNvPr id="2" name="TextBox 1"/>
@@ -18613,7 +18898,7 @@
           <a:noFill/>
         </p:spPr>
         <p:txBody>
-          <a:bodyPr wrap="square" lIns="0" rIns="0" tIns="0" bIns="0">
+          <a:bodyPr wrap="square" lIns="0" tIns="0" rIns="0" bIns="0">
             <a:spAutoFit/>
           </a:bodyPr>
           <a:lstStyle/>
@@ -18652,7 +18937,7 @@
           <a:noFill/>
         </p:spPr>
         <p:txBody>
-          <a:bodyPr wrap="square" lIns="0" rIns="0" tIns="0" bIns="0">
+          <a:bodyPr wrap="square" lIns="0" tIns="0" rIns="0" bIns="0">
             <a:spAutoFit/>
           </a:bodyPr>
           <a:lstStyle/>
@@ -18691,7 +18976,7 @@
           <a:noFill/>
         </p:spPr>
         <p:txBody>
-          <a:bodyPr wrap="square" lIns="0" rIns="0" tIns="0" bIns="0">
+          <a:bodyPr wrap="square" lIns="0" tIns="0" rIns="0" bIns="0">
             <a:spAutoFit/>
           </a:bodyPr>
           <a:lstStyle/>
@@ -18754,10 +19039,11 @@
           </a:fontRef>
         </p:style>
         <p:txBody>
-          <a:bodyPr rtlCol="0" anchor="ctr" tIns="54864" bIns="54864"/>
+          <a:bodyPr tIns="54864" bIns="54864" rtlCol="0" anchor="ctr"/>
           <a:lstStyle/>
           <a:p>
             <a:pPr algn="ctr"/>
+            <a:endParaRPr/>
           </a:p>
         </p:txBody>
       </p:sp>
@@ -18778,7 +19064,7 @@
           <a:noFill/>
         </p:spPr>
         <p:txBody>
-          <a:bodyPr wrap="square" lIns="0" rIns="0" tIns="0" bIns="0">
+          <a:bodyPr wrap="square" lIns="0" tIns="0" rIns="0" bIns="0">
             <a:spAutoFit/>
           </a:bodyPr>
           <a:lstStyle/>
@@ -18817,7 +19103,7 @@
           <a:noFill/>
         </p:spPr>
         <p:txBody>
-          <a:bodyPr wrap="square" lIns="0" rIns="0" tIns="0" bIns="0">
+          <a:bodyPr wrap="square" lIns="0" tIns="0" rIns="0" bIns="0">
             <a:spAutoFit/>
           </a:bodyPr>
           <a:lstStyle/>
@@ -18880,10 +19166,11 @@
           </a:fontRef>
         </p:style>
         <p:txBody>
-          <a:bodyPr rtlCol="0" anchor="ctr" tIns="54864" bIns="54864"/>
+          <a:bodyPr tIns="54864" bIns="54864" rtlCol="0" anchor="ctr"/>
           <a:lstStyle/>
           <a:p>
             <a:pPr algn="ctr"/>
+            <a:endParaRPr/>
           </a:p>
         </p:txBody>
       </p:sp>
@@ -18904,7 +19191,7 @@
           <a:noFill/>
         </p:spPr>
         <p:txBody>
-          <a:bodyPr wrap="square" lIns="0" rIns="0" tIns="0" bIns="0">
+          <a:bodyPr wrap="square" lIns="0" tIns="0" rIns="0" bIns="0">
             <a:spAutoFit/>
           </a:bodyPr>
           <a:lstStyle/>
@@ -18943,7 +19230,7 @@
           <a:noFill/>
         </p:spPr>
         <p:txBody>
-          <a:bodyPr wrap="square" lIns="0" rIns="0" tIns="0" bIns="0">
+          <a:bodyPr wrap="square" lIns="0" tIns="0" rIns="0" bIns="0">
             <a:spAutoFit/>
           </a:bodyPr>
           <a:lstStyle/>
@@ -19006,10 +19293,11 @@
           </a:fontRef>
         </p:style>
         <p:txBody>
-          <a:bodyPr rtlCol="0" anchor="ctr" tIns="54864" bIns="54864"/>
+          <a:bodyPr tIns="54864" bIns="54864" rtlCol="0" anchor="ctr"/>
           <a:lstStyle/>
           <a:p>
             <a:pPr algn="ctr"/>
+            <a:endParaRPr/>
           </a:p>
         </p:txBody>
       </p:sp>
@@ -19030,7 +19318,7 @@
           <a:noFill/>
         </p:spPr>
         <p:txBody>
-          <a:bodyPr wrap="square" lIns="0" rIns="0" tIns="0" bIns="0">
+          <a:bodyPr wrap="square" lIns="0" tIns="0" rIns="0" bIns="0">
             <a:spAutoFit/>
           </a:bodyPr>
           <a:lstStyle/>
@@ -19069,7 +19357,7 @@
           <a:noFill/>
         </p:spPr>
         <p:txBody>
-          <a:bodyPr wrap="square" lIns="0" rIns="0" tIns="0" bIns="0">
+          <a:bodyPr wrap="square" lIns="0" tIns="0" rIns="0" bIns="0">
             <a:spAutoFit/>
           </a:bodyPr>
           <a:lstStyle/>
@@ -19130,10 +19418,11 @@
           </a:fontRef>
         </p:style>
         <p:txBody>
-          <a:bodyPr rtlCol="0" anchor="ctr" tIns="54864" bIns="54864"/>
+          <a:bodyPr tIns="54864" bIns="54864" rtlCol="0" anchor="ctr"/>
           <a:lstStyle/>
           <a:p>
             <a:pPr algn="ctr"/>
+            <a:endParaRPr/>
           </a:p>
         </p:txBody>
       </p:sp>
@@ -19174,10 +19463,11 @@
           </a:fontRef>
         </p:style>
         <p:txBody>
-          <a:bodyPr rtlCol="0" anchor="ctr" tIns="54864" bIns="54864"/>
+          <a:bodyPr tIns="54864" bIns="54864" rtlCol="0" anchor="ctr"/>
           <a:lstStyle/>
           <a:p>
             <a:pPr algn="ctr"/>
+            <a:endParaRPr/>
           </a:p>
         </p:txBody>
       </p:sp>
@@ -19198,7 +19488,7 @@
           <a:noFill/>
         </p:spPr>
         <p:txBody>
-          <a:bodyPr wrap="square" lIns="0" rIns="0" tIns="0" bIns="0">
+          <a:bodyPr wrap="square" lIns="0" tIns="0" rIns="0" bIns="0">
             <a:spAutoFit/>
           </a:bodyPr>
           <a:lstStyle/>
@@ -19237,7 +19527,7 @@
           <a:noFill/>
         </p:spPr>
         <p:txBody>
-          <a:bodyPr wrap="square" lIns="0" rIns="0" tIns="0" bIns="0">
+          <a:bodyPr wrap="square" lIns="0" tIns="0" rIns="0" bIns="0">
             <a:spAutoFit/>
           </a:bodyPr>
           <a:lstStyle/>
@@ -19268,7 +19558,7 @@
 </file>
 
 <file path=ppt/slides/slide3.xml><?xml version="1.0" encoding="utf-8"?>
-<p:sld xmlns:a="http://schemas.openxmlformats.org/drawingml/2006/main" xmlns:p="http://schemas.openxmlformats.org/presentationml/2006/main" xmlns:r="http://schemas.openxmlformats.org/officeDocument/2006/relationships">
+<p:sld xmlns:a="http://schemas.openxmlformats.org/drawingml/2006/main" xmlns:r="http://schemas.openxmlformats.org/officeDocument/2006/relationships" xmlns:p="http://schemas.openxmlformats.org/presentationml/2006/main">
   <p:cSld>
     <p:bg>
       <p:bgPr>
@@ -19284,7 +19574,14 @@
         <p:cNvGrpSpPr/>
         <p:nvPr/>
       </p:nvGrpSpPr>
-      <p:grpSpPr/>
+      <p:grpSpPr>
+        <a:xfrm>
+          <a:off x="0" y="0"/>
+          <a:ext cx="0" cy="0"/>
+          <a:chOff x="0" y="0"/>
+          <a:chExt cx="0" cy="0"/>
+        </a:xfrm>
+      </p:grpSpPr>
       <p:sp>
         <p:nvSpPr>
           <p:cNvPr id="2" name="TextBox 1"/>
@@ -19302,7 +19599,7 @@
           <a:noFill/>
         </p:spPr>
         <p:txBody>
-          <a:bodyPr wrap="square" lIns="0" rIns="0" tIns="0" bIns="0">
+          <a:bodyPr wrap="square" lIns="0" tIns="0" rIns="0" bIns="0">
             <a:spAutoFit/>
           </a:bodyPr>
           <a:lstStyle/>
@@ -19341,7 +19638,7 @@
           <a:noFill/>
         </p:spPr>
         <p:txBody>
-          <a:bodyPr wrap="square" lIns="0" rIns="0" tIns="0" bIns="0">
+          <a:bodyPr wrap="square" lIns="0" tIns="0" rIns="0" bIns="0">
             <a:spAutoFit/>
           </a:bodyPr>
           <a:lstStyle/>
@@ -19404,10 +19701,11 @@
           </a:fontRef>
         </p:style>
         <p:txBody>
-          <a:bodyPr rtlCol="0" anchor="ctr" tIns="54864" bIns="54864"/>
+          <a:bodyPr tIns="54864" bIns="54864" rtlCol="0" anchor="ctr"/>
           <a:lstStyle/>
           <a:p>
             <a:pPr algn="ctr"/>
+            <a:endParaRPr/>
           </a:p>
         </p:txBody>
       </p:sp>
@@ -19428,7 +19726,7 @@
           <a:noFill/>
         </p:spPr>
         <p:txBody>
-          <a:bodyPr wrap="square" lIns="0" rIns="0" tIns="0" bIns="0">
+          <a:bodyPr wrap="square" lIns="0" tIns="0" rIns="0" bIns="0">
             <a:spAutoFit/>
           </a:bodyPr>
           <a:lstStyle/>
@@ -19467,7 +19765,7 @@
           <a:noFill/>
         </p:spPr>
         <p:txBody>
-          <a:bodyPr wrap="square" lIns="0" rIns="0" tIns="0" bIns="0">
+          <a:bodyPr wrap="square" lIns="0" tIns="0" rIns="0" bIns="0">
             <a:spAutoFit/>
           </a:bodyPr>
           <a:lstStyle/>
@@ -19567,10 +19865,11 @@
           </a:fontRef>
         </p:style>
         <p:txBody>
-          <a:bodyPr rtlCol="0" anchor="ctr" tIns="54864" bIns="54864"/>
+          <a:bodyPr tIns="54864" bIns="54864" rtlCol="0" anchor="ctr"/>
           <a:lstStyle/>
           <a:p>
             <a:pPr algn="ctr"/>
+            <a:endParaRPr/>
           </a:p>
         </p:txBody>
       </p:sp>
@@ -19591,7 +19890,7 @@
           <a:noFill/>
         </p:spPr>
         <p:txBody>
-          <a:bodyPr wrap="square" lIns="0" rIns="0" tIns="0" bIns="0">
+          <a:bodyPr wrap="square" lIns="0" tIns="0" rIns="0" bIns="0">
             <a:spAutoFit/>
           </a:bodyPr>
           <a:lstStyle/>
@@ -19630,7 +19929,7 @@
           <a:noFill/>
         </p:spPr>
         <p:txBody>
-          <a:bodyPr wrap="square" lIns="0" rIns="0" tIns="0" bIns="0">
+          <a:bodyPr wrap="square" lIns="0" tIns="0" rIns="0" bIns="0">
             <a:spAutoFit/>
           </a:bodyPr>
           <a:lstStyle/>
@@ -19730,10 +20029,11 @@
           </a:fontRef>
         </p:style>
         <p:txBody>
-          <a:bodyPr rtlCol="0" anchor="ctr" tIns="54864" bIns="54864"/>
+          <a:bodyPr tIns="54864" bIns="54864" rtlCol="0" anchor="ctr"/>
           <a:lstStyle/>
           <a:p>
             <a:pPr algn="ctr"/>
+            <a:endParaRPr/>
           </a:p>
         </p:txBody>
       </p:sp>
@@ -19754,7 +20054,7 @@
           <a:noFill/>
         </p:spPr>
         <p:txBody>
-          <a:bodyPr wrap="square" lIns="0" rIns="0" tIns="0" bIns="0">
+          <a:bodyPr wrap="square" lIns="0" tIns="0" rIns="0" bIns="0">
             <a:spAutoFit/>
           </a:bodyPr>
           <a:lstStyle/>
@@ -19793,7 +20093,7 @@
           <a:noFill/>
         </p:spPr>
         <p:txBody>
-          <a:bodyPr wrap="square" lIns="0" rIns="0" tIns="0" bIns="0">
+          <a:bodyPr wrap="square" lIns="0" tIns="0" rIns="0" bIns="0">
             <a:spAutoFit/>
           </a:bodyPr>
           <a:lstStyle/>
@@ -19893,10 +20193,11 @@
           </a:fontRef>
         </p:style>
         <p:txBody>
-          <a:bodyPr rtlCol="0" anchor="ctr" tIns="54864" bIns="54864"/>
+          <a:bodyPr tIns="54864" bIns="54864" rtlCol="0" anchor="ctr"/>
           <a:lstStyle/>
           <a:p>
             <a:pPr algn="ctr"/>
+            <a:endParaRPr/>
           </a:p>
         </p:txBody>
       </p:sp>
@@ -19917,7 +20218,7 @@
           <a:noFill/>
         </p:spPr>
         <p:txBody>
-          <a:bodyPr wrap="square" lIns="0" rIns="0" tIns="0" bIns="0">
+          <a:bodyPr wrap="square" lIns="0" tIns="0" rIns="0" bIns="0">
             <a:spAutoFit/>
           </a:bodyPr>
           <a:lstStyle/>
@@ -19956,7 +20257,7 @@
           <a:noFill/>
         </p:spPr>
         <p:txBody>
-          <a:bodyPr wrap="square" lIns="0" rIns="0" tIns="0" bIns="0">
+          <a:bodyPr wrap="square" lIns="0" tIns="0" rIns="0" bIns="0">
             <a:spAutoFit/>
           </a:bodyPr>
           <a:lstStyle/>
@@ -20056,10 +20357,11 @@
           </a:fontRef>
         </p:style>
         <p:txBody>
-          <a:bodyPr rtlCol="0" anchor="ctr" tIns="54864" bIns="54864"/>
+          <a:bodyPr tIns="54864" bIns="54864" rtlCol="0" anchor="ctr"/>
           <a:lstStyle/>
           <a:p>
             <a:pPr algn="ctr"/>
+            <a:endParaRPr/>
           </a:p>
         </p:txBody>
       </p:sp>
@@ -20080,7 +20382,7 @@
           <a:noFill/>
         </p:spPr>
         <p:txBody>
-          <a:bodyPr wrap="square" lIns="0" rIns="0" tIns="0" bIns="0">
+          <a:bodyPr wrap="square" lIns="0" tIns="0" rIns="0" bIns="0">
             <a:spAutoFit/>
           </a:bodyPr>
           <a:lstStyle/>
@@ -20119,7 +20421,7 @@
           <a:noFill/>
         </p:spPr>
         <p:txBody>
-          <a:bodyPr wrap="square" lIns="0" rIns="0" tIns="0" bIns="0">
+          <a:bodyPr wrap="square" lIns="0" tIns="0" rIns="0" bIns="0">
             <a:spAutoFit/>
           </a:bodyPr>
           <a:lstStyle/>
@@ -20219,10 +20521,11 @@
           </a:fontRef>
         </p:style>
         <p:txBody>
-          <a:bodyPr rtlCol="0" anchor="ctr" tIns="54864" bIns="54864"/>
+          <a:bodyPr tIns="54864" bIns="54864" rtlCol="0" anchor="ctr"/>
           <a:lstStyle/>
           <a:p>
             <a:pPr algn="ctr"/>
+            <a:endParaRPr/>
           </a:p>
         </p:txBody>
       </p:sp>
@@ -20243,7 +20546,7 @@
           <a:noFill/>
         </p:spPr>
         <p:txBody>
-          <a:bodyPr wrap="square" lIns="0" rIns="0" tIns="0" bIns="0">
+          <a:bodyPr wrap="square" lIns="0" tIns="0" rIns="0" bIns="0">
             <a:spAutoFit/>
           </a:bodyPr>
           <a:lstStyle/>
@@ -20282,7 +20585,7 @@
           <a:noFill/>
         </p:spPr>
         <p:txBody>
-          <a:bodyPr wrap="square" lIns="0" rIns="0" tIns="0" bIns="0">
+          <a:bodyPr wrap="square" lIns="0" tIns="0" rIns="0" bIns="0">
             <a:spAutoFit/>
           </a:bodyPr>
           <a:lstStyle/>
@@ -20321,7 +20624,7 @@
           <a:noFill/>
         </p:spPr>
         <p:txBody>
-          <a:bodyPr wrap="square" lIns="0" rIns="0" tIns="0" bIns="0">
+          <a:bodyPr wrap="square" lIns="0" tIns="0" rIns="0" bIns="0">
             <a:spAutoFit/>
           </a:bodyPr>
           <a:lstStyle/>
@@ -20384,10 +20687,11 @@
           </a:fontRef>
         </p:style>
         <p:txBody>
-          <a:bodyPr rtlCol="0" anchor="ctr" tIns="54864" bIns="54864"/>
+          <a:bodyPr tIns="54864" bIns="54864" rtlCol="0" anchor="ctr"/>
           <a:lstStyle/>
           <a:p>
             <a:pPr algn="ctr"/>
+            <a:endParaRPr/>
           </a:p>
         </p:txBody>
       </p:sp>
@@ -20408,7 +20712,7 @@
           <a:noFill/>
         </p:spPr>
         <p:txBody>
-          <a:bodyPr wrap="square" lIns="0" rIns="0" tIns="0" bIns="0">
+          <a:bodyPr wrap="square" lIns="0" tIns="0" rIns="0" bIns="0">
             <a:spAutoFit/>
           </a:bodyPr>
           <a:lstStyle/>
@@ -20447,7 +20751,7 @@
           <a:noFill/>
         </p:spPr>
         <p:txBody>
-          <a:bodyPr wrap="square" lIns="0" rIns="0" tIns="0" bIns="0">
+          <a:bodyPr wrap="square" lIns="0" tIns="0" rIns="0" bIns="0">
             <a:spAutoFit/>
           </a:bodyPr>
           <a:lstStyle/>
@@ -20510,10 +20814,11 @@
           </a:fontRef>
         </p:style>
         <p:txBody>
-          <a:bodyPr rtlCol="0" anchor="ctr" tIns="54864" bIns="54864"/>
+          <a:bodyPr tIns="54864" bIns="54864" rtlCol="0" anchor="ctr"/>
           <a:lstStyle/>
           <a:p>
             <a:pPr algn="ctr"/>
+            <a:endParaRPr/>
           </a:p>
         </p:txBody>
       </p:sp>
@@ -20534,7 +20839,7 @@
           <a:noFill/>
         </p:spPr>
         <p:txBody>
-          <a:bodyPr wrap="square" lIns="0" rIns="0" tIns="0" bIns="0">
+          <a:bodyPr wrap="square" lIns="0" tIns="0" rIns="0" bIns="0">
             <a:spAutoFit/>
           </a:bodyPr>
           <a:lstStyle/>
@@ -20573,7 +20878,7 @@
           <a:noFill/>
         </p:spPr>
         <p:txBody>
-          <a:bodyPr wrap="square" lIns="0" rIns="0" tIns="0" bIns="0">
+          <a:bodyPr wrap="square" lIns="0" tIns="0" rIns="0" bIns="0">
             <a:spAutoFit/>
           </a:bodyPr>
           <a:lstStyle/>
@@ -20636,10 +20941,11 @@
           </a:fontRef>
         </p:style>
         <p:txBody>
-          <a:bodyPr rtlCol="0" anchor="ctr" tIns="54864" bIns="54864"/>
+          <a:bodyPr tIns="54864" bIns="54864" rtlCol="0" anchor="ctr"/>
           <a:lstStyle/>
           <a:p>
             <a:pPr algn="ctr"/>
+            <a:endParaRPr/>
           </a:p>
         </p:txBody>
       </p:sp>
@@ -20660,7 +20966,7 @@
           <a:noFill/>
         </p:spPr>
         <p:txBody>
-          <a:bodyPr wrap="square" lIns="0" rIns="0" tIns="0" bIns="0">
+          <a:bodyPr wrap="square" lIns="0" tIns="0" rIns="0" bIns="0">
             <a:spAutoFit/>
           </a:bodyPr>
           <a:lstStyle/>
@@ -20699,7 +21005,7 @@
           <a:noFill/>
         </p:spPr>
         <p:txBody>
-          <a:bodyPr wrap="square" lIns="0" rIns="0" tIns="0" bIns="0">
+          <a:bodyPr wrap="square" lIns="0" tIns="0" rIns="0" bIns="0">
             <a:spAutoFit/>
           </a:bodyPr>
           <a:lstStyle/>
@@ -20730,7 +21036,7 @@
 </file>
 
 <file path=ppt/slides/slide4.xml><?xml version="1.0" encoding="utf-8"?>
-<p:sld xmlns:a="http://schemas.openxmlformats.org/drawingml/2006/main" xmlns:p="http://schemas.openxmlformats.org/presentationml/2006/main" xmlns:r="http://schemas.openxmlformats.org/officeDocument/2006/relationships">
+<p:sld xmlns:a="http://schemas.openxmlformats.org/drawingml/2006/main" xmlns:r="http://schemas.openxmlformats.org/officeDocument/2006/relationships" xmlns:p="http://schemas.openxmlformats.org/presentationml/2006/main">
   <p:cSld>
     <p:bg>
       <p:bgPr>
@@ -20746,7 +21052,14 @@
         <p:cNvGrpSpPr/>
         <p:nvPr/>
       </p:nvGrpSpPr>
-      <p:grpSpPr/>
+      <p:grpSpPr>
+        <a:xfrm>
+          <a:off x="0" y="0"/>
+          <a:ext cx="0" cy="0"/>
+          <a:chOff x="0" y="0"/>
+          <a:chExt cx="0" cy="0"/>
+        </a:xfrm>
+      </p:grpSpPr>
       <p:sp>
         <p:nvSpPr>
           <p:cNvPr id="2" name="TextBox 1"/>
@@ -20764,7 +21077,7 @@
           <a:noFill/>
         </p:spPr>
         <p:txBody>
-          <a:bodyPr wrap="square" lIns="0" rIns="0" tIns="0" bIns="0">
+          <a:bodyPr wrap="square" lIns="0" tIns="0" rIns="0" bIns="0">
             <a:spAutoFit/>
           </a:bodyPr>
           <a:lstStyle/>
@@ -20803,7 +21116,7 @@
           <a:noFill/>
         </p:spPr>
         <p:txBody>
-          <a:bodyPr wrap="square" lIns="0" rIns="0" tIns="0" bIns="0">
+          <a:bodyPr wrap="square" lIns="0" tIns="0" rIns="0" bIns="0">
             <a:spAutoFit/>
           </a:bodyPr>
           <a:lstStyle/>
@@ -20864,7 +21177,7 @@
           </a:fontRef>
         </p:style>
         <p:txBody>
-          <a:bodyPr rtlCol="0" anchor="ctr" tIns="54864" bIns="54864" wrap="none"/>
+          <a:bodyPr wrap="none" tIns="54864" bIns="54864" rtlCol="0" anchor="ctr"/>
           <a:lstStyle/>
           <a:p>
             <a:pPr algn="ctr"/>
@@ -20897,7 +21210,7 @@
           <a:noFill/>
         </p:spPr>
         <p:txBody>
-          <a:bodyPr wrap="none" lIns="0" rIns="0" tIns="0" bIns="0" anchor="ctr">
+          <a:bodyPr wrap="none" lIns="0" tIns="0" rIns="0" bIns="0" anchor="ctr">
             <a:spAutoFit/>
           </a:bodyPr>
           <a:lstStyle/>
@@ -20958,7 +21271,7 @@
           </a:fontRef>
         </p:style>
         <p:txBody>
-          <a:bodyPr rtlCol="0" anchor="ctr" tIns="54864" bIns="54864" wrap="none"/>
+          <a:bodyPr wrap="none" tIns="54864" bIns="54864" rtlCol="0" anchor="ctr"/>
           <a:lstStyle/>
           <a:p>
             <a:pPr algn="ctr"/>
@@ -20991,7 +21304,7 @@
           <a:noFill/>
         </p:spPr>
         <p:txBody>
-          <a:bodyPr wrap="none" lIns="0" rIns="0" tIns="0" bIns="0" anchor="ctr">
+          <a:bodyPr wrap="none" lIns="0" tIns="0" rIns="0" bIns="0" anchor="ctr">
             <a:spAutoFit/>
           </a:bodyPr>
           <a:lstStyle/>
@@ -21052,7 +21365,7 @@
           </a:fontRef>
         </p:style>
         <p:txBody>
-          <a:bodyPr rtlCol="0" anchor="ctr" tIns="54864" bIns="54864" wrap="none"/>
+          <a:bodyPr wrap="none" tIns="54864" bIns="54864" rtlCol="0" anchor="ctr"/>
           <a:lstStyle/>
           <a:p>
             <a:pPr algn="ctr"/>
@@ -21085,7 +21398,7 @@
           <a:noFill/>
         </p:spPr>
         <p:txBody>
-          <a:bodyPr wrap="none" lIns="0" rIns="0" tIns="0" bIns="0" anchor="ctr">
+          <a:bodyPr wrap="none" lIns="0" tIns="0" rIns="0" bIns="0" anchor="ctr">
             <a:spAutoFit/>
           </a:bodyPr>
           <a:lstStyle/>
@@ -21146,7 +21459,7 @@
           </a:fontRef>
         </p:style>
         <p:txBody>
-          <a:bodyPr rtlCol="0" anchor="ctr" tIns="54864" bIns="54864" wrap="none"/>
+          <a:bodyPr wrap="none" tIns="54864" bIns="54864" rtlCol="0" anchor="ctr"/>
           <a:lstStyle/>
           <a:p>
             <a:pPr algn="ctr"/>
@@ -21179,7 +21492,7 @@
           <a:noFill/>
         </p:spPr>
         <p:txBody>
-          <a:bodyPr wrap="none" lIns="0" rIns="0" tIns="0" bIns="0" anchor="ctr">
+          <a:bodyPr wrap="none" lIns="0" tIns="0" rIns="0" bIns="0" anchor="ctr">
             <a:spAutoFit/>
           </a:bodyPr>
           <a:lstStyle/>
@@ -21240,7 +21553,7 @@
           </a:fontRef>
         </p:style>
         <p:txBody>
-          <a:bodyPr rtlCol="0" anchor="ctr" tIns="54864" bIns="54864" wrap="none"/>
+          <a:bodyPr wrap="none" tIns="54864" bIns="54864" rtlCol="0" anchor="ctr"/>
           <a:lstStyle/>
           <a:p>
             <a:pPr algn="ctr"/>
@@ -21273,7 +21586,7 @@
           <a:noFill/>
         </p:spPr>
         <p:txBody>
-          <a:bodyPr wrap="none" lIns="0" rIns="0" tIns="0" bIns="0" anchor="ctr">
+          <a:bodyPr wrap="none" lIns="0" tIns="0" rIns="0" bIns="0" anchor="ctr">
             <a:spAutoFit/>
           </a:bodyPr>
           <a:lstStyle/>
@@ -21334,7 +21647,7 @@
           </a:fontRef>
         </p:style>
         <p:txBody>
-          <a:bodyPr rtlCol="0" anchor="ctr" tIns="54864" bIns="54864" wrap="none"/>
+          <a:bodyPr wrap="none" tIns="54864" bIns="54864" rtlCol="0" anchor="ctr"/>
           <a:lstStyle/>
           <a:p>
             <a:pPr algn="ctr"/>
@@ -21367,7 +21680,7 @@
           <a:noFill/>
         </p:spPr>
         <p:txBody>
-          <a:bodyPr wrap="square" lIns="0" rIns="0" tIns="0" bIns="0">
+          <a:bodyPr wrap="square" lIns="0" tIns="0" rIns="0" bIns="0">
             <a:spAutoFit/>
           </a:bodyPr>
           <a:lstStyle/>
@@ -21430,10 +21743,11 @@
           </a:fontRef>
         </p:style>
         <p:txBody>
-          <a:bodyPr rtlCol="0" anchor="ctr" tIns="54864" bIns="54864"/>
+          <a:bodyPr tIns="54864" bIns="54864" rtlCol="0" anchor="ctr"/>
           <a:lstStyle/>
           <a:p>
             <a:pPr algn="ctr"/>
+            <a:endParaRPr/>
           </a:p>
         </p:txBody>
       </p:sp>
@@ -21454,7 +21768,7 @@
           <a:noFill/>
         </p:spPr>
         <p:txBody>
-          <a:bodyPr wrap="square" lIns="0" rIns="0" tIns="0" bIns="0">
+          <a:bodyPr wrap="square" lIns="0" tIns="0" rIns="0" bIns="0">
             <a:spAutoFit/>
           </a:bodyPr>
           <a:lstStyle/>
@@ -21493,7 +21807,7 @@
           <a:noFill/>
         </p:spPr>
         <p:txBody>
-          <a:bodyPr wrap="square" lIns="0" rIns="0" tIns="0" bIns="0">
+          <a:bodyPr wrap="square" lIns="0" tIns="0" rIns="0" bIns="0">
             <a:spAutoFit/>
           </a:bodyPr>
           <a:lstStyle/>
@@ -21532,7 +21846,7 @@
           <a:noFill/>
         </p:spPr>
         <p:txBody>
-          <a:bodyPr wrap="square" lIns="0" rIns="0" tIns="0" bIns="0">
+          <a:bodyPr wrap="square" lIns="0" tIns="0" rIns="0" bIns="0">
             <a:spAutoFit/>
           </a:bodyPr>
           <a:lstStyle/>
@@ -21571,7 +21885,7 @@
           <a:noFill/>
         </p:spPr>
         <p:txBody>
-          <a:bodyPr wrap="square" lIns="0" rIns="0" tIns="0" bIns="0">
+          <a:bodyPr wrap="square" lIns="0" tIns="0" rIns="0" bIns="0">
             <a:spAutoFit/>
           </a:bodyPr>
           <a:lstStyle/>
@@ -21610,7 +21924,7 @@
           <a:noFill/>
         </p:spPr>
         <p:txBody>
-          <a:bodyPr wrap="square" lIns="0" rIns="0" tIns="0" bIns="0">
+          <a:bodyPr wrap="square" lIns="0" tIns="0" rIns="0" bIns="0">
             <a:spAutoFit/>
           </a:bodyPr>
           <a:lstStyle/>
@@ -21649,7 +21963,7 @@
           <a:noFill/>
         </p:spPr>
         <p:txBody>
-          <a:bodyPr wrap="square" lIns="0" rIns="0" tIns="0" bIns="0">
+          <a:bodyPr wrap="square" lIns="0" tIns="0" rIns="0" bIns="0">
             <a:spAutoFit/>
           </a:bodyPr>
           <a:lstStyle/>
@@ -21688,7 +22002,7 @@
           <a:noFill/>
         </p:spPr>
         <p:txBody>
-          <a:bodyPr wrap="square" lIns="0" rIns="0" tIns="0" bIns="0">
+          <a:bodyPr wrap="square" lIns="0" tIns="0" rIns="0" bIns="0">
             <a:spAutoFit/>
           </a:bodyPr>
           <a:lstStyle/>
@@ -21727,7 +22041,7 @@
           <a:noFill/>
         </p:spPr>
         <p:txBody>
-          <a:bodyPr wrap="square" lIns="0" rIns="0" tIns="0" bIns="0">
+          <a:bodyPr wrap="square" lIns="0" tIns="0" rIns="0" bIns="0">
             <a:spAutoFit/>
           </a:bodyPr>
           <a:lstStyle/>
@@ -21790,10 +22104,11 @@
           </a:fontRef>
         </p:style>
         <p:txBody>
-          <a:bodyPr rtlCol="0" anchor="ctr" tIns="54864" bIns="54864"/>
+          <a:bodyPr tIns="54864" bIns="54864" rtlCol="0" anchor="ctr"/>
           <a:lstStyle/>
           <a:p>
             <a:pPr algn="ctr"/>
+            <a:endParaRPr/>
           </a:p>
         </p:txBody>
       </p:sp>
@@ -21814,7 +22129,7 @@
           <a:noFill/>
         </p:spPr>
         <p:txBody>
-          <a:bodyPr wrap="square" lIns="0" rIns="0" tIns="0" bIns="0">
+          <a:bodyPr wrap="square" lIns="0" tIns="0" rIns="0" bIns="0">
             <a:spAutoFit/>
           </a:bodyPr>
           <a:lstStyle/>
@@ -21853,7 +22168,7 @@
           <a:noFill/>
         </p:spPr>
         <p:txBody>
-          <a:bodyPr wrap="square" lIns="0" rIns="0" tIns="0" bIns="0">
+          <a:bodyPr wrap="square" lIns="0" tIns="0" rIns="0" bIns="0">
             <a:spAutoFit/>
           </a:bodyPr>
           <a:lstStyle/>
@@ -21892,7 +22207,7 @@
           <a:noFill/>
         </p:spPr>
         <p:txBody>
-          <a:bodyPr wrap="square" lIns="0" rIns="0" tIns="0" bIns="0">
+          <a:bodyPr wrap="square" lIns="0" tIns="0" rIns="0" bIns="0">
             <a:spAutoFit/>
           </a:bodyPr>
           <a:lstStyle/>
@@ -21931,7 +22246,7 @@
           <a:noFill/>
         </p:spPr>
         <p:txBody>
-          <a:bodyPr wrap="square" lIns="0" rIns="0" tIns="0" bIns="0">
+          <a:bodyPr wrap="square" lIns="0" tIns="0" rIns="0" bIns="0">
             <a:spAutoFit/>
           </a:bodyPr>
           <a:lstStyle/>
@@ -21970,7 +22285,7 @@
           <a:noFill/>
         </p:spPr>
         <p:txBody>
-          <a:bodyPr wrap="square" lIns="0" rIns="0" tIns="0" bIns="0">
+          <a:bodyPr wrap="square" lIns="0" tIns="0" rIns="0" bIns="0">
             <a:spAutoFit/>
           </a:bodyPr>
           <a:lstStyle/>
@@ -22009,7 +22324,7 @@
           <a:noFill/>
         </p:spPr>
         <p:txBody>
-          <a:bodyPr wrap="square" lIns="0" rIns="0" tIns="0" bIns="0">
+          <a:bodyPr wrap="square" lIns="0" tIns="0" rIns="0" bIns="0">
             <a:spAutoFit/>
           </a:bodyPr>
           <a:lstStyle/>
@@ -22072,10 +22387,11 @@
           </a:fontRef>
         </p:style>
         <p:txBody>
-          <a:bodyPr rtlCol="0" anchor="ctr" tIns="54864" bIns="54864"/>
+          <a:bodyPr tIns="54864" bIns="54864" rtlCol="0" anchor="ctr"/>
           <a:lstStyle/>
           <a:p>
             <a:pPr algn="ctr"/>
+            <a:endParaRPr/>
           </a:p>
         </p:txBody>
       </p:sp>
@@ -22096,7 +22412,7 @@
           <a:noFill/>
         </p:spPr>
         <p:txBody>
-          <a:bodyPr wrap="square" lIns="0" rIns="0" tIns="0" bIns="0">
+          <a:bodyPr wrap="square" lIns="0" tIns="0" rIns="0" bIns="0">
             <a:spAutoFit/>
           </a:bodyPr>
           <a:lstStyle/>
@@ -22135,7 +22451,7 @@
           <a:noFill/>
         </p:spPr>
         <p:txBody>
-          <a:bodyPr wrap="square" lIns="0" rIns="0" tIns="0" bIns="0">
+          <a:bodyPr wrap="square" lIns="0" tIns="0" rIns="0" bIns="0">
             <a:spAutoFit/>
           </a:bodyPr>
           <a:lstStyle/>
@@ -22174,7 +22490,7 @@
           <a:noFill/>
         </p:spPr>
         <p:txBody>
-          <a:bodyPr wrap="square" lIns="0" rIns="0" tIns="0" bIns="0">
+          <a:bodyPr wrap="square" lIns="0" tIns="0" rIns="0" bIns="0">
             <a:spAutoFit/>
           </a:bodyPr>
           <a:lstStyle/>
@@ -22213,7 +22529,7 @@
           <a:noFill/>
         </p:spPr>
         <p:txBody>
-          <a:bodyPr wrap="square" lIns="0" rIns="0" tIns="0" bIns="0">
+          <a:bodyPr wrap="square" lIns="0" tIns="0" rIns="0" bIns="0">
             <a:spAutoFit/>
           </a:bodyPr>
           <a:lstStyle/>
@@ -22252,7 +22568,7 @@
           <a:noFill/>
         </p:spPr>
         <p:txBody>
-          <a:bodyPr wrap="square" lIns="0" rIns="0" tIns="0" bIns="0">
+          <a:bodyPr wrap="square" lIns="0" tIns="0" rIns="0" bIns="0">
             <a:spAutoFit/>
           </a:bodyPr>
           <a:lstStyle/>
@@ -22291,7 +22607,7 @@
           <a:noFill/>
         </p:spPr>
         <p:txBody>
-          <a:bodyPr wrap="square" lIns="0" rIns="0" tIns="0" bIns="0">
+          <a:bodyPr wrap="square" lIns="0" tIns="0" rIns="0" bIns="0">
             <a:spAutoFit/>
           </a:bodyPr>
           <a:lstStyle/>
@@ -22330,7 +22646,7 @@
           <a:noFill/>
         </p:spPr>
         <p:txBody>
-          <a:bodyPr wrap="square" lIns="0" rIns="0" tIns="0" bIns="0">
+          <a:bodyPr wrap="square" lIns="0" tIns="0" rIns="0" bIns="0">
             <a:spAutoFit/>
           </a:bodyPr>
           <a:lstStyle/>
@@ -22369,7 +22685,7 @@
           <a:noFill/>
         </p:spPr>
         <p:txBody>
-          <a:bodyPr wrap="square" lIns="0" rIns="0" tIns="0" bIns="0">
+          <a:bodyPr wrap="square" lIns="0" tIns="0" rIns="0" bIns="0">
             <a:spAutoFit/>
           </a:bodyPr>
           <a:lstStyle/>
@@ -22432,10 +22748,11 @@
           </a:fontRef>
         </p:style>
         <p:txBody>
-          <a:bodyPr rtlCol="0" anchor="ctr" tIns="54864" bIns="54864"/>
+          <a:bodyPr tIns="54864" bIns="54864" rtlCol="0" anchor="ctr"/>
           <a:lstStyle/>
           <a:p>
             <a:pPr algn="ctr"/>
+            <a:endParaRPr/>
           </a:p>
         </p:txBody>
       </p:sp>
@@ -22456,7 +22773,7 @@
           <a:noFill/>
         </p:spPr>
         <p:txBody>
-          <a:bodyPr wrap="square" lIns="0" rIns="0" tIns="0" bIns="0">
+          <a:bodyPr wrap="square" lIns="0" tIns="0" rIns="0" bIns="0">
             <a:spAutoFit/>
           </a:bodyPr>
           <a:lstStyle/>
@@ -22495,7 +22812,7 @@
           <a:noFill/>
         </p:spPr>
         <p:txBody>
-          <a:bodyPr wrap="square" lIns="0" rIns="0" tIns="0" bIns="0">
+          <a:bodyPr wrap="square" lIns="0" tIns="0" rIns="0" bIns="0">
             <a:spAutoFit/>
           </a:bodyPr>
           <a:lstStyle/>
@@ -22534,7 +22851,7 @@
           <a:noFill/>
         </p:spPr>
         <p:txBody>
-          <a:bodyPr wrap="square" lIns="0" rIns="0" tIns="0" bIns="0">
+          <a:bodyPr wrap="square" lIns="0" tIns="0" rIns="0" bIns="0">
             <a:spAutoFit/>
           </a:bodyPr>
           <a:lstStyle/>
@@ -22573,7 +22890,7 @@
           <a:noFill/>
         </p:spPr>
         <p:txBody>
-          <a:bodyPr wrap="square" lIns="0" rIns="0" tIns="0" bIns="0">
+          <a:bodyPr wrap="square" lIns="0" tIns="0" rIns="0" bIns="0">
             <a:spAutoFit/>
           </a:bodyPr>
           <a:lstStyle/>
@@ -22612,7 +22929,7 @@
           <a:noFill/>
         </p:spPr>
         <p:txBody>
-          <a:bodyPr wrap="square" lIns="0" rIns="0" tIns="0" bIns="0">
+          <a:bodyPr wrap="square" lIns="0" tIns="0" rIns="0" bIns="0">
             <a:spAutoFit/>
           </a:bodyPr>
           <a:lstStyle/>
@@ -22651,7 +22968,7 @@
           <a:noFill/>
         </p:spPr>
         <p:txBody>
-          <a:bodyPr wrap="square" lIns="0" rIns="0" tIns="0" bIns="0">
+          <a:bodyPr wrap="square" lIns="0" tIns="0" rIns="0" bIns="0">
             <a:spAutoFit/>
           </a:bodyPr>
           <a:lstStyle/>
@@ -22690,7 +23007,7 @@
           <a:noFill/>
         </p:spPr>
         <p:txBody>
-          <a:bodyPr wrap="square" lIns="0" rIns="0" tIns="0" bIns="0">
+          <a:bodyPr wrap="square" lIns="0" tIns="0" rIns="0" bIns="0">
             <a:spAutoFit/>
           </a:bodyPr>
           <a:lstStyle/>
@@ -22729,7 +23046,7 @@
           <a:noFill/>
         </p:spPr>
         <p:txBody>
-          <a:bodyPr wrap="square" lIns="0" rIns="0" tIns="0" bIns="0">
+          <a:bodyPr wrap="square" lIns="0" tIns="0" rIns="0" bIns="0">
             <a:spAutoFit/>
           </a:bodyPr>
           <a:lstStyle/>
@@ -22792,10 +23109,11 @@
           </a:fontRef>
         </p:style>
         <p:txBody>
-          <a:bodyPr rtlCol="0" anchor="ctr" tIns="54864" bIns="54864"/>
+          <a:bodyPr tIns="54864" bIns="54864" rtlCol="0" anchor="ctr"/>
           <a:lstStyle/>
           <a:p>
             <a:pPr algn="ctr"/>
+            <a:endParaRPr/>
           </a:p>
         </p:txBody>
       </p:sp>
@@ -22816,7 +23134,7 @@
           <a:noFill/>
         </p:spPr>
         <p:txBody>
-          <a:bodyPr wrap="square" lIns="0" rIns="0" tIns="0" bIns="0">
+          <a:bodyPr wrap="square" lIns="0" tIns="0" rIns="0" bIns="0">
             <a:spAutoFit/>
           </a:bodyPr>
           <a:lstStyle/>
@@ -22855,7 +23173,7 @@
           <a:noFill/>
         </p:spPr>
         <p:txBody>
-          <a:bodyPr wrap="square" lIns="0" rIns="0" tIns="0" bIns="0">
+          <a:bodyPr wrap="square" lIns="0" tIns="0" rIns="0" bIns="0">
             <a:spAutoFit/>
           </a:bodyPr>
           <a:lstStyle/>
@@ -22894,7 +23212,7 @@
           <a:noFill/>
         </p:spPr>
         <p:txBody>
-          <a:bodyPr wrap="square" lIns="0" rIns="0" tIns="0" bIns="0">
+          <a:bodyPr wrap="square" lIns="0" tIns="0" rIns="0" bIns="0">
             <a:spAutoFit/>
           </a:bodyPr>
           <a:lstStyle/>
@@ -22933,7 +23251,7 @@
           <a:noFill/>
         </p:spPr>
         <p:txBody>
-          <a:bodyPr wrap="square" lIns="0" rIns="0" tIns="0" bIns="0">
+          <a:bodyPr wrap="square" lIns="0" tIns="0" rIns="0" bIns="0">
             <a:spAutoFit/>
           </a:bodyPr>
           <a:lstStyle/>
@@ -22972,7 +23290,7 @@
           <a:noFill/>
         </p:spPr>
         <p:txBody>
-          <a:bodyPr wrap="square" lIns="0" rIns="0" tIns="0" bIns="0">
+          <a:bodyPr wrap="square" lIns="0" tIns="0" rIns="0" bIns="0">
             <a:spAutoFit/>
           </a:bodyPr>
           <a:lstStyle/>
@@ -23011,7 +23329,7 @@
           <a:noFill/>
         </p:spPr>
         <p:txBody>
-          <a:bodyPr wrap="square" lIns="0" rIns="0" tIns="0" bIns="0">
+          <a:bodyPr wrap="square" lIns="0" tIns="0" rIns="0" bIns="0">
             <a:spAutoFit/>
           </a:bodyPr>
           <a:lstStyle/>
@@ -23050,7 +23368,7 @@
           <a:noFill/>
         </p:spPr>
         <p:txBody>
-          <a:bodyPr wrap="square" lIns="0" rIns="0" tIns="0" bIns="0">
+          <a:bodyPr wrap="square" lIns="0" tIns="0" rIns="0" bIns="0">
             <a:spAutoFit/>
           </a:bodyPr>
           <a:lstStyle/>
@@ -23113,10 +23431,11 @@
           </a:fontRef>
         </p:style>
         <p:txBody>
-          <a:bodyPr rtlCol="0" anchor="ctr" tIns="54864" bIns="54864"/>
+          <a:bodyPr tIns="54864" bIns="54864" rtlCol="0" anchor="ctr"/>
           <a:lstStyle/>
           <a:p>
             <a:pPr algn="ctr"/>
+            <a:endParaRPr/>
           </a:p>
         </p:txBody>
       </p:sp>
@@ -23137,7 +23456,7 @@
           <a:noFill/>
         </p:spPr>
         <p:txBody>
-          <a:bodyPr wrap="square" lIns="0" rIns="0" tIns="0" bIns="0">
+          <a:bodyPr wrap="square" lIns="0" tIns="0" rIns="0" bIns="0">
             <a:spAutoFit/>
           </a:bodyPr>
           <a:lstStyle/>
@@ -23176,7 +23495,7 @@
           <a:noFill/>
         </p:spPr>
         <p:txBody>
-          <a:bodyPr wrap="square" lIns="0" rIns="0" tIns="0" bIns="0">
+          <a:bodyPr wrap="square" lIns="0" tIns="0" rIns="0" bIns="0">
             <a:spAutoFit/>
           </a:bodyPr>
           <a:lstStyle/>
@@ -23237,7 +23556,7 @@
           </a:fontRef>
         </p:style>
         <p:txBody>
-          <a:bodyPr rtlCol="0" anchor="ctr" tIns="54864" bIns="54864" wrap="none"/>
+          <a:bodyPr wrap="none" tIns="54864" bIns="54864" rtlCol="0" anchor="ctr"/>
           <a:lstStyle/>
           <a:p>
             <a:pPr algn="ctr"/>
@@ -23292,7 +23611,7 @@
           </a:fontRef>
         </p:style>
         <p:txBody>
-          <a:bodyPr rtlCol="0" anchor="ctr" tIns="54864" bIns="54864" wrap="none"/>
+          <a:bodyPr wrap="none" tIns="54864" bIns="54864" rtlCol="0" anchor="ctr"/>
           <a:lstStyle/>
           <a:p>
             <a:pPr algn="ctr"/>
@@ -23347,7 +23666,7 @@
           </a:fontRef>
         </p:style>
         <p:txBody>
-          <a:bodyPr rtlCol="0" anchor="ctr" tIns="54864" bIns="54864" wrap="none"/>
+          <a:bodyPr wrap="none" tIns="54864" bIns="54864" rtlCol="0" anchor="ctr"/>
           <a:lstStyle/>
           <a:p>
             <a:pPr algn="ctr"/>
@@ -23372,7 +23691,7 @@
 </file>
 
 <file path=ppt/slides/slide5.xml><?xml version="1.0" encoding="utf-8"?>
-<p:sld xmlns:a="http://schemas.openxmlformats.org/drawingml/2006/main" xmlns:p="http://schemas.openxmlformats.org/presentationml/2006/main" xmlns:r="http://schemas.openxmlformats.org/officeDocument/2006/relationships">
+<p:sld xmlns:a="http://schemas.openxmlformats.org/drawingml/2006/main" xmlns:r="http://schemas.openxmlformats.org/officeDocument/2006/relationships" xmlns:p="http://schemas.openxmlformats.org/presentationml/2006/main">
   <p:cSld>
     <p:bg>
       <p:bgPr>
@@ -23388,7 +23707,14 @@
         <p:cNvGrpSpPr/>
         <p:nvPr/>
       </p:nvGrpSpPr>
-      <p:grpSpPr/>
+      <p:grpSpPr>
+        <a:xfrm>
+          <a:off x="0" y="0"/>
+          <a:ext cx="0" cy="0"/>
+          <a:chOff x="0" y="0"/>
+          <a:chExt cx="0" cy="0"/>
+        </a:xfrm>
+      </p:grpSpPr>
       <p:sp>
         <p:nvSpPr>
           <p:cNvPr id="2" name="TextBox 1"/>
@@ -23406,7 +23732,7 @@
           <a:noFill/>
         </p:spPr>
         <p:txBody>
-          <a:bodyPr wrap="square" lIns="0" rIns="0" tIns="0" bIns="0">
+          <a:bodyPr wrap="square" lIns="0" tIns="0" rIns="0" bIns="0">
             <a:spAutoFit/>
           </a:bodyPr>
           <a:lstStyle/>
@@ -23445,7 +23771,7 @@
           <a:noFill/>
         </p:spPr>
         <p:txBody>
-          <a:bodyPr wrap="square" lIns="0" rIns="0" tIns="0" bIns="0">
+          <a:bodyPr wrap="square" lIns="0" tIns="0" rIns="0" bIns="0">
             <a:spAutoFit/>
           </a:bodyPr>
           <a:lstStyle/>
@@ -23506,7 +23832,7 @@
           </a:fontRef>
         </p:style>
         <p:txBody>
-          <a:bodyPr rtlCol="0" anchor="ctr" tIns="54864" bIns="54864" wrap="none"/>
+          <a:bodyPr wrap="none" tIns="54864" bIns="54864" rtlCol="0" anchor="ctr"/>
           <a:lstStyle/>
           <a:p>
             <a:pPr algn="ctr"/>
@@ -23539,7 +23865,7 @@
           <a:noFill/>
         </p:spPr>
         <p:txBody>
-          <a:bodyPr wrap="none" lIns="0" rIns="0" tIns="0" bIns="0" anchor="ctr">
+          <a:bodyPr wrap="none" lIns="0" tIns="0" rIns="0" bIns="0" anchor="ctr">
             <a:spAutoFit/>
           </a:bodyPr>
           <a:lstStyle/>
@@ -23600,7 +23926,7 @@
           </a:fontRef>
         </p:style>
         <p:txBody>
-          <a:bodyPr rtlCol="0" anchor="ctr" tIns="54864" bIns="54864" wrap="none"/>
+          <a:bodyPr wrap="none" tIns="54864" bIns="54864" rtlCol="0" anchor="ctr"/>
           <a:lstStyle/>
           <a:p>
             <a:pPr algn="ctr"/>
@@ -23633,7 +23959,7 @@
           <a:noFill/>
         </p:spPr>
         <p:txBody>
-          <a:bodyPr wrap="none" lIns="0" rIns="0" tIns="0" bIns="0" anchor="ctr">
+          <a:bodyPr wrap="none" lIns="0" tIns="0" rIns="0" bIns="0" anchor="ctr">
             <a:spAutoFit/>
           </a:bodyPr>
           <a:lstStyle/>
@@ -23694,7 +24020,7 @@
           </a:fontRef>
         </p:style>
         <p:txBody>
-          <a:bodyPr rtlCol="0" anchor="ctr" tIns="54864" bIns="54864" wrap="none"/>
+          <a:bodyPr wrap="none" tIns="54864" bIns="54864" rtlCol="0" anchor="ctr"/>
           <a:lstStyle/>
           <a:p>
             <a:pPr algn="ctr"/>
@@ -23727,7 +24053,7 @@
           <a:noFill/>
         </p:spPr>
         <p:txBody>
-          <a:bodyPr wrap="none" lIns="0" rIns="0" tIns="0" bIns="0" anchor="ctr">
+          <a:bodyPr wrap="none" lIns="0" tIns="0" rIns="0" bIns="0" anchor="ctr">
             <a:spAutoFit/>
           </a:bodyPr>
           <a:lstStyle/>
@@ -23788,7 +24114,7 @@
           </a:fontRef>
         </p:style>
         <p:txBody>
-          <a:bodyPr rtlCol="0" anchor="ctr" tIns="54864" bIns="54864" wrap="none"/>
+          <a:bodyPr wrap="none" tIns="54864" bIns="54864" rtlCol="0" anchor="ctr"/>
           <a:lstStyle/>
           <a:p>
             <a:pPr algn="ctr"/>
@@ -23821,7 +24147,7 @@
           <a:noFill/>
         </p:spPr>
         <p:txBody>
-          <a:bodyPr wrap="none" lIns="0" rIns="0" tIns="0" bIns="0" anchor="ctr">
+          <a:bodyPr wrap="none" lIns="0" tIns="0" rIns="0" bIns="0" anchor="ctr">
             <a:spAutoFit/>
           </a:bodyPr>
           <a:lstStyle/>
@@ -23882,7 +24208,7 @@
           </a:fontRef>
         </p:style>
         <p:txBody>
-          <a:bodyPr rtlCol="0" anchor="ctr" tIns="54864" bIns="54864" wrap="none"/>
+          <a:bodyPr wrap="none" tIns="54864" bIns="54864" rtlCol="0" anchor="ctr"/>
           <a:lstStyle/>
           <a:p>
             <a:pPr algn="ctr"/>
@@ -23915,7 +24241,7 @@
           <a:noFill/>
         </p:spPr>
         <p:txBody>
-          <a:bodyPr wrap="none" lIns="0" rIns="0" tIns="0" bIns="0" anchor="ctr">
+          <a:bodyPr wrap="none" lIns="0" tIns="0" rIns="0" bIns="0" anchor="ctr">
             <a:spAutoFit/>
           </a:bodyPr>
           <a:lstStyle/>
@@ -23976,7 +24302,7 @@
           </a:fontRef>
         </p:style>
         <p:txBody>
-          <a:bodyPr rtlCol="0" anchor="ctr" tIns="54864" bIns="54864" wrap="none"/>
+          <a:bodyPr wrap="none" tIns="54864" bIns="54864" rtlCol="0" anchor="ctr"/>
           <a:lstStyle/>
           <a:p>
             <a:pPr algn="ctr"/>
@@ -24009,7 +24335,7 @@
           <a:noFill/>
         </p:spPr>
         <p:txBody>
-          <a:bodyPr wrap="square" lIns="0" rIns="0" tIns="0" bIns="0">
+          <a:bodyPr wrap="square" lIns="0" tIns="0" rIns="0" bIns="0">
             <a:spAutoFit/>
           </a:bodyPr>
           <a:lstStyle/>
@@ -24073,6 +24399,7 @@
           <a:lstStyle/>
           <a:p>
             <a:pPr algn="ctr"/>
+            <a:endParaRPr/>
           </a:p>
         </p:txBody>
       </p:sp>
@@ -24117,6 +24444,7 @@
           <a:lstStyle/>
           <a:p>
             <a:pPr algn="ctr"/>
+            <a:endParaRPr/>
           </a:p>
         </p:txBody>
       </p:sp>
@@ -24137,7 +24465,7 @@
           <a:noFill/>
         </p:spPr>
         <p:txBody>
-          <a:bodyPr wrap="square" lIns="0" rIns="0" tIns="0" bIns="0">
+          <a:bodyPr wrap="square" lIns="0" tIns="0" rIns="0" bIns="0">
             <a:spAutoFit/>
           </a:bodyPr>
           <a:lstStyle/>
@@ -24176,7 +24504,7 @@
           <a:noFill/>
         </p:spPr>
         <p:txBody>
-          <a:bodyPr wrap="square" lIns="0" rIns="0" tIns="0" bIns="0">
+          <a:bodyPr wrap="square" lIns="0" tIns="0" rIns="0" bIns="0">
             <a:spAutoFit/>
           </a:bodyPr>
           <a:lstStyle/>
@@ -24239,6 +24567,7 @@
           <a:lstStyle/>
           <a:p>
             <a:pPr algn="ctr"/>
+            <a:endParaRPr/>
           </a:p>
         </p:txBody>
       </p:sp>
@@ -24259,7 +24588,7 @@
           <a:noFill/>
         </p:spPr>
         <p:txBody>
-          <a:bodyPr wrap="square" lIns="0" rIns="0" tIns="0" bIns="0">
+          <a:bodyPr wrap="square" lIns="0" tIns="0" rIns="0" bIns="0">
             <a:spAutoFit/>
           </a:bodyPr>
           <a:lstStyle/>
@@ -24335,7 +24664,7 @@
           <a:noFill/>
         </p:spPr>
         <p:txBody>
-          <a:bodyPr wrap="square" lIns="0" rIns="0" tIns="0" bIns="0">
+          <a:bodyPr wrap="square" lIns="0" tIns="0" rIns="0" bIns="0">
             <a:spAutoFit/>
           </a:bodyPr>
           <a:lstStyle/>
@@ -24435,10 +24764,11 @@
           </a:fontRef>
         </p:style>
         <p:txBody>
-          <a:bodyPr rtlCol="0" anchor="ctr" tIns="54864" bIns="54864"/>
+          <a:bodyPr tIns="54864" bIns="54864" rtlCol="0" anchor="ctr"/>
           <a:lstStyle/>
           <a:p>
             <a:pPr algn="ctr"/>
+            <a:endParaRPr/>
           </a:p>
         </p:txBody>
       </p:sp>
@@ -24459,7 +24789,7 @@
           <a:noFill/>
         </p:spPr>
         <p:txBody>
-          <a:bodyPr wrap="square" lIns="0" rIns="0" tIns="0" bIns="0">
+          <a:bodyPr wrap="square" lIns="0" tIns="0" rIns="0" bIns="0">
             <a:spAutoFit/>
           </a:bodyPr>
           <a:lstStyle/>
@@ -24498,7 +24828,7 @@
           <a:noFill/>
         </p:spPr>
         <p:txBody>
-          <a:bodyPr wrap="square" lIns="0" rIns="0" tIns="0" bIns="0">
+          <a:bodyPr wrap="square" lIns="0" tIns="0" rIns="0" bIns="0">
             <a:spAutoFit/>
           </a:bodyPr>
           <a:lstStyle/>
@@ -24537,7 +24867,7 @@
           <a:noFill/>
         </p:spPr>
         <p:txBody>
-          <a:bodyPr wrap="square" lIns="0" rIns="0" tIns="0" bIns="0">
+          <a:bodyPr wrap="square" lIns="0" tIns="0" rIns="0" bIns="0">
             <a:spAutoFit/>
           </a:bodyPr>
           <a:lstStyle/>
@@ -24600,10 +24930,11 @@
           </a:fontRef>
         </p:style>
         <p:txBody>
-          <a:bodyPr rtlCol="0" anchor="ctr" tIns="54864" bIns="54864"/>
+          <a:bodyPr tIns="54864" bIns="54864" rtlCol="0" anchor="ctr"/>
           <a:lstStyle/>
           <a:p>
             <a:pPr algn="ctr"/>
+            <a:endParaRPr/>
           </a:p>
         </p:txBody>
       </p:sp>
@@ -24624,7 +24955,7 @@
           <a:noFill/>
         </p:spPr>
         <p:txBody>
-          <a:bodyPr wrap="square" lIns="0" rIns="0" tIns="0" bIns="0">
+          <a:bodyPr wrap="square" lIns="0" tIns="0" rIns="0" bIns="0">
             <a:spAutoFit/>
           </a:bodyPr>
           <a:lstStyle/>
@@ -24663,7 +24994,7 @@
           <a:noFill/>
         </p:spPr>
         <p:txBody>
-          <a:bodyPr wrap="square" lIns="0" rIns="0" tIns="0" bIns="0">
+          <a:bodyPr wrap="square" lIns="0" tIns="0" rIns="0" bIns="0">
             <a:spAutoFit/>
           </a:bodyPr>
           <a:lstStyle/>
@@ -24726,10 +25057,11 @@
           </a:fontRef>
         </p:style>
         <p:txBody>
-          <a:bodyPr rtlCol="0" anchor="ctr" tIns="54864" bIns="54864"/>
+          <a:bodyPr tIns="54864" bIns="54864" rtlCol="0" anchor="ctr"/>
           <a:lstStyle/>
           <a:p>
             <a:pPr algn="ctr"/>
+            <a:endParaRPr/>
           </a:p>
         </p:txBody>
       </p:sp>
@@ -24750,7 +25082,7 @@
           <a:noFill/>
         </p:spPr>
         <p:txBody>
-          <a:bodyPr wrap="square" lIns="0" rIns="0" tIns="0" bIns="0">
+          <a:bodyPr wrap="square" lIns="0" tIns="0" rIns="0" bIns="0">
             <a:spAutoFit/>
           </a:bodyPr>
           <a:lstStyle/>
@@ -24789,7 +25121,7 @@
           <a:noFill/>
         </p:spPr>
         <p:txBody>
-          <a:bodyPr wrap="square" lIns="0" rIns="0" tIns="0" bIns="0">
+          <a:bodyPr wrap="square" lIns="0" tIns="0" rIns="0" bIns="0">
             <a:spAutoFit/>
           </a:bodyPr>
           <a:lstStyle/>
@@ -24820,7 +25152,7 @@
 </file>
 
 <file path=ppt/slides/slide6.xml><?xml version="1.0" encoding="utf-8"?>
-<p:sld xmlns:a="http://schemas.openxmlformats.org/drawingml/2006/main" xmlns:p="http://schemas.openxmlformats.org/presentationml/2006/main" xmlns:r="http://schemas.openxmlformats.org/officeDocument/2006/relationships">
+<p:sld xmlns:a="http://schemas.openxmlformats.org/drawingml/2006/main" xmlns:r="http://schemas.openxmlformats.org/officeDocument/2006/relationships" xmlns:p="http://schemas.openxmlformats.org/presentationml/2006/main">
   <p:cSld>
     <p:bg>
       <p:bgPr>
@@ -24836,7 +25168,14 @@
         <p:cNvGrpSpPr/>
         <p:nvPr/>
       </p:nvGrpSpPr>
-      <p:grpSpPr/>
+      <p:grpSpPr>
+        <a:xfrm>
+          <a:off x="0" y="0"/>
+          <a:ext cx="0" cy="0"/>
+          <a:chOff x="0" y="0"/>
+          <a:chExt cx="0" cy="0"/>
+        </a:xfrm>
+      </p:grpSpPr>
       <p:sp>
         <p:nvSpPr>
           <p:cNvPr id="2" name="TextBox 1"/>
@@ -24854,7 +25193,7 @@
           <a:noFill/>
         </p:spPr>
         <p:txBody>
-          <a:bodyPr wrap="square" lIns="0" rIns="0" tIns="0" bIns="0">
+          <a:bodyPr wrap="square" lIns="0" tIns="0" rIns="0" bIns="0">
             <a:spAutoFit/>
           </a:bodyPr>
           <a:lstStyle/>
@@ -24893,7 +25232,7 @@
           <a:noFill/>
         </p:spPr>
         <p:txBody>
-          <a:bodyPr wrap="square" lIns="0" rIns="0" tIns="0" bIns="0">
+          <a:bodyPr wrap="square" lIns="0" tIns="0" rIns="0" bIns="0">
             <a:spAutoFit/>
           </a:bodyPr>
           <a:lstStyle/>
@@ -24954,7 +25293,7 @@
           </a:fontRef>
         </p:style>
         <p:txBody>
-          <a:bodyPr rtlCol="0" anchor="ctr" tIns="54864" bIns="54864" wrap="none"/>
+          <a:bodyPr wrap="none" tIns="54864" bIns="54864" rtlCol="0" anchor="ctr"/>
           <a:lstStyle/>
           <a:p>
             <a:pPr algn="ctr"/>
@@ -24987,7 +25326,7 @@
           <a:noFill/>
         </p:spPr>
         <p:txBody>
-          <a:bodyPr wrap="none" lIns="0" rIns="0" tIns="0" bIns="0" anchor="ctr">
+          <a:bodyPr wrap="none" lIns="0" tIns="0" rIns="0" bIns="0" anchor="ctr">
             <a:spAutoFit/>
           </a:bodyPr>
           <a:lstStyle/>
@@ -25048,7 +25387,7 @@
           </a:fontRef>
         </p:style>
         <p:txBody>
-          <a:bodyPr rtlCol="0" anchor="ctr" tIns="54864" bIns="54864" wrap="none"/>
+          <a:bodyPr wrap="none" tIns="54864" bIns="54864" rtlCol="0" anchor="ctr"/>
           <a:lstStyle/>
           <a:p>
             <a:pPr algn="ctr"/>
@@ -25081,7 +25420,7 @@
           <a:noFill/>
         </p:spPr>
         <p:txBody>
-          <a:bodyPr wrap="none" lIns="0" rIns="0" tIns="0" bIns="0" anchor="ctr">
+          <a:bodyPr wrap="none" lIns="0" tIns="0" rIns="0" bIns="0" anchor="ctr">
             <a:spAutoFit/>
           </a:bodyPr>
           <a:lstStyle/>
@@ -25142,7 +25481,7 @@
           </a:fontRef>
         </p:style>
         <p:txBody>
-          <a:bodyPr rtlCol="0" anchor="ctr" tIns="54864" bIns="54864" wrap="none"/>
+          <a:bodyPr wrap="none" tIns="54864" bIns="54864" rtlCol="0" anchor="ctr"/>
           <a:lstStyle/>
           <a:p>
             <a:pPr algn="ctr"/>
@@ -25175,7 +25514,7 @@
           <a:noFill/>
         </p:spPr>
         <p:txBody>
-          <a:bodyPr wrap="none" lIns="0" rIns="0" tIns="0" bIns="0" anchor="ctr">
+          <a:bodyPr wrap="none" lIns="0" tIns="0" rIns="0" bIns="0" anchor="ctr">
             <a:spAutoFit/>
           </a:bodyPr>
           <a:lstStyle/>
@@ -25236,7 +25575,7 @@
           </a:fontRef>
         </p:style>
         <p:txBody>
-          <a:bodyPr rtlCol="0" anchor="ctr" tIns="54864" bIns="54864" wrap="none"/>
+          <a:bodyPr wrap="none" tIns="54864" bIns="54864" rtlCol="0" anchor="ctr"/>
           <a:lstStyle/>
           <a:p>
             <a:pPr algn="ctr"/>
@@ -25269,7 +25608,7 @@
           <a:noFill/>
         </p:spPr>
         <p:txBody>
-          <a:bodyPr wrap="none" lIns="0" rIns="0" tIns="0" bIns="0" anchor="ctr">
+          <a:bodyPr wrap="none" lIns="0" tIns="0" rIns="0" bIns="0" anchor="ctr">
             <a:spAutoFit/>
           </a:bodyPr>
           <a:lstStyle/>
@@ -25330,7 +25669,7 @@
           </a:fontRef>
         </p:style>
         <p:txBody>
-          <a:bodyPr rtlCol="0" anchor="ctr" tIns="54864" bIns="54864" wrap="none"/>
+          <a:bodyPr wrap="none" tIns="54864" bIns="54864" rtlCol="0" anchor="ctr"/>
           <a:lstStyle/>
           <a:p>
             <a:pPr algn="ctr"/>
@@ -25363,7 +25702,7 @@
           <a:noFill/>
         </p:spPr>
         <p:txBody>
-          <a:bodyPr wrap="none" lIns="0" rIns="0" tIns="0" bIns="0" anchor="ctr">
+          <a:bodyPr wrap="none" lIns="0" tIns="0" rIns="0" bIns="0" anchor="ctr">
             <a:spAutoFit/>
           </a:bodyPr>
           <a:lstStyle/>
@@ -25424,7 +25763,7 @@
           </a:fontRef>
         </p:style>
         <p:txBody>
-          <a:bodyPr rtlCol="0" anchor="ctr" tIns="54864" bIns="54864" wrap="none"/>
+          <a:bodyPr wrap="none" tIns="54864" bIns="54864" rtlCol="0" anchor="ctr"/>
           <a:lstStyle/>
           <a:p>
             <a:pPr algn="ctr"/>
@@ -25457,7 +25796,7 @@
           <a:noFill/>
         </p:spPr>
         <p:txBody>
-          <a:bodyPr wrap="square" lIns="0" rIns="0" tIns="0" bIns="0">
+          <a:bodyPr wrap="square" lIns="0" tIns="0" rIns="0" bIns="0">
             <a:spAutoFit/>
           </a:bodyPr>
           <a:lstStyle/>
@@ -25496,7 +25835,7 @@
           <a:noFill/>
         </p:spPr>
         <p:txBody>
-          <a:bodyPr wrap="square" lIns="0" rIns="0" tIns="0" bIns="0">
+          <a:bodyPr wrap="square" lIns="0" tIns="0" rIns="0" bIns="0">
             <a:spAutoFit/>
           </a:bodyPr>
           <a:lstStyle/>
@@ -26076,7 +26415,7 @@
           <a:noFill/>
         </p:spPr>
         <p:txBody>
-          <a:bodyPr wrap="square" lIns="0" rIns="0" tIns="0" bIns="0">
+          <a:bodyPr wrap="square" lIns="0" tIns="0" rIns="0" bIns="0">
             <a:spAutoFit/>
           </a:bodyPr>
           <a:lstStyle/>
@@ -26367,7 +26706,7 @@
           <a:noFill/>
         </p:spPr>
         <p:txBody>
-          <a:bodyPr wrap="square" lIns="0" rIns="0" tIns="0" bIns="0">
+          <a:bodyPr wrap="square" lIns="0" tIns="0" rIns="0" bIns="0">
             <a:spAutoFit/>
           </a:bodyPr>
           <a:lstStyle/>
@@ -26406,7 +26745,7 @@
           <a:noFill/>
         </p:spPr>
         <p:txBody>
-          <a:bodyPr wrap="square" lIns="0" rIns="0" tIns="0" bIns="0">
+          <a:bodyPr wrap="square" lIns="0" tIns="0" rIns="0" bIns="0">
             <a:spAutoFit/>
           </a:bodyPr>
           <a:lstStyle/>
@@ -26467,10 +26806,11 @@
           </a:fontRef>
         </p:style>
         <p:txBody>
-          <a:bodyPr rtlCol="0" anchor="ctr" tIns="54864" bIns="54864"/>
+          <a:bodyPr tIns="54864" bIns="54864" rtlCol="0" anchor="ctr"/>
           <a:lstStyle/>
           <a:p>
             <a:pPr algn="ctr"/>
+            <a:endParaRPr/>
           </a:p>
         </p:txBody>
       </p:sp>
@@ -26511,10 +26851,11 @@
           </a:fontRef>
         </p:style>
         <p:txBody>
-          <a:bodyPr rtlCol="0" anchor="ctr" tIns="54864" bIns="54864"/>
+          <a:bodyPr tIns="54864" bIns="54864" rtlCol="0" anchor="ctr"/>
           <a:lstStyle/>
           <a:p>
             <a:pPr algn="ctr"/>
+            <a:endParaRPr/>
           </a:p>
         </p:txBody>
       </p:sp>
@@ -26535,7 +26876,7 @@
           <a:noFill/>
         </p:spPr>
         <p:txBody>
-          <a:bodyPr wrap="square" lIns="0" rIns="0" tIns="0" bIns="0">
+          <a:bodyPr wrap="square" lIns="0" tIns="0" rIns="0" bIns="0">
             <a:spAutoFit/>
           </a:bodyPr>
           <a:lstStyle/>
@@ -26574,7 +26915,7 @@
           <a:noFill/>
         </p:spPr>
         <p:txBody>
-          <a:bodyPr wrap="square" lIns="0" rIns="0" tIns="0" bIns="0">
+          <a:bodyPr wrap="square" lIns="0" tIns="0" rIns="0" bIns="0">
             <a:spAutoFit/>
           </a:bodyPr>
           <a:lstStyle/>
@@ -26637,10 +26978,11 @@
           </a:fontRef>
         </p:style>
         <p:txBody>
-          <a:bodyPr rtlCol="0" anchor="ctr" tIns="54864" bIns="54864"/>
+          <a:bodyPr tIns="54864" bIns="54864" rtlCol="0" anchor="ctr"/>
           <a:lstStyle/>
           <a:p>
             <a:pPr algn="ctr"/>
+            <a:endParaRPr/>
           </a:p>
         </p:txBody>
       </p:sp>
@@ -26661,7 +27003,7 @@
           <a:noFill/>
         </p:spPr>
         <p:txBody>
-          <a:bodyPr wrap="square" lIns="0" rIns="0" tIns="0" bIns="0">
+          <a:bodyPr wrap="square" lIns="0" tIns="0" rIns="0" bIns="0">
             <a:spAutoFit/>
           </a:bodyPr>
           <a:lstStyle/>
@@ -26700,7 +27042,7 @@
           <a:noFill/>
         </p:spPr>
         <p:txBody>
-          <a:bodyPr wrap="square" lIns="0" rIns="0" tIns="0" bIns="0">
+          <a:bodyPr wrap="square" lIns="0" tIns="0" rIns="0" bIns="0">
             <a:spAutoFit/>
           </a:bodyPr>
           <a:lstStyle/>
@@ -26731,7 +27073,7 @@
 </file>
 
 <file path=ppt/slides/slide7.xml><?xml version="1.0" encoding="utf-8"?>
-<p:sld xmlns:a="http://schemas.openxmlformats.org/drawingml/2006/main" xmlns:p="http://schemas.openxmlformats.org/presentationml/2006/main" xmlns:r="http://schemas.openxmlformats.org/officeDocument/2006/relationships">
+<p:sld xmlns:a="http://schemas.openxmlformats.org/drawingml/2006/main" xmlns:r="http://schemas.openxmlformats.org/officeDocument/2006/relationships" xmlns:p="http://schemas.openxmlformats.org/presentationml/2006/main">
   <p:cSld>
     <p:bg>
       <p:bgPr>
@@ -26747,7 +27089,14 @@
         <p:cNvGrpSpPr/>
         <p:nvPr/>
       </p:nvGrpSpPr>
-      <p:grpSpPr/>
+      <p:grpSpPr>
+        <a:xfrm>
+          <a:off x="0" y="0"/>
+          <a:ext cx="0" cy="0"/>
+          <a:chOff x="0" y="0"/>
+          <a:chExt cx="0" cy="0"/>
+        </a:xfrm>
+      </p:grpSpPr>
       <p:sp>
         <p:nvSpPr>
           <p:cNvPr id="2" name="TextBox 1"/>
@@ -26765,7 +27114,7 @@
           <a:noFill/>
         </p:spPr>
         <p:txBody>
-          <a:bodyPr wrap="square" lIns="0" rIns="0" tIns="0" bIns="0">
+          <a:bodyPr wrap="square" lIns="0" tIns="0" rIns="0" bIns="0">
             <a:spAutoFit/>
           </a:bodyPr>
           <a:lstStyle/>
@@ -26804,7 +27153,7 @@
           <a:noFill/>
         </p:spPr>
         <p:txBody>
-          <a:bodyPr wrap="square" lIns="0" rIns="0" tIns="0" bIns="0">
+          <a:bodyPr wrap="square" lIns="0" tIns="0" rIns="0" bIns="0">
             <a:spAutoFit/>
           </a:bodyPr>
           <a:lstStyle/>
@@ -26865,7 +27214,7 @@
           </a:fontRef>
         </p:style>
         <p:txBody>
-          <a:bodyPr rtlCol="0" anchor="ctr" tIns="54864" bIns="54864" wrap="none"/>
+          <a:bodyPr wrap="none" tIns="54864" bIns="54864" rtlCol="0" anchor="ctr"/>
           <a:lstStyle/>
           <a:p>
             <a:pPr algn="ctr"/>
@@ -26898,7 +27247,7 @@
           <a:noFill/>
         </p:spPr>
         <p:txBody>
-          <a:bodyPr wrap="none" lIns="0" rIns="0" tIns="0" bIns="0" anchor="ctr">
+          <a:bodyPr wrap="none" lIns="0" tIns="0" rIns="0" bIns="0" anchor="ctr">
             <a:spAutoFit/>
           </a:bodyPr>
           <a:lstStyle/>
@@ -26959,7 +27308,7 @@
           </a:fontRef>
         </p:style>
         <p:txBody>
-          <a:bodyPr rtlCol="0" anchor="ctr" tIns="54864" bIns="54864" wrap="none"/>
+          <a:bodyPr wrap="none" tIns="54864" bIns="54864" rtlCol="0" anchor="ctr"/>
           <a:lstStyle/>
           <a:p>
             <a:pPr algn="ctr"/>
@@ -26992,7 +27341,7 @@
           <a:noFill/>
         </p:spPr>
         <p:txBody>
-          <a:bodyPr wrap="none" lIns="0" rIns="0" tIns="0" bIns="0" anchor="ctr">
+          <a:bodyPr wrap="none" lIns="0" tIns="0" rIns="0" bIns="0" anchor="ctr">
             <a:spAutoFit/>
           </a:bodyPr>
           <a:lstStyle/>
@@ -27053,7 +27402,7 @@
           </a:fontRef>
         </p:style>
         <p:txBody>
-          <a:bodyPr rtlCol="0" anchor="ctr" tIns="54864" bIns="54864" wrap="none"/>
+          <a:bodyPr wrap="none" tIns="54864" bIns="54864" rtlCol="0" anchor="ctr"/>
           <a:lstStyle/>
           <a:p>
             <a:pPr algn="ctr"/>
@@ -27086,7 +27435,7 @@
           <a:noFill/>
         </p:spPr>
         <p:txBody>
-          <a:bodyPr wrap="none" lIns="0" rIns="0" tIns="0" bIns="0" anchor="ctr">
+          <a:bodyPr wrap="none" lIns="0" tIns="0" rIns="0" bIns="0" anchor="ctr">
             <a:spAutoFit/>
           </a:bodyPr>
           <a:lstStyle/>
@@ -27147,7 +27496,7 @@
           </a:fontRef>
         </p:style>
         <p:txBody>
-          <a:bodyPr rtlCol="0" anchor="ctr" tIns="54864" bIns="54864" wrap="none"/>
+          <a:bodyPr wrap="none" tIns="54864" bIns="54864" rtlCol="0" anchor="ctr"/>
           <a:lstStyle/>
           <a:p>
             <a:pPr algn="ctr"/>
@@ -27180,7 +27529,7 @@
           <a:noFill/>
         </p:spPr>
         <p:txBody>
-          <a:bodyPr wrap="none" lIns="0" rIns="0" tIns="0" bIns="0" anchor="ctr">
+          <a:bodyPr wrap="none" lIns="0" tIns="0" rIns="0" bIns="0" anchor="ctr">
             <a:spAutoFit/>
           </a:bodyPr>
           <a:lstStyle/>
@@ -27241,7 +27590,7 @@
           </a:fontRef>
         </p:style>
         <p:txBody>
-          <a:bodyPr rtlCol="0" anchor="ctr" tIns="54864" bIns="54864" wrap="none"/>
+          <a:bodyPr wrap="none" tIns="54864" bIns="54864" rtlCol="0" anchor="ctr"/>
           <a:lstStyle/>
           <a:p>
             <a:pPr algn="ctr"/>
@@ -27274,7 +27623,7 @@
           <a:noFill/>
         </p:spPr>
         <p:txBody>
-          <a:bodyPr wrap="none" lIns="0" rIns="0" tIns="0" bIns="0" anchor="ctr">
+          <a:bodyPr wrap="none" lIns="0" tIns="0" rIns="0" bIns="0" anchor="ctr">
             <a:spAutoFit/>
           </a:bodyPr>
           <a:lstStyle/>
@@ -27335,7 +27684,7 @@
           </a:fontRef>
         </p:style>
         <p:txBody>
-          <a:bodyPr rtlCol="0" anchor="ctr" tIns="54864" bIns="54864" wrap="none"/>
+          <a:bodyPr wrap="none" tIns="54864" bIns="54864" rtlCol="0" anchor="ctr"/>
           <a:lstStyle/>
           <a:p>
             <a:pPr algn="ctr"/>
@@ -27392,10 +27741,11 @@
           </a:fontRef>
         </p:style>
         <p:txBody>
-          <a:bodyPr rtlCol="0" anchor="ctr" tIns="54864" bIns="54864"/>
+          <a:bodyPr tIns="54864" bIns="54864" rtlCol="0" anchor="ctr"/>
           <a:lstStyle/>
           <a:p>
             <a:pPr algn="ctr"/>
+            <a:endParaRPr/>
           </a:p>
         </p:txBody>
       </p:sp>
@@ -27416,7 +27766,7 @@
           <a:noFill/>
         </p:spPr>
         <p:txBody>
-          <a:bodyPr wrap="square" lIns="0" rIns="0" tIns="0" bIns="0">
+          <a:bodyPr wrap="square" lIns="0" tIns="0" rIns="0" bIns="0">
             <a:spAutoFit/>
           </a:bodyPr>
           <a:lstStyle/>
@@ -27455,7 +27805,7 @@
           <a:noFill/>
         </p:spPr>
         <p:txBody>
-          <a:bodyPr wrap="square" lIns="0" rIns="0" tIns="0" bIns="0">
+          <a:bodyPr wrap="square" lIns="0" tIns="0" rIns="0" bIns="0">
             <a:spAutoFit/>
           </a:bodyPr>
           <a:lstStyle/>
@@ -27520,10 +27870,11 @@
           </a:fontRef>
         </p:style>
         <p:txBody>
-          <a:bodyPr rtlCol="0" anchor="ctr" tIns="54864" bIns="54864"/>
+          <a:bodyPr tIns="54864" bIns="54864" rtlCol="0" anchor="ctr"/>
           <a:lstStyle/>
           <a:p>
             <a:pPr algn="ctr"/>
+            <a:endParaRPr/>
           </a:p>
         </p:txBody>
       </p:sp>
@@ -27544,7 +27895,7 @@
           <a:noFill/>
         </p:spPr>
         <p:txBody>
-          <a:bodyPr wrap="square" lIns="0" rIns="0" tIns="0" bIns="0">
+          <a:bodyPr wrap="square" lIns="0" tIns="0" rIns="0" bIns="0">
             <a:spAutoFit/>
           </a:bodyPr>
           <a:lstStyle/>
@@ -27583,7 +27934,7 @@
           <a:noFill/>
         </p:spPr>
         <p:txBody>
-          <a:bodyPr wrap="square" lIns="0" rIns="0" tIns="0" bIns="0">
+          <a:bodyPr wrap="square" lIns="0" tIns="0" rIns="0" bIns="0">
             <a:spAutoFit/>
           </a:bodyPr>
           <a:lstStyle/>
@@ -27661,7 +28012,7 @@
           <a:noFill/>
         </p:spPr>
         <p:txBody>
-          <a:bodyPr wrap="square" lIns="0" rIns="0" tIns="0" bIns="0">
+          <a:bodyPr wrap="square" lIns="0" tIns="0" rIns="0" bIns="0">
             <a:spAutoFit/>
           </a:bodyPr>
           <a:lstStyle/>
@@ -27724,10 +28075,11 @@
           </a:fontRef>
         </p:style>
         <p:txBody>
-          <a:bodyPr rtlCol="0" anchor="ctr" tIns="54864" bIns="54864"/>
+          <a:bodyPr tIns="54864" bIns="54864" rtlCol="0" anchor="ctr"/>
           <a:lstStyle/>
           <a:p>
             <a:pPr algn="ctr"/>
+            <a:endParaRPr/>
           </a:p>
         </p:txBody>
       </p:sp>
@@ -27748,7 +28100,7 @@
           <a:noFill/>
         </p:spPr>
         <p:txBody>
-          <a:bodyPr wrap="square" lIns="0" rIns="0" tIns="0" bIns="0">
+          <a:bodyPr wrap="square" lIns="0" tIns="0" rIns="0" bIns="0">
             <a:spAutoFit/>
           </a:bodyPr>
           <a:lstStyle/>
@@ -27787,7 +28139,7 @@
           <a:noFill/>
         </p:spPr>
         <p:txBody>
-          <a:bodyPr wrap="square" lIns="0" rIns="0" tIns="0" bIns="0">
+          <a:bodyPr wrap="square" lIns="0" tIns="0" rIns="0" bIns="0">
             <a:spAutoFit/>
           </a:bodyPr>
           <a:lstStyle/>
@@ -27851,10 +28203,11 @@
           </a:fontRef>
         </p:style>
         <p:txBody>
-          <a:bodyPr rtlCol="0" anchor="ctr" tIns="54864" bIns="54864"/>
+          <a:bodyPr tIns="54864" bIns="54864" rtlCol="0" anchor="ctr"/>
           <a:lstStyle/>
           <a:p>
             <a:pPr algn="ctr"/>
+            <a:endParaRPr/>
           </a:p>
         </p:txBody>
       </p:sp>
@@ -27875,7 +28228,7 @@
           <a:noFill/>
         </p:spPr>
         <p:txBody>
-          <a:bodyPr wrap="square" lIns="0" rIns="0" tIns="0" bIns="0">
+          <a:bodyPr wrap="square" lIns="0" tIns="0" rIns="0" bIns="0">
             <a:spAutoFit/>
           </a:bodyPr>
           <a:lstStyle/>
@@ -27914,7 +28267,7 @@
           <a:noFill/>
         </p:spPr>
         <p:txBody>
-          <a:bodyPr wrap="square" lIns="0" rIns="0" tIns="0" bIns="0">
+          <a:bodyPr wrap="square" lIns="0" tIns="0" rIns="0" bIns="0">
             <a:spAutoFit/>
           </a:bodyPr>
           <a:lstStyle/>
@@ -27979,10 +28332,11 @@
           </a:fontRef>
         </p:style>
         <p:txBody>
-          <a:bodyPr rtlCol="0" anchor="ctr" tIns="54864" bIns="54864"/>
+          <a:bodyPr tIns="54864" bIns="54864" rtlCol="0" anchor="ctr"/>
           <a:lstStyle/>
           <a:p>
             <a:pPr algn="ctr"/>
+            <a:endParaRPr/>
           </a:p>
         </p:txBody>
       </p:sp>
@@ -28003,7 +28357,7 @@
           <a:noFill/>
         </p:spPr>
         <p:txBody>
-          <a:bodyPr wrap="square" lIns="0" rIns="0" tIns="0" bIns="0">
+          <a:bodyPr wrap="square" lIns="0" tIns="0" rIns="0" bIns="0">
             <a:spAutoFit/>
           </a:bodyPr>
           <a:lstStyle/>
@@ -28043,7 +28397,7 @@
           <a:noFill/>
         </p:spPr>
         <p:txBody>
-          <a:bodyPr wrap="square" lIns="0" rIns="0" tIns="0" bIns="0">
+          <a:bodyPr wrap="square" lIns="0" tIns="0" rIns="0" bIns="0">
             <a:spAutoFit/>
           </a:bodyPr>
           <a:lstStyle/>
@@ -28107,10 +28461,11 @@
           </a:fontRef>
         </p:style>
         <p:txBody>
-          <a:bodyPr rtlCol="0" anchor="ctr" tIns="54864" bIns="54864"/>
+          <a:bodyPr tIns="54864" bIns="54864" rtlCol="0" anchor="ctr"/>
           <a:lstStyle/>
           <a:p>
             <a:pPr algn="ctr"/>
+            <a:endParaRPr/>
           </a:p>
         </p:txBody>
       </p:sp>
@@ -28131,7 +28486,7 @@
           <a:noFill/>
         </p:spPr>
         <p:txBody>
-          <a:bodyPr wrap="square" lIns="0" rIns="0" tIns="0" bIns="0">
+          <a:bodyPr wrap="square" lIns="0" tIns="0" rIns="0" bIns="0">
             <a:spAutoFit/>
           </a:bodyPr>
           <a:lstStyle/>
@@ -28170,7 +28525,7 @@
           <a:noFill/>
         </p:spPr>
         <p:txBody>
-          <a:bodyPr wrap="square" lIns="0" rIns="0" tIns="0" bIns="0">
+          <a:bodyPr wrap="square" lIns="0" tIns="0" rIns="0" bIns="0">
             <a:spAutoFit/>
           </a:bodyPr>
           <a:lstStyle/>
@@ -28247,7 +28602,7 @@
           <a:noFill/>
         </p:spPr>
         <p:txBody>
-          <a:bodyPr wrap="square" lIns="0" rIns="0" tIns="0" bIns="0">
+          <a:bodyPr wrap="square" lIns="0" tIns="0" rIns="0" bIns="0">
             <a:spAutoFit/>
           </a:bodyPr>
           <a:lstStyle/>
@@ -28359,7 +28714,7 @@
           <a:noFill/>
         </p:spPr>
         <p:txBody>
-          <a:bodyPr wrap="square" lIns="0" rIns="0" tIns="0" bIns="0">
+          <a:bodyPr wrap="square" lIns="0" tIns="0" rIns="0" bIns="0">
             <a:spAutoFit/>
           </a:bodyPr>
           <a:lstStyle/>
@@ -28422,10 +28777,11 @@
           </a:fontRef>
         </p:style>
         <p:txBody>
-          <a:bodyPr rtlCol="0" anchor="ctr" tIns="54864" bIns="54864"/>
+          <a:bodyPr tIns="54864" bIns="54864" rtlCol="0" anchor="ctr"/>
           <a:lstStyle/>
           <a:p>
             <a:pPr algn="ctr"/>
+            <a:endParaRPr/>
           </a:p>
         </p:txBody>
       </p:sp>
@@ -28446,7 +28802,7 @@
           <a:noFill/>
         </p:spPr>
         <p:txBody>
-          <a:bodyPr wrap="square" lIns="0" rIns="0" tIns="0" bIns="0">
+          <a:bodyPr wrap="square" lIns="0" tIns="0" rIns="0" bIns="0">
             <a:spAutoFit/>
           </a:bodyPr>
           <a:lstStyle/>
@@ -28485,7 +28841,7 @@
           <a:noFill/>
         </p:spPr>
         <p:txBody>
-          <a:bodyPr wrap="square" lIns="0" rIns="0" tIns="0" bIns="0">
+          <a:bodyPr wrap="square" lIns="0" tIns="0" rIns="0" bIns="0">
             <a:spAutoFit/>
           </a:bodyPr>
           <a:lstStyle/>
@@ -28548,10 +28904,11 @@
           </a:fontRef>
         </p:style>
         <p:txBody>
-          <a:bodyPr rtlCol="0" anchor="ctr" tIns="54864" bIns="54864"/>
+          <a:bodyPr tIns="54864" bIns="54864" rtlCol="0" anchor="ctr"/>
           <a:lstStyle/>
           <a:p>
             <a:pPr algn="ctr"/>
+            <a:endParaRPr/>
           </a:p>
         </p:txBody>
       </p:sp>
@@ -28572,7 +28929,7 @@
           <a:noFill/>
         </p:spPr>
         <p:txBody>
-          <a:bodyPr wrap="square" lIns="0" rIns="0" tIns="0" bIns="0">
+          <a:bodyPr wrap="square" lIns="0" tIns="0" rIns="0" bIns="0">
             <a:spAutoFit/>
           </a:bodyPr>
           <a:lstStyle/>
@@ -28611,7 +28968,7 @@
           <a:noFill/>
         </p:spPr>
         <p:txBody>
-          <a:bodyPr wrap="square" lIns="0" rIns="0" tIns="0" bIns="0">
+          <a:bodyPr wrap="square" lIns="0" tIns="0" rIns="0" bIns="0">
             <a:spAutoFit/>
           </a:bodyPr>
           <a:lstStyle/>
@@ -28674,10 +29031,11 @@
           </a:fontRef>
         </p:style>
         <p:txBody>
-          <a:bodyPr rtlCol="0" anchor="ctr" tIns="54864" bIns="54864"/>
+          <a:bodyPr tIns="54864" bIns="54864" rtlCol="0" anchor="ctr"/>
           <a:lstStyle/>
           <a:p>
             <a:pPr algn="ctr"/>
+            <a:endParaRPr/>
           </a:p>
         </p:txBody>
       </p:sp>
@@ -28698,7 +29056,7 @@
           <a:noFill/>
         </p:spPr>
         <p:txBody>
-          <a:bodyPr wrap="square" lIns="0" rIns="0" tIns="0" bIns="0">
+          <a:bodyPr wrap="square" lIns="0" tIns="0" rIns="0" bIns="0">
             <a:spAutoFit/>
           </a:bodyPr>
           <a:lstStyle/>
@@ -28737,7 +29095,7 @@
           <a:noFill/>
         </p:spPr>
         <p:txBody>
-          <a:bodyPr wrap="square" lIns="0" rIns="0" tIns="0" bIns="0">
+          <a:bodyPr wrap="square" lIns="0" tIns="0" rIns="0" bIns="0">
             <a:spAutoFit/>
           </a:bodyPr>
           <a:lstStyle/>
@@ -28768,7 +29126,7 @@
 </file>
 
 <file path=ppt/slides/slide8.xml><?xml version="1.0" encoding="utf-8"?>
-<p:sld xmlns:a="http://schemas.openxmlformats.org/drawingml/2006/main" xmlns:p="http://schemas.openxmlformats.org/presentationml/2006/main" xmlns:r="http://schemas.openxmlformats.org/officeDocument/2006/relationships">
+<p:sld xmlns:a="http://schemas.openxmlformats.org/drawingml/2006/main" xmlns:r="http://schemas.openxmlformats.org/officeDocument/2006/relationships" xmlns:p="http://schemas.openxmlformats.org/presentationml/2006/main">
   <p:cSld>
     <p:bg>
       <p:bgPr>
@@ -28784,7 +29142,14 @@
         <p:cNvGrpSpPr/>
         <p:nvPr/>
       </p:nvGrpSpPr>
-      <p:grpSpPr/>
+      <p:grpSpPr>
+        <a:xfrm>
+          <a:off x="0" y="0"/>
+          <a:ext cx="0" cy="0"/>
+          <a:chOff x="0" y="0"/>
+          <a:chExt cx="0" cy="0"/>
+        </a:xfrm>
+      </p:grpSpPr>
       <p:sp>
         <p:nvSpPr>
           <p:cNvPr id="2" name="TextBox 1"/>
@@ -28802,7 +29167,7 @@
           <a:noFill/>
         </p:spPr>
         <p:txBody>
-          <a:bodyPr wrap="square" lIns="0" rIns="0" tIns="0" bIns="0">
+          <a:bodyPr wrap="square" lIns="0" tIns="0" rIns="0" bIns="0">
             <a:spAutoFit/>
           </a:bodyPr>
           <a:lstStyle/>
@@ -28841,7 +29206,7 @@
           <a:noFill/>
         </p:spPr>
         <p:txBody>
-          <a:bodyPr wrap="square" lIns="0" rIns="0" tIns="0" bIns="0">
+          <a:bodyPr wrap="square" lIns="0" tIns="0" rIns="0" bIns="0">
             <a:spAutoFit/>
           </a:bodyPr>
           <a:lstStyle/>
@@ -28902,7 +29267,7 @@
           </a:fontRef>
         </p:style>
         <p:txBody>
-          <a:bodyPr rtlCol="0" anchor="ctr" tIns="54864" bIns="54864" wrap="none"/>
+          <a:bodyPr wrap="none" tIns="54864" bIns="54864" rtlCol="0" anchor="ctr"/>
           <a:lstStyle/>
           <a:p>
             <a:pPr algn="ctr"/>
@@ -28935,7 +29300,7 @@
           <a:noFill/>
         </p:spPr>
         <p:txBody>
-          <a:bodyPr wrap="none" lIns="0" rIns="0" tIns="0" bIns="0" anchor="ctr">
+          <a:bodyPr wrap="none" lIns="0" tIns="0" rIns="0" bIns="0" anchor="ctr">
             <a:spAutoFit/>
           </a:bodyPr>
           <a:lstStyle/>
@@ -28996,7 +29361,7 @@
           </a:fontRef>
         </p:style>
         <p:txBody>
-          <a:bodyPr rtlCol="0" anchor="ctr" tIns="54864" bIns="54864" wrap="none"/>
+          <a:bodyPr wrap="none" tIns="54864" bIns="54864" rtlCol="0" anchor="ctr"/>
           <a:lstStyle/>
           <a:p>
             <a:pPr algn="ctr"/>
@@ -29029,7 +29394,7 @@
           <a:noFill/>
         </p:spPr>
         <p:txBody>
-          <a:bodyPr wrap="none" lIns="0" rIns="0" tIns="0" bIns="0" anchor="ctr">
+          <a:bodyPr wrap="none" lIns="0" tIns="0" rIns="0" bIns="0" anchor="ctr">
             <a:spAutoFit/>
           </a:bodyPr>
           <a:lstStyle/>
@@ -29090,7 +29455,7 @@
           </a:fontRef>
         </p:style>
         <p:txBody>
-          <a:bodyPr rtlCol="0" anchor="ctr" tIns="54864" bIns="54864" wrap="none"/>
+          <a:bodyPr wrap="none" tIns="54864" bIns="54864" rtlCol="0" anchor="ctr"/>
           <a:lstStyle/>
           <a:p>
             <a:pPr algn="ctr"/>
@@ -29123,7 +29488,7 @@
           <a:noFill/>
         </p:spPr>
         <p:txBody>
-          <a:bodyPr wrap="none" lIns="0" rIns="0" tIns="0" bIns="0" anchor="ctr">
+          <a:bodyPr wrap="none" lIns="0" tIns="0" rIns="0" bIns="0" anchor="ctr">
             <a:spAutoFit/>
           </a:bodyPr>
           <a:lstStyle/>
@@ -29184,7 +29549,7 @@
           </a:fontRef>
         </p:style>
         <p:txBody>
-          <a:bodyPr rtlCol="0" anchor="ctr" tIns="54864" bIns="54864" wrap="none"/>
+          <a:bodyPr wrap="none" tIns="54864" bIns="54864" rtlCol="0" anchor="ctr"/>
           <a:lstStyle/>
           <a:p>
             <a:pPr algn="ctr"/>
@@ -29217,7 +29582,7 @@
           <a:noFill/>
         </p:spPr>
         <p:txBody>
-          <a:bodyPr wrap="none" lIns="0" rIns="0" tIns="0" bIns="0" anchor="ctr">
+          <a:bodyPr wrap="none" lIns="0" tIns="0" rIns="0" bIns="0" anchor="ctr">
             <a:spAutoFit/>
           </a:bodyPr>
           <a:lstStyle/>
@@ -29278,7 +29643,7 @@
           </a:fontRef>
         </p:style>
         <p:txBody>
-          <a:bodyPr rtlCol="0" anchor="ctr" tIns="54864" bIns="54864" wrap="none"/>
+          <a:bodyPr wrap="none" tIns="54864" bIns="54864" rtlCol="0" anchor="ctr"/>
           <a:lstStyle/>
           <a:p>
             <a:pPr algn="ctr"/>
@@ -29311,7 +29676,7 @@
           <a:noFill/>
         </p:spPr>
         <p:txBody>
-          <a:bodyPr wrap="none" lIns="0" rIns="0" tIns="0" bIns="0" anchor="ctr">
+          <a:bodyPr wrap="none" lIns="0" tIns="0" rIns="0" bIns="0" anchor="ctr">
             <a:spAutoFit/>
           </a:bodyPr>
           <a:lstStyle/>
@@ -29372,7 +29737,7 @@
           </a:fontRef>
         </p:style>
         <p:txBody>
-          <a:bodyPr rtlCol="0" anchor="ctr" tIns="54864" bIns="54864" wrap="none"/>
+          <a:bodyPr wrap="none" tIns="54864" bIns="54864" rtlCol="0" anchor="ctr"/>
           <a:lstStyle/>
           <a:p>
             <a:pPr algn="ctr"/>
@@ -29405,7 +29770,7 @@
           <a:noFill/>
         </p:spPr>
         <p:txBody>
-          <a:bodyPr wrap="square" lIns="0" rIns="0" tIns="0" bIns="0">
+          <a:bodyPr wrap="square" lIns="0" tIns="0" rIns="0" bIns="0">
             <a:spAutoFit/>
           </a:bodyPr>
           <a:lstStyle/>
@@ -29468,10 +29833,11 @@
           </a:fontRef>
         </p:style>
         <p:txBody>
-          <a:bodyPr rtlCol="0" anchor="ctr" tIns="54864" bIns="54864"/>
+          <a:bodyPr tIns="54864" bIns="54864" rtlCol="0" anchor="ctr"/>
           <a:lstStyle/>
           <a:p>
             <a:pPr algn="ctr"/>
+            <a:endParaRPr/>
           </a:p>
         </p:txBody>
       </p:sp>
@@ -29492,7 +29858,7 @@
           <a:noFill/>
         </p:spPr>
         <p:txBody>
-          <a:bodyPr wrap="square" lIns="0" rIns="0" tIns="0" bIns="0">
+          <a:bodyPr wrap="square" lIns="0" tIns="0" rIns="0" bIns="0">
             <a:spAutoFit/>
           </a:bodyPr>
           <a:lstStyle/>
@@ -29555,10 +29921,11 @@
           </a:fontRef>
         </p:style>
         <p:txBody>
-          <a:bodyPr rtlCol="0" anchor="ctr" tIns="54864" bIns="54864"/>
+          <a:bodyPr tIns="54864" bIns="54864" rtlCol="0" anchor="ctr"/>
           <a:lstStyle/>
           <a:p>
             <a:pPr algn="ctr"/>
+            <a:endParaRPr/>
           </a:p>
         </p:txBody>
       </p:sp>
@@ -29579,7 +29946,7 @@
           <a:noFill/>
         </p:spPr>
         <p:txBody>
-          <a:bodyPr wrap="square" lIns="0" rIns="0" tIns="0" bIns="0">
+          <a:bodyPr wrap="square" lIns="0" tIns="0" rIns="0" bIns="0">
             <a:spAutoFit/>
           </a:bodyPr>
           <a:lstStyle/>
@@ -29706,10 +30073,11 @@
           </a:fontRef>
         </p:style>
         <p:txBody>
-          <a:bodyPr rtlCol="0" anchor="ctr" tIns="54864" bIns="54864"/>
+          <a:bodyPr tIns="54864" bIns="54864" rtlCol="0" anchor="ctr"/>
           <a:lstStyle/>
           <a:p>
             <a:pPr algn="ctr"/>
+            <a:endParaRPr/>
           </a:p>
         </p:txBody>
       </p:sp>
@@ -29730,7 +30098,7 @@
           <a:noFill/>
         </p:spPr>
         <p:txBody>
-          <a:bodyPr wrap="square" lIns="0" rIns="0" tIns="0" bIns="0">
+          <a:bodyPr wrap="square" lIns="0" tIns="0" rIns="0" bIns="0">
             <a:spAutoFit/>
           </a:bodyPr>
           <a:lstStyle/>
@@ -29793,10 +30161,11 @@
           </a:fontRef>
         </p:style>
         <p:txBody>
-          <a:bodyPr rtlCol="0" anchor="ctr" tIns="54864" bIns="54864"/>
+          <a:bodyPr tIns="54864" bIns="54864" rtlCol="0" anchor="ctr"/>
           <a:lstStyle/>
           <a:p>
             <a:pPr algn="ctr"/>
+            <a:endParaRPr/>
           </a:p>
         </p:txBody>
       </p:sp>
@@ -29817,7 +30186,7 @@
           <a:noFill/>
         </p:spPr>
         <p:txBody>
-          <a:bodyPr wrap="square" lIns="0" rIns="0" tIns="0" bIns="0">
+          <a:bodyPr wrap="square" lIns="0" tIns="0" rIns="0" bIns="0">
             <a:spAutoFit/>
           </a:bodyPr>
           <a:lstStyle/>
@@ -29942,10 +30311,11 @@
           </a:fontRef>
         </p:style>
         <p:txBody>
-          <a:bodyPr rtlCol="0" anchor="ctr" tIns="54864" bIns="54864"/>
+          <a:bodyPr tIns="54864" bIns="54864" rtlCol="0" anchor="ctr"/>
           <a:lstStyle/>
           <a:p>
             <a:pPr algn="ctr"/>
+            <a:endParaRPr/>
           </a:p>
         </p:txBody>
       </p:sp>
@@ -29986,10 +30356,11 @@
           </a:fontRef>
         </p:style>
         <p:txBody>
-          <a:bodyPr rtlCol="0" anchor="ctr" tIns="54864" bIns="54864"/>
+          <a:bodyPr tIns="54864" bIns="54864" rtlCol="0" anchor="ctr"/>
           <a:lstStyle/>
           <a:p>
             <a:pPr algn="ctr"/>
+            <a:endParaRPr/>
           </a:p>
         </p:txBody>
       </p:sp>
@@ -30010,7 +30381,7 @@
           <a:noFill/>
         </p:spPr>
         <p:txBody>
-          <a:bodyPr wrap="square" lIns="0" rIns="0" tIns="0" bIns="0">
+          <a:bodyPr wrap="square" lIns="0" tIns="0" rIns="0" bIns="0">
             <a:spAutoFit/>
           </a:bodyPr>
           <a:lstStyle/>
@@ -30049,7 +30420,7 @@
           <a:noFill/>
         </p:spPr>
         <p:txBody>
-          <a:bodyPr wrap="square" lIns="0" rIns="0" tIns="0" bIns="0">
+          <a:bodyPr wrap="square" lIns="0" tIns="0" rIns="0" bIns="0">
             <a:spAutoFit/>
           </a:bodyPr>
           <a:lstStyle/>
@@ -30080,7 +30451,7 @@
 </file>
 
 <file path=ppt/slides/slide9.xml><?xml version="1.0" encoding="utf-8"?>
-<p:sld xmlns:a="http://schemas.openxmlformats.org/drawingml/2006/main" xmlns:p="http://schemas.openxmlformats.org/presentationml/2006/main" xmlns:r="http://schemas.openxmlformats.org/officeDocument/2006/relationships">
+<p:sld xmlns:a="http://schemas.openxmlformats.org/drawingml/2006/main" xmlns:r="http://schemas.openxmlformats.org/officeDocument/2006/relationships" xmlns:p="http://schemas.openxmlformats.org/presentationml/2006/main">
   <p:cSld>
     <p:bg>
       <p:bgPr>
@@ -30096,7 +30467,14 @@
         <p:cNvGrpSpPr/>
         <p:nvPr/>
       </p:nvGrpSpPr>
-      <p:grpSpPr/>
+      <p:grpSpPr>
+        <a:xfrm>
+          <a:off x="0" y="0"/>
+          <a:ext cx="0" cy="0"/>
+          <a:chOff x="0" y="0"/>
+          <a:chExt cx="0" cy="0"/>
+        </a:xfrm>
+      </p:grpSpPr>
       <p:sp>
         <p:nvSpPr>
           <p:cNvPr id="2" name="TextBox 1"/>
@@ -30114,7 +30492,7 @@
           <a:noFill/>
         </p:spPr>
         <p:txBody>
-          <a:bodyPr wrap="square" lIns="0" rIns="0" tIns="0" bIns="0">
+          <a:bodyPr wrap="square" lIns="0" tIns="0" rIns="0" bIns="0">
             <a:spAutoFit/>
           </a:bodyPr>
           <a:lstStyle/>
@@ -30153,7 +30531,7 @@
           <a:noFill/>
         </p:spPr>
         <p:txBody>
-          <a:bodyPr wrap="square" lIns="0" rIns="0" tIns="0" bIns="0">
+          <a:bodyPr wrap="square" lIns="0" tIns="0" rIns="0" bIns="0">
             <a:spAutoFit/>
           </a:bodyPr>
           <a:lstStyle/>
@@ -30214,7 +30592,7 @@
           </a:fontRef>
         </p:style>
         <p:txBody>
-          <a:bodyPr rtlCol="0" anchor="ctr" tIns="54864" bIns="54864" wrap="none"/>
+          <a:bodyPr wrap="none" tIns="54864" bIns="54864" rtlCol="0" anchor="ctr"/>
           <a:lstStyle/>
           <a:p>
             <a:pPr algn="ctr"/>
@@ -30247,7 +30625,7 @@
           <a:noFill/>
         </p:spPr>
         <p:txBody>
-          <a:bodyPr wrap="none" lIns="0" rIns="0" tIns="0" bIns="0" anchor="ctr">
+          <a:bodyPr wrap="none" lIns="0" tIns="0" rIns="0" bIns="0" anchor="ctr">
             <a:spAutoFit/>
           </a:bodyPr>
           <a:lstStyle/>
@@ -30308,7 +30686,7 @@
           </a:fontRef>
         </p:style>
         <p:txBody>
-          <a:bodyPr rtlCol="0" anchor="ctr" tIns="54864" bIns="54864" wrap="none"/>
+          <a:bodyPr wrap="none" tIns="54864" bIns="54864" rtlCol="0" anchor="ctr"/>
           <a:lstStyle/>
           <a:p>
             <a:pPr algn="ctr"/>
@@ -30341,7 +30719,7 @@
           <a:noFill/>
         </p:spPr>
         <p:txBody>
-          <a:bodyPr wrap="none" lIns="0" rIns="0" tIns="0" bIns="0" anchor="ctr">
+          <a:bodyPr wrap="none" lIns="0" tIns="0" rIns="0" bIns="0" anchor="ctr">
             <a:spAutoFit/>
           </a:bodyPr>
           <a:lstStyle/>
@@ -30402,7 +30780,7 @@
           </a:fontRef>
         </p:style>
         <p:txBody>
-          <a:bodyPr rtlCol="0" anchor="ctr" tIns="54864" bIns="54864" wrap="none"/>
+          <a:bodyPr wrap="none" tIns="54864" bIns="54864" rtlCol="0" anchor="ctr"/>
           <a:lstStyle/>
           <a:p>
             <a:pPr algn="ctr"/>
@@ -30435,7 +30813,7 @@
           <a:noFill/>
         </p:spPr>
         <p:txBody>
-          <a:bodyPr wrap="none" lIns="0" rIns="0" tIns="0" bIns="0" anchor="ctr">
+          <a:bodyPr wrap="none" lIns="0" tIns="0" rIns="0" bIns="0" anchor="ctr">
             <a:spAutoFit/>
           </a:bodyPr>
           <a:lstStyle/>
@@ -30496,7 +30874,7 @@
           </a:fontRef>
         </p:style>
         <p:txBody>
-          <a:bodyPr rtlCol="0" anchor="ctr" tIns="54864" bIns="54864" wrap="none"/>
+          <a:bodyPr wrap="none" tIns="54864" bIns="54864" rtlCol="0" anchor="ctr"/>
           <a:lstStyle/>
           <a:p>
             <a:pPr algn="ctr"/>
@@ -30529,7 +30907,7 @@
           <a:noFill/>
         </p:spPr>
         <p:txBody>
-          <a:bodyPr wrap="none" lIns="0" rIns="0" tIns="0" bIns="0" anchor="ctr">
+          <a:bodyPr wrap="none" lIns="0" tIns="0" rIns="0" bIns="0" anchor="ctr">
             <a:spAutoFit/>
           </a:bodyPr>
           <a:lstStyle/>
@@ -30590,7 +30968,7 @@
           </a:fontRef>
         </p:style>
         <p:txBody>
-          <a:bodyPr rtlCol="0" anchor="ctr" tIns="54864" bIns="54864" wrap="none"/>
+          <a:bodyPr wrap="none" tIns="54864" bIns="54864" rtlCol="0" anchor="ctr"/>
           <a:lstStyle/>
           <a:p>
             <a:pPr algn="ctr"/>
@@ -30623,7 +31001,7 @@
           <a:noFill/>
         </p:spPr>
         <p:txBody>
-          <a:bodyPr wrap="none" lIns="0" rIns="0" tIns="0" bIns="0" anchor="ctr">
+          <a:bodyPr wrap="none" lIns="0" tIns="0" rIns="0" bIns="0" anchor="ctr">
             <a:spAutoFit/>
           </a:bodyPr>
           <a:lstStyle/>
@@ -30684,7 +31062,7 @@
           </a:fontRef>
         </p:style>
         <p:txBody>
-          <a:bodyPr rtlCol="0" anchor="ctr" tIns="54864" bIns="54864" wrap="none"/>
+          <a:bodyPr wrap="none" tIns="54864" bIns="54864" rtlCol="0" anchor="ctr"/>
           <a:lstStyle/>
           <a:p>
             <a:pPr algn="ctr"/>
@@ -30717,7 +31095,7 @@
           <a:noFill/>
         </p:spPr>
         <p:txBody>
-          <a:bodyPr wrap="square" lIns="0" rIns="0" tIns="0" bIns="0">
+          <a:bodyPr wrap="square" lIns="0" tIns="0" rIns="0" bIns="0">
             <a:spAutoFit/>
           </a:bodyPr>
           <a:lstStyle/>
@@ -30780,6 +31158,7 @@
           <a:lstStyle/>
           <a:p>
             <a:pPr algn="ctr"/>
+            <a:endParaRPr/>
           </a:p>
         </p:txBody>
       </p:sp>
@@ -30800,7 +31179,7 @@
           <a:noFill/>
         </p:spPr>
         <p:txBody>
-          <a:bodyPr wrap="square" lIns="0" rIns="0" tIns="0" bIns="0" anchor="ctr">
+          <a:bodyPr wrap="square" lIns="0" tIns="0" rIns="0" bIns="0" anchor="ctr">
             <a:spAutoFit/>
           </a:bodyPr>
           <a:lstStyle/>
@@ -30839,7 +31218,7 @@
           <a:noFill/>
         </p:spPr>
         <p:txBody>
-          <a:bodyPr wrap="square" lIns="0" rIns="0" tIns="0" bIns="0">
+          <a:bodyPr wrap="square" lIns="0" tIns="0" rIns="0" bIns="0">
             <a:spAutoFit/>
           </a:bodyPr>
           <a:lstStyle/>
@@ -30902,6 +31281,7 @@
           <a:lstStyle/>
           <a:p>
             <a:pPr algn="ctr"/>
+            <a:endParaRPr/>
           </a:p>
         </p:txBody>
       </p:sp>
@@ -30922,7 +31302,7 @@
           <a:noFill/>
         </p:spPr>
         <p:txBody>
-          <a:bodyPr wrap="square" lIns="0" rIns="0" tIns="0" bIns="0" anchor="ctr">
+          <a:bodyPr wrap="square" lIns="0" tIns="0" rIns="0" bIns="0" anchor="ctr">
             <a:spAutoFit/>
           </a:bodyPr>
           <a:lstStyle/>
@@ -30961,7 +31341,7 @@
           <a:noFill/>
         </p:spPr>
         <p:txBody>
-          <a:bodyPr wrap="square" lIns="0" rIns="0" tIns="0" bIns="0">
+          <a:bodyPr wrap="square" lIns="0" tIns="0" rIns="0" bIns="0">
             <a:spAutoFit/>
           </a:bodyPr>
           <a:lstStyle/>
@@ -31024,6 +31404,7 @@
           <a:lstStyle/>
           <a:p>
             <a:pPr algn="ctr"/>
+            <a:endParaRPr/>
           </a:p>
         </p:txBody>
       </p:sp>
@@ -31044,7 +31425,7 @@
           <a:noFill/>
         </p:spPr>
         <p:txBody>
-          <a:bodyPr wrap="square" lIns="0" rIns="0" tIns="0" bIns="0" anchor="ctr">
+          <a:bodyPr wrap="square" lIns="0" tIns="0" rIns="0" bIns="0" anchor="ctr">
             <a:spAutoFit/>
           </a:bodyPr>
           <a:lstStyle/>
@@ -31083,7 +31464,7 @@
           <a:noFill/>
         </p:spPr>
         <p:txBody>
-          <a:bodyPr wrap="square" lIns="0" rIns="0" tIns="0" bIns="0">
+          <a:bodyPr wrap="square" lIns="0" tIns="0" rIns="0" bIns="0">
             <a:spAutoFit/>
           </a:bodyPr>
           <a:lstStyle/>
@@ -31146,6 +31527,7 @@
           <a:lstStyle/>
           <a:p>
             <a:pPr algn="ctr"/>
+            <a:endParaRPr/>
           </a:p>
         </p:txBody>
       </p:sp>
@@ -31166,7 +31548,7 @@
           <a:noFill/>
         </p:spPr>
         <p:txBody>
-          <a:bodyPr wrap="square" lIns="0" rIns="0" tIns="0" bIns="0" anchor="ctr">
+          <a:bodyPr wrap="square" lIns="0" tIns="0" rIns="0" bIns="0" anchor="ctr">
             <a:spAutoFit/>
           </a:bodyPr>
           <a:lstStyle/>
@@ -31205,7 +31587,7 @@
           <a:noFill/>
         </p:spPr>
         <p:txBody>
-          <a:bodyPr wrap="square" lIns="0" rIns="0" tIns="0" bIns="0">
+          <a:bodyPr wrap="square" lIns="0" tIns="0" rIns="0" bIns="0">
             <a:spAutoFit/>
           </a:bodyPr>
           <a:lstStyle/>
@@ -31268,6 +31650,7 @@
           <a:lstStyle/>
           <a:p>
             <a:pPr algn="ctr"/>
+            <a:endParaRPr/>
           </a:p>
         </p:txBody>
       </p:sp>
@@ -31288,7 +31671,7 @@
           <a:noFill/>
         </p:spPr>
         <p:txBody>
-          <a:bodyPr wrap="square" lIns="0" rIns="0" tIns="0" bIns="0" anchor="ctr">
+          <a:bodyPr wrap="square" lIns="0" tIns="0" rIns="0" bIns="0" anchor="ctr">
             <a:spAutoFit/>
           </a:bodyPr>
           <a:lstStyle/>
@@ -31327,7 +31710,7 @@
           <a:noFill/>
         </p:spPr>
         <p:txBody>
-          <a:bodyPr wrap="square" lIns="0" rIns="0" tIns="0" bIns="0">
+          <a:bodyPr wrap="square" lIns="0" tIns="0" rIns="0" bIns="0">
             <a:spAutoFit/>
           </a:bodyPr>
           <a:lstStyle/>
@@ -31390,6 +31773,7 @@
           <a:lstStyle/>
           <a:p>
             <a:pPr algn="ctr"/>
+            <a:endParaRPr/>
           </a:p>
         </p:txBody>
       </p:sp>
@@ -31410,7 +31794,7 @@
           <a:noFill/>
         </p:spPr>
         <p:txBody>
-          <a:bodyPr wrap="square" lIns="0" rIns="0" tIns="0" bIns="0" anchor="ctr">
+          <a:bodyPr wrap="square" lIns="0" tIns="0" rIns="0" bIns="0" anchor="ctr">
             <a:spAutoFit/>
           </a:bodyPr>
           <a:lstStyle/>
@@ -31449,7 +31833,7 @@
           <a:noFill/>
         </p:spPr>
         <p:txBody>
-          <a:bodyPr wrap="square" lIns="0" rIns="0" tIns="0" bIns="0">
+          <a:bodyPr wrap="square" lIns="0" tIns="0" rIns="0" bIns="0">
             <a:spAutoFit/>
           </a:bodyPr>
           <a:lstStyle/>
@@ -31510,10 +31894,11 @@
           </a:fontRef>
         </p:style>
         <p:txBody>
-          <a:bodyPr rtlCol="0" anchor="ctr" tIns="54864" bIns="54864"/>
+          <a:bodyPr tIns="54864" bIns="54864" rtlCol="0" anchor="ctr"/>
           <a:lstStyle/>
           <a:p>
             <a:pPr algn="ctr"/>
+            <a:endParaRPr/>
           </a:p>
         </p:txBody>
       </p:sp>
@@ -31554,10 +31939,11 @@
           </a:fontRef>
         </p:style>
         <p:txBody>
-          <a:bodyPr rtlCol="0" anchor="ctr" tIns="54864" bIns="54864"/>
+          <a:bodyPr tIns="54864" bIns="54864" rtlCol="0" anchor="ctr"/>
           <a:lstStyle/>
           <a:p>
             <a:pPr algn="ctr"/>
+            <a:endParaRPr/>
           </a:p>
         </p:txBody>
       </p:sp>
@@ -31578,7 +31964,7 @@
           <a:noFill/>
         </p:spPr>
         <p:txBody>
-          <a:bodyPr wrap="square" lIns="0" rIns="0" tIns="0" bIns="0">
+          <a:bodyPr wrap="square" lIns="0" tIns="0" rIns="0" bIns="0">
             <a:spAutoFit/>
           </a:bodyPr>
           <a:lstStyle/>
@@ -31617,7 +32003,7 @@
           <a:noFill/>
         </p:spPr>
         <p:txBody>
-          <a:bodyPr wrap="square" lIns="0" rIns="0" tIns="0" bIns="0">
+          <a:bodyPr wrap="square" lIns="0" tIns="0" rIns="0" bIns="0">
             <a:spAutoFit/>
           </a:bodyPr>
           <a:lstStyle/>
